--- a/RISCVstage3.pptx
+++ b/RISCVstage3.pptx
@@ -115,7 +115,7 @@
 <file path=ppt/revisionInfo.xml><?xml version="1.0" encoding="utf-8"?>
 <p1510:revInfo xmlns:a="http://schemas.openxmlformats.org/drawingml/2006/main" xmlns:r="http://schemas.openxmlformats.org/officeDocument/2006/relationships" xmlns:p1510="http://schemas.microsoft.com/office/powerpoint/2015/10/main">
   <p1510:revLst>
-    <p1510:client id="{E75867FF-49DB-4DC0-967A-A19776D02C5E}" v="2" dt="2026-03-05T22:38:37.733"/>
+    <p1510:client id="{E75867FF-49DB-4DC0-967A-A19776D02C5E}" v="4" dt="2026-03-10T16:48:05.976"/>
   </p1510:revLst>
 </p1510:revInfo>
 </file>
@@ -124,13 +124,13 @@
 <pc:chgInfo xmlns:a="http://schemas.openxmlformats.org/drawingml/2006/main" xmlns:r="http://schemas.openxmlformats.org/officeDocument/2006/relationships" xmlns:ac="http://schemas.microsoft.com/office/drawing/2013/main/command" xmlns:pc="http://schemas.microsoft.com/office/powerpoint/2013/main/command">
   <pc:docChgLst>
     <pc:chgData name="York, George W CIV USAF USAFA DF/DFEC" userId="1fb5875a-4594-4db2-80fb-f0db3de11280" providerId="ADAL" clId="{09330963-85FD-4C99-A81B-94D0EE5CFFEB}"/>
-    <pc:docChg chg="modSld">
-      <pc:chgData name="York, George W CIV USAF USAFA DF/DFEC" userId="1fb5875a-4594-4db2-80fb-f0db3de11280" providerId="ADAL" clId="{09330963-85FD-4C99-A81B-94D0EE5CFFEB}" dt="2026-03-05T22:46:17.762" v="4" actId="20577"/>
+    <pc:docChg chg="custSel modSld">
+      <pc:chgData name="York, George W CIV USAF USAFA DF/DFEC" userId="1fb5875a-4594-4db2-80fb-f0db3de11280" providerId="ADAL" clId="{09330963-85FD-4C99-A81B-94D0EE5CFFEB}" dt="2026-03-10T16:48:05.976" v="8"/>
       <pc:docMkLst>
         <pc:docMk/>
       </pc:docMkLst>
-      <pc:sldChg chg="addSp modSp mod">
-        <pc:chgData name="York, George W CIV USAF USAFA DF/DFEC" userId="1fb5875a-4594-4db2-80fb-f0db3de11280" providerId="ADAL" clId="{09330963-85FD-4C99-A81B-94D0EE5CFFEB}" dt="2026-03-05T22:46:17.762" v="4" actId="20577"/>
+      <pc:sldChg chg="addSp delSp modSp mod">
+        <pc:chgData name="York, George W CIV USAF USAFA DF/DFEC" userId="1fb5875a-4594-4db2-80fb-f0db3de11280" providerId="ADAL" clId="{09330963-85FD-4C99-A81B-94D0EE5CFFEB}" dt="2026-03-10T16:48:05.976" v="8"/>
         <pc:sldMkLst>
           <pc:docMk/>
           <pc:sldMk cId="1501170907" sldId="256"/>
@@ -143,8 +143,48 @@
             <ac:spMk id="4" creationId="{FB55267A-D19E-887C-DE49-0FCC56FF700B}"/>
           </ac:spMkLst>
         </pc:spChg>
-        <pc:spChg chg="add mod">
-          <ac:chgData name="York, George W CIV USAF USAFA DF/DFEC" userId="1fb5875a-4594-4db2-80fb-f0db3de11280" providerId="ADAL" clId="{09330963-85FD-4C99-A81B-94D0EE5CFFEB}" dt="2026-03-05T22:38:42.118" v="2" actId="1076"/>
+        <pc:spChg chg="del">
+          <ac:chgData name="York, George W CIV USAF USAFA DF/DFEC" userId="1fb5875a-4594-4db2-80fb-f0db3de11280" providerId="ADAL" clId="{09330963-85FD-4C99-A81B-94D0EE5CFFEB}" dt="2026-03-10T16:47:43.899" v="5" actId="478"/>
+          <ac:spMkLst>
+            <pc:docMk/>
+            <pc:sldMk cId="1501170907" sldId="256"/>
+            <ac:spMk id="54" creationId="{7C5CCBD1-0844-480F-8141-9A9CAA44FF50}"/>
+          </ac:spMkLst>
+        </pc:spChg>
+        <pc:spChg chg="del">
+          <ac:chgData name="York, George W CIV USAF USAFA DF/DFEC" userId="1fb5875a-4594-4db2-80fb-f0db3de11280" providerId="ADAL" clId="{09330963-85FD-4C99-A81B-94D0EE5CFFEB}" dt="2026-03-10T16:47:43.899" v="5" actId="478"/>
+          <ac:spMkLst>
+            <pc:docMk/>
+            <pc:sldMk cId="1501170907" sldId="256"/>
+            <ac:spMk id="57" creationId="{BE8947B1-691B-936E-60AD-9FDFE4A4EA75}"/>
+          </ac:spMkLst>
+        </pc:spChg>
+        <pc:spChg chg="del">
+          <ac:chgData name="York, George W CIV USAF USAFA DF/DFEC" userId="1fb5875a-4594-4db2-80fb-f0db3de11280" providerId="ADAL" clId="{09330963-85FD-4C99-A81B-94D0EE5CFFEB}" dt="2026-03-10T16:47:43.899" v="5" actId="478"/>
+          <ac:spMkLst>
+            <pc:docMk/>
+            <pc:sldMk cId="1501170907" sldId="256"/>
+            <ac:spMk id="59" creationId="{62908768-78CB-6AA2-9F8F-560147BBA50C}"/>
+          </ac:spMkLst>
+        </pc:spChg>
+        <pc:spChg chg="del">
+          <ac:chgData name="York, George W CIV USAF USAFA DF/DFEC" userId="1fb5875a-4594-4db2-80fb-f0db3de11280" providerId="ADAL" clId="{09330963-85FD-4C99-A81B-94D0EE5CFFEB}" dt="2026-03-10T16:47:43.899" v="5" actId="478"/>
+          <ac:spMkLst>
+            <pc:docMk/>
+            <pc:sldMk cId="1501170907" sldId="256"/>
+            <ac:spMk id="80" creationId="{55A3E227-0BF3-A73B-3BC7-43B3ED0C951A}"/>
+          </ac:spMkLst>
+        </pc:spChg>
+        <pc:spChg chg="del">
+          <ac:chgData name="York, George W CIV USAF USAFA DF/DFEC" userId="1fb5875a-4594-4db2-80fb-f0db3de11280" providerId="ADAL" clId="{09330963-85FD-4C99-A81B-94D0EE5CFFEB}" dt="2026-03-10T16:47:43.899" v="5" actId="478"/>
+          <ac:spMkLst>
+            <pc:docMk/>
+            <pc:sldMk cId="1501170907" sldId="256"/>
+            <ac:spMk id="84" creationId="{D1142331-E346-04E4-CE7D-40DA0254B7E8}"/>
+          </ac:spMkLst>
+        </pc:spChg>
+        <pc:spChg chg="add del mod">
+          <ac:chgData name="York, George W CIV USAF USAFA DF/DFEC" userId="1fb5875a-4594-4db2-80fb-f0db3de11280" providerId="ADAL" clId="{09330963-85FD-4C99-A81B-94D0EE5CFFEB}" dt="2026-03-10T16:47:43.899" v="5" actId="478"/>
           <ac:spMkLst>
             <pc:docMk/>
             <pc:sldMk cId="1501170907" sldId="256"/>
@@ -183,6 +223,142 @@
             <ac:spMk id="110" creationId="{F182B11B-81F0-C7FD-76B3-7C27A04FAE43}"/>
           </ac:spMkLst>
         </pc:spChg>
+        <pc:spChg chg="add mod">
+          <ac:chgData name="York, George W CIV USAF USAFA DF/DFEC" userId="1fb5875a-4594-4db2-80fb-f0db3de11280" providerId="ADAL" clId="{09330963-85FD-4C99-A81B-94D0EE5CFFEB}" dt="2026-03-10T16:47:45.074" v="6"/>
+          <ac:spMkLst>
+            <pc:docMk/>
+            <pc:sldMk cId="1501170907" sldId="256"/>
+            <ac:spMk id="140" creationId="{42D03EFD-C681-4EA9-84D6-2D58957476C9}"/>
+          </ac:spMkLst>
+        </pc:spChg>
+        <pc:spChg chg="add mod">
+          <ac:chgData name="York, George W CIV USAF USAFA DF/DFEC" userId="1fb5875a-4594-4db2-80fb-f0db3de11280" providerId="ADAL" clId="{09330963-85FD-4C99-A81B-94D0EE5CFFEB}" dt="2026-03-10T16:47:45.074" v="6"/>
+          <ac:spMkLst>
+            <pc:docMk/>
+            <pc:sldMk cId="1501170907" sldId="256"/>
+            <ac:spMk id="141" creationId="{130DB228-30F1-3EAB-8348-ADF6B84F5227}"/>
+          </ac:spMkLst>
+        </pc:spChg>
+        <pc:spChg chg="add mod">
+          <ac:chgData name="York, George W CIV USAF USAFA DF/DFEC" userId="1fb5875a-4594-4db2-80fb-f0db3de11280" providerId="ADAL" clId="{09330963-85FD-4C99-A81B-94D0EE5CFFEB}" dt="2026-03-10T16:47:45.074" v="6"/>
+          <ac:spMkLst>
+            <pc:docMk/>
+            <pc:sldMk cId="1501170907" sldId="256"/>
+            <ac:spMk id="143" creationId="{28B52DA0-5124-B1DD-6399-E77E9F27E337}"/>
+          </ac:spMkLst>
+        </pc:spChg>
+        <pc:spChg chg="add mod">
+          <ac:chgData name="York, George W CIV USAF USAFA DF/DFEC" userId="1fb5875a-4594-4db2-80fb-f0db3de11280" providerId="ADAL" clId="{09330963-85FD-4C99-A81B-94D0EE5CFFEB}" dt="2026-03-10T16:47:45.074" v="6"/>
+          <ac:spMkLst>
+            <pc:docMk/>
+            <pc:sldMk cId="1501170907" sldId="256"/>
+            <ac:spMk id="154" creationId="{A1848007-5C57-2514-E0D9-E9FAA0E1581E}"/>
+          </ac:spMkLst>
+        </pc:spChg>
+        <pc:spChg chg="add mod">
+          <ac:chgData name="York, George W CIV USAF USAFA DF/DFEC" userId="1fb5875a-4594-4db2-80fb-f0db3de11280" providerId="ADAL" clId="{09330963-85FD-4C99-A81B-94D0EE5CFFEB}" dt="2026-03-10T16:47:45.074" v="6"/>
+          <ac:spMkLst>
+            <pc:docMk/>
+            <pc:sldMk cId="1501170907" sldId="256"/>
+            <ac:spMk id="156" creationId="{8EE68CD5-3828-66D3-CF69-264F08A0AC09}"/>
+          </ac:spMkLst>
+        </pc:spChg>
+        <pc:spChg chg="add mod">
+          <ac:chgData name="York, George W CIV USAF USAFA DF/DFEC" userId="1fb5875a-4594-4db2-80fb-f0db3de11280" providerId="ADAL" clId="{09330963-85FD-4C99-A81B-94D0EE5CFFEB}" dt="2026-03-10T16:47:45.074" v="6"/>
+          <ac:spMkLst>
+            <pc:docMk/>
+            <pc:sldMk cId="1501170907" sldId="256"/>
+            <ac:spMk id="174" creationId="{7519AAD8-ECD9-BCFB-E19F-03D8220E44C3}"/>
+          </ac:spMkLst>
+        </pc:spChg>
+        <pc:spChg chg="add mod">
+          <ac:chgData name="York, George W CIV USAF USAFA DF/DFEC" userId="1fb5875a-4594-4db2-80fb-f0db3de11280" providerId="ADAL" clId="{09330963-85FD-4C99-A81B-94D0EE5CFFEB}" dt="2026-03-10T16:47:45.074" v="6"/>
+          <ac:spMkLst>
+            <pc:docMk/>
+            <pc:sldMk cId="1501170907" sldId="256"/>
+            <ac:spMk id="186" creationId="{4DF51EAB-8861-0396-BAA6-9479806818EB}"/>
+          </ac:spMkLst>
+        </pc:spChg>
+        <pc:spChg chg="add mod">
+          <ac:chgData name="York, George W CIV USAF USAFA DF/DFEC" userId="1fb5875a-4594-4db2-80fb-f0db3de11280" providerId="ADAL" clId="{09330963-85FD-4C99-A81B-94D0EE5CFFEB}" dt="2026-03-10T16:47:45.074" v="6"/>
+          <ac:spMkLst>
+            <pc:docMk/>
+            <pc:sldMk cId="1501170907" sldId="256"/>
+            <ac:spMk id="187" creationId="{02F76C24-B5A2-EF6E-0213-72D63A9FAEFB}"/>
+          </ac:spMkLst>
+        </pc:spChg>
+        <pc:spChg chg="del">
+          <ac:chgData name="York, George W CIV USAF USAFA DF/DFEC" userId="1fb5875a-4594-4db2-80fb-f0db3de11280" providerId="ADAL" clId="{09330963-85FD-4C99-A81B-94D0EE5CFFEB}" dt="2026-03-10T16:47:43.899" v="5" actId="478"/>
+          <ac:spMkLst>
+            <pc:docMk/>
+            <pc:sldMk cId="1501170907" sldId="256"/>
+            <ac:spMk id="264" creationId="{18102C07-F7E1-1AF1-477B-00B68F177F07}"/>
+          </ac:spMkLst>
+        </pc:spChg>
+        <pc:spChg chg="del">
+          <ac:chgData name="York, George W CIV USAF USAFA DF/DFEC" userId="1fb5875a-4594-4db2-80fb-f0db3de11280" providerId="ADAL" clId="{09330963-85FD-4C99-A81B-94D0EE5CFFEB}" dt="2026-03-10T16:47:43.899" v="5" actId="478"/>
+          <ac:spMkLst>
+            <pc:docMk/>
+            <pc:sldMk cId="1501170907" sldId="256"/>
+            <ac:spMk id="265" creationId="{00A05C49-A5A2-CC74-BAEB-00CF47323BC9}"/>
+          </ac:spMkLst>
+        </pc:spChg>
+        <pc:spChg chg="del">
+          <ac:chgData name="York, George W CIV USAF USAFA DF/DFEC" userId="1fb5875a-4594-4db2-80fb-f0db3de11280" providerId="ADAL" clId="{09330963-85FD-4C99-A81B-94D0EE5CFFEB}" dt="2026-03-10T16:47:43.899" v="5" actId="478"/>
+          <ac:spMkLst>
+            <pc:docMk/>
+            <pc:sldMk cId="1501170907" sldId="256"/>
+            <ac:spMk id="266" creationId="{B178740B-BE6B-31B0-B4FD-0ED1D3EABF36}"/>
+          </ac:spMkLst>
+        </pc:spChg>
+        <pc:grpChg chg="del">
+          <ac:chgData name="York, George W CIV USAF USAFA DF/DFEC" userId="1fb5875a-4594-4db2-80fb-f0db3de11280" providerId="ADAL" clId="{09330963-85FD-4C99-A81B-94D0EE5CFFEB}" dt="2026-03-10T16:47:43.899" v="5" actId="478"/>
+          <ac:grpSpMkLst>
+            <pc:docMk/>
+            <pc:sldMk cId="1501170907" sldId="256"/>
+            <ac:grpSpMk id="61" creationId="{16FC76F5-1B0B-DFD2-2DFE-467D7246D31F}"/>
+          </ac:grpSpMkLst>
+        </pc:grpChg>
+        <pc:grpChg chg="add mod">
+          <ac:chgData name="York, George W CIV USAF USAFA DF/DFEC" userId="1fb5875a-4594-4db2-80fb-f0db3de11280" providerId="ADAL" clId="{09330963-85FD-4C99-A81B-94D0EE5CFFEB}" dt="2026-03-10T16:47:45.074" v="6"/>
+          <ac:grpSpMkLst>
+            <pc:docMk/>
+            <pc:sldMk cId="1501170907" sldId="256"/>
+            <ac:grpSpMk id="131" creationId="{7985B0F1-5D5A-96E1-0D14-965720B89EB9}"/>
+          </ac:grpSpMkLst>
+        </pc:grpChg>
+        <pc:grpChg chg="add mod">
+          <ac:chgData name="York, George W CIV USAF USAFA DF/DFEC" userId="1fb5875a-4594-4db2-80fb-f0db3de11280" providerId="ADAL" clId="{09330963-85FD-4C99-A81B-94D0EE5CFFEB}" dt="2026-03-10T16:47:45.074" v="6"/>
+          <ac:grpSpMkLst>
+            <pc:docMk/>
+            <pc:sldMk cId="1501170907" sldId="256"/>
+            <ac:grpSpMk id="144" creationId="{668D9262-FD4F-8437-B65A-FF28CF8998C5}"/>
+          </ac:grpSpMkLst>
+        </pc:grpChg>
+        <pc:cxnChg chg="del">
+          <ac:chgData name="York, George W CIV USAF USAFA DF/DFEC" userId="1fb5875a-4594-4db2-80fb-f0db3de11280" providerId="ADAL" clId="{09330963-85FD-4C99-A81B-94D0EE5CFFEB}" dt="2026-03-10T16:47:53.742" v="7" actId="478"/>
+          <ac:cxnSpMkLst>
+            <pc:docMk/>
+            <pc:sldMk cId="1501170907" sldId="256"/>
+            <ac:cxnSpMk id="17" creationId="{D24E488E-A173-AFA0-3F6A-78FF8CC6952B}"/>
+          </ac:cxnSpMkLst>
+        </pc:cxnChg>
+        <pc:cxnChg chg="del">
+          <ac:chgData name="York, George W CIV USAF USAFA DF/DFEC" userId="1fb5875a-4594-4db2-80fb-f0db3de11280" providerId="ADAL" clId="{09330963-85FD-4C99-A81B-94D0EE5CFFEB}" dt="2026-03-10T16:47:53.742" v="7" actId="478"/>
+          <ac:cxnSpMkLst>
+            <pc:docMk/>
+            <pc:sldMk cId="1501170907" sldId="256"/>
+            <ac:cxnSpMk id="26" creationId="{EFC7A41C-61ED-49E4-BA0B-27EC82F62902}"/>
+          </ac:cxnSpMkLst>
+        </pc:cxnChg>
+        <pc:cxnChg chg="del">
+          <ac:chgData name="York, George W CIV USAF USAFA DF/DFEC" userId="1fb5875a-4594-4db2-80fb-f0db3de11280" providerId="ADAL" clId="{09330963-85FD-4C99-A81B-94D0EE5CFFEB}" dt="2026-03-10T16:47:53.742" v="7" actId="478"/>
+          <ac:cxnSpMkLst>
+            <pc:docMk/>
+            <pc:sldMk cId="1501170907" sldId="256"/>
+            <ac:cxnSpMk id="28" creationId="{EE79F449-2B1D-87A9-9E7B-9DD8C11C7B9B}"/>
+          </ac:cxnSpMkLst>
+        </pc:cxnChg>
         <pc:cxnChg chg="add mod">
           <ac:chgData name="York, George W CIV USAF USAFA DF/DFEC" userId="1fb5875a-4594-4db2-80fb-f0db3de11280" providerId="ADAL" clId="{09330963-85FD-4C99-A81B-94D0EE5CFFEB}" dt="2026-03-05T22:29:55.846" v="0"/>
           <ac:cxnSpMkLst>
@@ -231,6 +407,22 @@
             <ac:cxnSpMk id="128" creationId="{2FF7584B-44F4-AC4F-1A2B-A5EEAC3183AF}"/>
           </ac:cxnSpMkLst>
         </pc:cxnChg>
+        <pc:cxnChg chg="add mod">
+          <ac:chgData name="York, George W CIV USAF USAFA DF/DFEC" userId="1fb5875a-4594-4db2-80fb-f0db3de11280" providerId="ADAL" clId="{09330963-85FD-4C99-A81B-94D0EE5CFFEB}" dt="2026-03-10T16:48:05.976" v="8"/>
+          <ac:cxnSpMkLst>
+            <pc:docMk/>
+            <pc:sldMk cId="1501170907" sldId="256"/>
+            <ac:cxnSpMk id="189" creationId="{4F79E217-E351-6707-29A8-684823FCD841}"/>
+          </ac:cxnSpMkLst>
+        </pc:cxnChg>
+        <pc:cxnChg chg="add mod">
+          <ac:chgData name="York, George W CIV USAF USAFA DF/DFEC" userId="1fb5875a-4594-4db2-80fb-f0db3de11280" providerId="ADAL" clId="{09330963-85FD-4C99-A81B-94D0EE5CFFEB}" dt="2026-03-10T16:48:05.976" v="8"/>
+          <ac:cxnSpMkLst>
+            <pc:docMk/>
+            <pc:sldMk cId="1501170907" sldId="256"/>
+            <ac:cxnSpMk id="190" creationId="{88E60B1A-8F9F-F801-EE6D-5051B5DDD7FD}"/>
+          </ac:cxnSpMkLst>
+        </pc:cxnChg>
       </pc:sldChg>
     </pc:docChg>
   </pc:docChgLst>
@@ -384,7 +576,7 @@
           <a:p>
             <a:fld id="{51AFF834-1BEC-4F95-9622-28B5DCC1FE16}" type="datetimeFigureOut">
               <a:rPr lang="en-US" smtClean="0"/>
-              <a:t>3/5/2026</a:t>
+              <a:t>3/10/2026</a:t>
             </a:fld>
             <a:endParaRPr lang="en-US"/>
           </a:p>
@@ -582,7 +774,7 @@
           <a:p>
             <a:fld id="{51AFF834-1BEC-4F95-9622-28B5DCC1FE16}" type="datetimeFigureOut">
               <a:rPr lang="en-US" smtClean="0"/>
-              <a:t>3/5/2026</a:t>
+              <a:t>3/10/2026</a:t>
             </a:fld>
             <a:endParaRPr lang="en-US"/>
           </a:p>
@@ -790,7 +982,7 @@
           <a:p>
             <a:fld id="{51AFF834-1BEC-4F95-9622-28B5DCC1FE16}" type="datetimeFigureOut">
               <a:rPr lang="en-US" smtClean="0"/>
-              <a:t>3/5/2026</a:t>
+              <a:t>3/10/2026</a:t>
             </a:fld>
             <a:endParaRPr lang="en-US"/>
           </a:p>
@@ -988,7 +1180,7 @@
           <a:p>
             <a:fld id="{51AFF834-1BEC-4F95-9622-28B5DCC1FE16}" type="datetimeFigureOut">
               <a:rPr lang="en-US" smtClean="0"/>
-              <a:t>3/5/2026</a:t>
+              <a:t>3/10/2026</a:t>
             </a:fld>
             <a:endParaRPr lang="en-US"/>
           </a:p>
@@ -1263,7 +1455,7 @@
           <a:p>
             <a:fld id="{51AFF834-1BEC-4F95-9622-28B5DCC1FE16}" type="datetimeFigureOut">
               <a:rPr lang="en-US" smtClean="0"/>
-              <a:t>3/5/2026</a:t>
+              <a:t>3/10/2026</a:t>
             </a:fld>
             <a:endParaRPr lang="en-US"/>
           </a:p>
@@ -1528,7 +1720,7 @@
           <a:p>
             <a:fld id="{51AFF834-1BEC-4F95-9622-28B5DCC1FE16}" type="datetimeFigureOut">
               <a:rPr lang="en-US" smtClean="0"/>
-              <a:t>3/5/2026</a:t>
+              <a:t>3/10/2026</a:t>
             </a:fld>
             <a:endParaRPr lang="en-US"/>
           </a:p>
@@ -1940,7 +2132,7 @@
           <a:p>
             <a:fld id="{51AFF834-1BEC-4F95-9622-28B5DCC1FE16}" type="datetimeFigureOut">
               <a:rPr lang="en-US" smtClean="0"/>
-              <a:t>3/5/2026</a:t>
+              <a:t>3/10/2026</a:t>
             </a:fld>
             <a:endParaRPr lang="en-US"/>
           </a:p>
@@ -2081,7 +2273,7 @@
           <a:p>
             <a:fld id="{51AFF834-1BEC-4F95-9622-28B5DCC1FE16}" type="datetimeFigureOut">
               <a:rPr lang="en-US" smtClean="0"/>
-              <a:t>3/5/2026</a:t>
+              <a:t>3/10/2026</a:t>
             </a:fld>
             <a:endParaRPr lang="en-US"/>
           </a:p>
@@ -2194,7 +2386,7 @@
           <a:p>
             <a:fld id="{51AFF834-1BEC-4F95-9622-28B5DCC1FE16}" type="datetimeFigureOut">
               <a:rPr lang="en-US" smtClean="0"/>
-              <a:t>3/5/2026</a:t>
+              <a:t>3/10/2026</a:t>
             </a:fld>
             <a:endParaRPr lang="en-US"/>
           </a:p>
@@ -2505,7 +2697,7 @@
           <a:p>
             <a:fld id="{51AFF834-1BEC-4F95-9622-28B5DCC1FE16}" type="datetimeFigureOut">
               <a:rPr lang="en-US" smtClean="0"/>
-              <a:t>3/5/2026</a:t>
+              <a:t>3/10/2026</a:t>
             </a:fld>
             <a:endParaRPr lang="en-US"/>
           </a:p>
@@ -2793,7 +2985,7 @@
           <a:p>
             <a:fld id="{51AFF834-1BEC-4F95-9622-28B5DCC1FE16}" type="datetimeFigureOut">
               <a:rPr lang="en-US" smtClean="0"/>
-              <a:t>3/5/2026</a:t>
+              <a:t>3/10/2026</a:t>
             </a:fld>
             <a:endParaRPr lang="en-US"/>
           </a:p>
@@ -3034,7 +3226,7 @@
           <a:p>
             <a:fld id="{51AFF834-1BEC-4F95-9622-28B5DCC1FE16}" type="datetimeFigureOut">
               <a:rPr lang="en-US" smtClean="0"/>
-              <a:t>3/5/2026</a:t>
+              <a:t>3/10/2026</a:t>
             </a:fld>
             <a:endParaRPr lang="en-US"/>
           </a:p>
@@ -6887,373 +7079,6 @@
       </p:cxnSp>
       <p:grpSp>
         <p:nvGrpSpPr>
-          <p:cNvPr id="175" name="Group 174">
-            <a:extLst>
-              <a:ext uri="{FF2B5EF4-FFF2-40B4-BE49-F238E27FC236}">
-                <a16:creationId xmlns:a16="http://schemas.microsoft.com/office/drawing/2014/main" id="{CF1E05C7-0258-A1DB-5D4E-EA66C6CAA296}"/>
-              </a:ext>
-            </a:extLst>
-          </p:cNvPr>
-          <p:cNvGrpSpPr/>
-          <p:nvPr/>
-        </p:nvGrpSpPr>
-        <p:grpSpPr>
-          <a:xfrm>
-            <a:off x="8385327" y="3269097"/>
-            <a:ext cx="292770" cy="637674"/>
-            <a:chOff x="1074820" y="1507958"/>
-            <a:chExt cx="292770" cy="637674"/>
-          </a:xfrm>
-        </p:grpSpPr>
-        <p:cxnSp>
-          <p:nvCxnSpPr>
-            <p:cNvPr id="176" name="Straight Connector 175">
-              <a:extLst>
-                <a:ext uri="{FF2B5EF4-FFF2-40B4-BE49-F238E27FC236}">
-                  <a16:creationId xmlns:a16="http://schemas.microsoft.com/office/drawing/2014/main" id="{9B1C3327-A611-2BA8-B007-9186CF3A0E42}"/>
-                </a:ext>
-              </a:extLst>
-            </p:cNvPr>
-            <p:cNvCxnSpPr>
-              <a:cxnSpLocks/>
-            </p:cNvCxnSpPr>
-            <p:nvPr/>
-          </p:nvCxnSpPr>
-          <p:spPr>
-            <a:xfrm>
-              <a:off x="1074821" y="1507958"/>
-              <a:ext cx="0" cy="212558"/>
-            </a:xfrm>
-            <a:prstGeom prst="line">
-              <a:avLst/>
-            </a:prstGeom>
-          </p:spPr>
-          <p:style>
-            <a:lnRef idx="2">
-              <a:schemeClr val="accent1"/>
-            </a:lnRef>
-            <a:fillRef idx="0">
-              <a:schemeClr val="accent1"/>
-            </a:fillRef>
-            <a:effectRef idx="1">
-              <a:schemeClr val="accent1"/>
-            </a:effectRef>
-            <a:fontRef idx="minor">
-              <a:schemeClr val="tx1"/>
-            </a:fontRef>
-          </p:style>
-        </p:cxnSp>
-        <p:cxnSp>
-          <p:nvCxnSpPr>
-            <p:cNvPr id="177" name="Straight Connector 176">
-              <a:extLst>
-                <a:ext uri="{FF2B5EF4-FFF2-40B4-BE49-F238E27FC236}">
-                  <a16:creationId xmlns:a16="http://schemas.microsoft.com/office/drawing/2014/main" id="{3874B16B-1236-9BD1-3E90-062756FAD0B0}"/>
-                </a:ext>
-              </a:extLst>
-            </p:cNvPr>
-            <p:cNvCxnSpPr>
-              <a:cxnSpLocks/>
-            </p:cNvCxnSpPr>
-            <p:nvPr/>
-          </p:nvCxnSpPr>
-          <p:spPr>
-            <a:xfrm>
-              <a:off x="1367590" y="1720516"/>
-              <a:ext cx="0" cy="212558"/>
-            </a:xfrm>
-            <a:prstGeom prst="line">
-              <a:avLst/>
-            </a:prstGeom>
-          </p:spPr>
-          <p:style>
-            <a:lnRef idx="2">
-              <a:schemeClr val="accent1"/>
-            </a:lnRef>
-            <a:fillRef idx="0">
-              <a:schemeClr val="accent1"/>
-            </a:fillRef>
-            <a:effectRef idx="1">
-              <a:schemeClr val="accent1"/>
-            </a:effectRef>
-            <a:fontRef idx="minor">
-              <a:schemeClr val="tx1"/>
-            </a:fontRef>
-          </p:style>
-        </p:cxnSp>
-        <p:cxnSp>
-          <p:nvCxnSpPr>
-            <p:cNvPr id="178" name="Straight Connector 177">
-              <a:extLst>
-                <a:ext uri="{FF2B5EF4-FFF2-40B4-BE49-F238E27FC236}">
-                  <a16:creationId xmlns:a16="http://schemas.microsoft.com/office/drawing/2014/main" id="{C545D7D5-18F9-460B-16FB-45A5E5B3036A}"/>
-                </a:ext>
-              </a:extLst>
-            </p:cNvPr>
-            <p:cNvCxnSpPr>
-              <a:cxnSpLocks/>
-            </p:cNvCxnSpPr>
-            <p:nvPr/>
-          </p:nvCxnSpPr>
-          <p:spPr>
-            <a:xfrm>
-              <a:off x="1074821" y="1933074"/>
-              <a:ext cx="0" cy="212558"/>
-            </a:xfrm>
-            <a:prstGeom prst="line">
-              <a:avLst/>
-            </a:prstGeom>
-          </p:spPr>
-          <p:style>
-            <a:lnRef idx="2">
-              <a:schemeClr val="accent1"/>
-            </a:lnRef>
-            <a:fillRef idx="0">
-              <a:schemeClr val="accent1"/>
-            </a:fillRef>
-            <a:effectRef idx="1">
-              <a:schemeClr val="accent1"/>
-            </a:effectRef>
-            <a:fontRef idx="minor">
-              <a:schemeClr val="tx1"/>
-            </a:fontRef>
-          </p:style>
-        </p:cxnSp>
-        <p:cxnSp>
-          <p:nvCxnSpPr>
-            <p:cNvPr id="179" name="Straight Connector 178">
-              <a:extLst>
-                <a:ext uri="{FF2B5EF4-FFF2-40B4-BE49-F238E27FC236}">
-                  <a16:creationId xmlns:a16="http://schemas.microsoft.com/office/drawing/2014/main" id="{18D96393-1B92-25C8-CCC7-A10F33059DC8}"/>
-                </a:ext>
-              </a:extLst>
-            </p:cNvPr>
-            <p:cNvCxnSpPr>
-              <a:cxnSpLocks/>
-            </p:cNvCxnSpPr>
-            <p:nvPr/>
-          </p:nvCxnSpPr>
-          <p:spPr>
-            <a:xfrm flipH="1">
-              <a:off x="1074821" y="1936227"/>
-              <a:ext cx="292769" cy="209405"/>
-            </a:xfrm>
-            <a:prstGeom prst="line">
-              <a:avLst/>
-            </a:prstGeom>
-          </p:spPr>
-          <p:style>
-            <a:lnRef idx="2">
-              <a:schemeClr val="accent1"/>
-            </a:lnRef>
-            <a:fillRef idx="0">
-              <a:schemeClr val="accent1"/>
-            </a:fillRef>
-            <a:effectRef idx="1">
-              <a:schemeClr val="accent1"/>
-            </a:effectRef>
-            <a:fontRef idx="minor">
-              <a:schemeClr val="tx1"/>
-            </a:fontRef>
-          </p:style>
-        </p:cxnSp>
-        <p:cxnSp>
-          <p:nvCxnSpPr>
-            <p:cNvPr id="180" name="Straight Connector 179">
-              <a:extLst>
-                <a:ext uri="{FF2B5EF4-FFF2-40B4-BE49-F238E27FC236}">
-                  <a16:creationId xmlns:a16="http://schemas.microsoft.com/office/drawing/2014/main" id="{753456A5-2F22-6878-6368-381F766CB36D}"/>
-                </a:ext>
-              </a:extLst>
-            </p:cNvPr>
-            <p:cNvCxnSpPr>
-              <a:cxnSpLocks/>
-            </p:cNvCxnSpPr>
-            <p:nvPr/>
-          </p:nvCxnSpPr>
-          <p:spPr>
-            <a:xfrm flipH="1" flipV="1">
-              <a:off x="1074821" y="1507958"/>
-              <a:ext cx="292769" cy="215711"/>
-            </a:xfrm>
-            <a:prstGeom prst="line">
-              <a:avLst/>
-            </a:prstGeom>
-          </p:spPr>
-          <p:style>
-            <a:lnRef idx="2">
-              <a:schemeClr val="accent1"/>
-            </a:lnRef>
-            <a:fillRef idx="0">
-              <a:schemeClr val="accent1"/>
-            </a:fillRef>
-            <a:effectRef idx="1">
-              <a:schemeClr val="accent1"/>
-            </a:effectRef>
-            <a:fontRef idx="minor">
-              <a:schemeClr val="tx1"/>
-            </a:fontRef>
-          </p:style>
-        </p:cxnSp>
-        <p:cxnSp>
-          <p:nvCxnSpPr>
-            <p:cNvPr id="181" name="Straight Connector 180">
-              <a:extLst>
-                <a:ext uri="{FF2B5EF4-FFF2-40B4-BE49-F238E27FC236}">
-                  <a16:creationId xmlns:a16="http://schemas.microsoft.com/office/drawing/2014/main" id="{0460A47E-6551-87B8-D148-22BB0E7B222D}"/>
-                </a:ext>
-              </a:extLst>
-            </p:cNvPr>
-            <p:cNvCxnSpPr>
-              <a:cxnSpLocks/>
-            </p:cNvCxnSpPr>
-            <p:nvPr/>
-          </p:nvCxnSpPr>
-          <p:spPr>
-            <a:xfrm flipV="1">
-              <a:off x="1074821" y="1829948"/>
-              <a:ext cx="140545" cy="103126"/>
-            </a:xfrm>
-            <a:prstGeom prst="line">
-              <a:avLst/>
-            </a:prstGeom>
-          </p:spPr>
-          <p:style>
-            <a:lnRef idx="2">
-              <a:schemeClr val="accent1"/>
-            </a:lnRef>
-            <a:fillRef idx="0">
-              <a:schemeClr val="accent1"/>
-            </a:fillRef>
-            <a:effectRef idx="1">
-              <a:schemeClr val="accent1"/>
-            </a:effectRef>
-            <a:fontRef idx="minor">
-              <a:schemeClr val="tx1"/>
-            </a:fontRef>
-          </p:style>
-        </p:cxnSp>
-        <p:cxnSp>
-          <p:nvCxnSpPr>
-            <p:cNvPr id="182" name="Straight Connector 181">
-              <a:extLst>
-                <a:ext uri="{FF2B5EF4-FFF2-40B4-BE49-F238E27FC236}">
-                  <a16:creationId xmlns:a16="http://schemas.microsoft.com/office/drawing/2014/main" id="{5A016AB0-C9E3-96DB-019B-5F43AB8DD8B9}"/>
-                </a:ext>
-              </a:extLst>
-            </p:cNvPr>
-            <p:cNvCxnSpPr>
-              <a:cxnSpLocks/>
-            </p:cNvCxnSpPr>
-            <p:nvPr/>
-          </p:nvCxnSpPr>
-          <p:spPr>
-            <a:xfrm>
-              <a:off x="1074820" y="1716505"/>
-              <a:ext cx="140545" cy="107137"/>
-            </a:xfrm>
-            <a:prstGeom prst="line">
-              <a:avLst/>
-            </a:prstGeom>
-          </p:spPr>
-          <p:style>
-            <a:lnRef idx="2">
-              <a:schemeClr val="accent1"/>
-            </a:lnRef>
-            <a:fillRef idx="0">
-              <a:schemeClr val="accent1"/>
-            </a:fillRef>
-            <a:effectRef idx="1">
-              <a:schemeClr val="accent1"/>
-            </a:effectRef>
-            <a:fontRef idx="minor">
-              <a:schemeClr val="tx1"/>
-            </a:fontRef>
-          </p:style>
-        </p:cxnSp>
-      </p:grpSp>
-      <p:cxnSp>
-        <p:nvCxnSpPr>
-          <p:cNvPr id="183" name="Straight Arrow Connector 182">
-            <a:extLst>
-              <a:ext uri="{FF2B5EF4-FFF2-40B4-BE49-F238E27FC236}">
-                <a16:creationId xmlns:a16="http://schemas.microsoft.com/office/drawing/2014/main" id="{FD895F0D-4BF5-DC7B-F7F3-413542C80AFB}"/>
-              </a:ext>
-            </a:extLst>
-          </p:cNvPr>
-          <p:cNvCxnSpPr>
-            <a:cxnSpLocks/>
-          </p:cNvCxnSpPr>
-          <p:nvPr/>
-        </p:nvCxnSpPr>
-        <p:spPr>
-          <a:xfrm>
-            <a:off x="8211392" y="3800492"/>
-            <a:ext cx="173935" cy="0"/>
-          </a:xfrm>
-          <a:prstGeom prst="straightConnector1">
-            <a:avLst/>
-          </a:prstGeom>
-          <a:ln>
-            <a:tailEnd type="triangle"/>
-          </a:ln>
-        </p:spPr>
-        <p:style>
-          <a:lnRef idx="2">
-            <a:schemeClr val="accent1"/>
-          </a:lnRef>
-          <a:fillRef idx="0">
-            <a:schemeClr val="accent1"/>
-          </a:fillRef>
-          <a:effectRef idx="1">
-            <a:schemeClr val="accent1"/>
-          </a:effectRef>
-          <a:fontRef idx="minor">
-            <a:schemeClr val="tx1"/>
-          </a:fontRef>
-        </p:style>
-      </p:cxnSp>
-      <p:cxnSp>
-        <p:nvCxnSpPr>
-          <p:cNvPr id="185" name="Straight Arrow Connector 184">
-            <a:extLst>
-              <a:ext uri="{FF2B5EF4-FFF2-40B4-BE49-F238E27FC236}">
-                <a16:creationId xmlns:a16="http://schemas.microsoft.com/office/drawing/2014/main" id="{8A322888-ED2A-D52F-5D81-55A9F50D831D}"/>
-              </a:ext>
-            </a:extLst>
-          </p:cNvPr>
-          <p:cNvCxnSpPr/>
-          <p:nvPr/>
-        </p:nvCxnSpPr>
-        <p:spPr>
-          <a:xfrm>
-            <a:off x="8207519" y="3375376"/>
-            <a:ext cx="177808" cy="0"/>
-          </a:xfrm>
-          <a:prstGeom prst="straightConnector1">
-            <a:avLst/>
-          </a:prstGeom>
-          <a:ln>
-            <a:tailEnd type="triangle"/>
-          </a:ln>
-        </p:spPr>
-        <p:style>
-          <a:lnRef idx="2">
-            <a:schemeClr val="accent1"/>
-          </a:lnRef>
-          <a:fillRef idx="0">
-            <a:schemeClr val="accent1"/>
-          </a:fillRef>
-          <a:effectRef idx="1">
-            <a:schemeClr val="accent1"/>
-          </a:effectRef>
-          <a:fontRef idx="minor">
-            <a:schemeClr val="tx1"/>
-          </a:fontRef>
-        </p:style>
-      </p:cxnSp>
-      <p:grpSp>
-        <p:nvGrpSpPr>
           <p:cNvPr id="214" name="Group 213">
             <a:extLst>
               <a:ext uri="{FF2B5EF4-FFF2-40B4-BE49-F238E27FC236}">
@@ -7944,179 +7769,6 @@
           </a:fontRef>
         </p:style>
       </p:cxnSp>
-      <p:grpSp>
-        <p:nvGrpSpPr>
-          <p:cNvPr id="247" name="Group 246">
-            <a:extLst>
-              <a:ext uri="{FF2B5EF4-FFF2-40B4-BE49-F238E27FC236}">
-                <a16:creationId xmlns:a16="http://schemas.microsoft.com/office/drawing/2014/main" id="{C53FABC7-DD90-8352-C66A-7DFA23EE2633}"/>
-              </a:ext>
-            </a:extLst>
-          </p:cNvPr>
-          <p:cNvGrpSpPr/>
-          <p:nvPr/>
-        </p:nvGrpSpPr>
-        <p:grpSpPr>
-          <a:xfrm>
-            <a:off x="9307301" y="4163398"/>
-            <a:ext cx="234557" cy="870633"/>
-            <a:chOff x="6175096" y="3854324"/>
-            <a:chExt cx="144932" cy="375881"/>
-          </a:xfrm>
-        </p:grpSpPr>
-        <p:cxnSp>
-          <p:nvCxnSpPr>
-            <p:cNvPr id="248" name="Straight Connector 247">
-              <a:extLst>
-                <a:ext uri="{FF2B5EF4-FFF2-40B4-BE49-F238E27FC236}">
-                  <a16:creationId xmlns:a16="http://schemas.microsoft.com/office/drawing/2014/main" id="{D64F4C90-ABA8-4DDC-5808-F9A278B4E6FD}"/>
-                </a:ext>
-              </a:extLst>
-            </p:cNvPr>
-            <p:cNvCxnSpPr>
-              <a:cxnSpLocks/>
-            </p:cNvCxnSpPr>
-            <p:nvPr/>
-          </p:nvCxnSpPr>
-          <p:spPr>
-            <a:xfrm>
-              <a:off x="6180266" y="3861114"/>
-              <a:ext cx="0" cy="369091"/>
-            </a:xfrm>
-            <a:prstGeom prst="line">
-              <a:avLst/>
-            </a:prstGeom>
-          </p:spPr>
-          <p:style>
-            <a:lnRef idx="2">
-              <a:schemeClr val="accent1"/>
-            </a:lnRef>
-            <a:fillRef idx="0">
-              <a:schemeClr val="accent1"/>
-            </a:fillRef>
-            <a:effectRef idx="1">
-              <a:schemeClr val="accent1"/>
-            </a:effectRef>
-            <a:fontRef idx="minor">
-              <a:schemeClr val="tx1"/>
-            </a:fontRef>
-          </p:style>
-        </p:cxnSp>
-        <p:cxnSp>
-          <p:nvCxnSpPr>
-            <p:cNvPr id="249" name="Straight Connector 248">
-              <a:extLst>
-                <a:ext uri="{FF2B5EF4-FFF2-40B4-BE49-F238E27FC236}">
-                  <a16:creationId xmlns:a16="http://schemas.microsoft.com/office/drawing/2014/main" id="{6FC64163-8C45-5848-AF36-721E2025DF54}"/>
-                </a:ext>
-              </a:extLst>
-            </p:cNvPr>
-            <p:cNvCxnSpPr>
-              <a:cxnSpLocks/>
-            </p:cNvCxnSpPr>
-            <p:nvPr/>
-          </p:nvCxnSpPr>
-          <p:spPr>
-            <a:xfrm>
-              <a:off x="6320028" y="3936909"/>
-              <a:ext cx="0" cy="212558"/>
-            </a:xfrm>
-            <a:prstGeom prst="line">
-              <a:avLst/>
-            </a:prstGeom>
-          </p:spPr>
-          <p:style>
-            <a:lnRef idx="2">
-              <a:schemeClr val="accent1"/>
-            </a:lnRef>
-            <a:fillRef idx="0">
-              <a:schemeClr val="accent1"/>
-            </a:fillRef>
-            <a:effectRef idx="1">
-              <a:schemeClr val="accent1"/>
-            </a:effectRef>
-            <a:fontRef idx="minor">
-              <a:schemeClr val="tx1"/>
-            </a:fontRef>
-          </p:style>
-        </p:cxnSp>
-        <p:cxnSp>
-          <p:nvCxnSpPr>
-            <p:cNvPr id="250" name="Straight Connector 249">
-              <a:extLst>
-                <a:ext uri="{FF2B5EF4-FFF2-40B4-BE49-F238E27FC236}">
-                  <a16:creationId xmlns:a16="http://schemas.microsoft.com/office/drawing/2014/main" id="{3B09081B-A704-2107-897F-12A59ADE3922}"/>
-                </a:ext>
-              </a:extLst>
-            </p:cNvPr>
-            <p:cNvCxnSpPr>
-              <a:cxnSpLocks/>
-            </p:cNvCxnSpPr>
-            <p:nvPr/>
-          </p:nvCxnSpPr>
-          <p:spPr>
-            <a:xfrm flipH="1">
-              <a:off x="6175096" y="4152620"/>
-              <a:ext cx="144932" cy="77585"/>
-            </a:xfrm>
-            <a:prstGeom prst="line">
-              <a:avLst/>
-            </a:prstGeom>
-          </p:spPr>
-          <p:style>
-            <a:lnRef idx="2">
-              <a:schemeClr val="accent1"/>
-            </a:lnRef>
-            <a:fillRef idx="0">
-              <a:schemeClr val="accent1"/>
-            </a:fillRef>
-            <a:effectRef idx="1">
-              <a:schemeClr val="accent1"/>
-            </a:effectRef>
-            <a:fontRef idx="minor">
-              <a:schemeClr val="tx1"/>
-            </a:fontRef>
-          </p:style>
-        </p:cxnSp>
-        <p:cxnSp>
-          <p:nvCxnSpPr>
-            <p:cNvPr id="251" name="Straight Connector 250">
-              <a:extLst>
-                <a:ext uri="{FF2B5EF4-FFF2-40B4-BE49-F238E27FC236}">
-                  <a16:creationId xmlns:a16="http://schemas.microsoft.com/office/drawing/2014/main" id="{465FB0D5-90F0-B240-13F3-D73E3B74C106}"/>
-                </a:ext>
-              </a:extLst>
-            </p:cNvPr>
-            <p:cNvCxnSpPr>
-              <a:cxnSpLocks/>
-            </p:cNvCxnSpPr>
-            <p:nvPr/>
-          </p:nvCxnSpPr>
-          <p:spPr>
-            <a:xfrm flipH="1" flipV="1">
-              <a:off x="6175096" y="3854324"/>
-              <a:ext cx="144932" cy="85738"/>
-            </a:xfrm>
-            <a:prstGeom prst="line">
-              <a:avLst/>
-            </a:prstGeom>
-          </p:spPr>
-          <p:style>
-            <a:lnRef idx="2">
-              <a:schemeClr val="accent1"/>
-            </a:lnRef>
-            <a:fillRef idx="0">
-              <a:schemeClr val="accent1"/>
-            </a:fillRef>
-            <a:effectRef idx="1">
-              <a:schemeClr val="accent1"/>
-            </a:effectRef>
-            <a:fontRef idx="minor">
-              <a:schemeClr val="tx1"/>
-            </a:fontRef>
-          </p:style>
-        </p:cxnSp>
-      </p:grpSp>
       <p:cxnSp>
         <p:nvCxnSpPr>
           <p:cNvPr id="257" name="Straight Connector 256">
@@ -8264,201 +7916,6 @@
           </a:p>
         </p:txBody>
       </p:sp>
-      <p:sp>
-        <p:nvSpPr>
-          <p:cNvPr id="264" name="TextBox 263">
-            <a:extLst>
-              <a:ext uri="{FF2B5EF4-FFF2-40B4-BE49-F238E27FC236}">
-                <a16:creationId xmlns:a16="http://schemas.microsoft.com/office/drawing/2014/main" id="{18102C07-F7E1-1AF1-477B-00B68F177F07}"/>
-              </a:ext>
-            </a:extLst>
-          </p:cNvPr>
-          <p:cNvSpPr txBox="1"/>
-          <p:nvPr/>
-        </p:nvSpPr>
-        <p:spPr>
-          <a:xfrm>
-            <a:off x="7795398" y="3262227"/>
-            <a:ext cx="474810" cy="230832"/>
-          </a:xfrm>
-          <a:prstGeom prst="rect">
-            <a:avLst/>
-          </a:prstGeom>
-          <a:noFill/>
-        </p:spPr>
-        <p:txBody>
-          <a:bodyPr wrap="none" rtlCol="0">
-            <a:spAutoFit/>
-          </a:bodyPr>
-          <a:lstStyle/>
-          <a:p>
-            <a:pPr algn="ctr"/>
-            <a:r>
-              <a:rPr lang="en-US" sz="900" dirty="0"/>
-              <a:t>dout1</a:t>
-            </a:r>
-          </a:p>
-        </p:txBody>
-      </p:sp>
-      <p:sp>
-        <p:nvSpPr>
-          <p:cNvPr id="265" name="TextBox 264">
-            <a:extLst>
-              <a:ext uri="{FF2B5EF4-FFF2-40B4-BE49-F238E27FC236}">
-                <a16:creationId xmlns:a16="http://schemas.microsoft.com/office/drawing/2014/main" id="{00A05C49-A5A2-CC74-BAEB-00CF47323BC9}"/>
-              </a:ext>
-            </a:extLst>
-          </p:cNvPr>
-          <p:cNvSpPr txBox="1"/>
-          <p:nvPr/>
-        </p:nvSpPr>
-        <p:spPr>
-          <a:xfrm>
-            <a:off x="7776328" y="3693360"/>
-            <a:ext cx="474810" cy="230832"/>
-          </a:xfrm>
-          <a:prstGeom prst="rect">
-            <a:avLst/>
-          </a:prstGeom>
-          <a:noFill/>
-        </p:spPr>
-        <p:txBody>
-          <a:bodyPr wrap="none" rtlCol="0">
-            <a:spAutoFit/>
-          </a:bodyPr>
-          <a:lstStyle/>
-          <a:p>
-            <a:pPr algn="ctr"/>
-            <a:r>
-              <a:rPr lang="en-US" sz="900" dirty="0"/>
-              <a:t>dout2</a:t>
-            </a:r>
-          </a:p>
-        </p:txBody>
-      </p:sp>
-      <p:sp>
-        <p:nvSpPr>
-          <p:cNvPr id="266" name="TextBox 265">
-            <a:extLst>
-              <a:ext uri="{FF2B5EF4-FFF2-40B4-BE49-F238E27FC236}">
-                <a16:creationId xmlns:a16="http://schemas.microsoft.com/office/drawing/2014/main" id="{B178740B-BE6B-31B0-B4FD-0ED1D3EABF36}"/>
-              </a:ext>
-            </a:extLst>
-          </p:cNvPr>
-          <p:cNvSpPr txBox="1"/>
-          <p:nvPr/>
-        </p:nvSpPr>
-        <p:spPr>
-          <a:xfrm>
-            <a:off x="8430583" y="3473909"/>
-            <a:ext cx="330540" cy="230832"/>
-          </a:xfrm>
-          <a:prstGeom prst="rect">
-            <a:avLst/>
-          </a:prstGeom>
-          <a:noFill/>
-        </p:spPr>
-        <p:txBody>
-          <a:bodyPr wrap="none" rtlCol="0">
-            <a:spAutoFit/>
-          </a:bodyPr>
-          <a:lstStyle/>
-          <a:p>
-            <a:pPr algn="ctr"/>
-            <a:r>
-              <a:rPr lang="en-US" sz="900" dirty="0"/>
-              <a:t>“-”</a:t>
-            </a:r>
-          </a:p>
-        </p:txBody>
-      </p:sp>
-      <p:cxnSp>
-        <p:nvCxnSpPr>
-          <p:cNvPr id="276" name="Straight Arrow Connector 275">
-            <a:extLst>
-              <a:ext uri="{FF2B5EF4-FFF2-40B4-BE49-F238E27FC236}">
-                <a16:creationId xmlns:a16="http://schemas.microsoft.com/office/drawing/2014/main" id="{370ACF3C-5A72-31AC-3830-8B43C336935F}"/>
-              </a:ext>
-            </a:extLst>
-          </p:cNvPr>
-          <p:cNvCxnSpPr>
-            <a:cxnSpLocks/>
-          </p:cNvCxnSpPr>
-          <p:nvPr/>
-        </p:nvCxnSpPr>
-        <p:spPr>
-          <a:xfrm>
-            <a:off x="9389588" y="3591169"/>
-            <a:ext cx="0" cy="650213"/>
-          </a:xfrm>
-          <a:prstGeom prst="straightConnector1">
-            <a:avLst/>
-          </a:prstGeom>
-          <a:ln>
-            <a:solidFill>
-              <a:srgbClr val="FF0000"/>
-            </a:solidFill>
-            <a:tailEnd type="triangle"/>
-          </a:ln>
-        </p:spPr>
-        <p:style>
-          <a:lnRef idx="2">
-            <a:schemeClr val="accent1"/>
-          </a:lnRef>
-          <a:fillRef idx="0">
-            <a:schemeClr val="accent1"/>
-          </a:fillRef>
-          <a:effectRef idx="1">
-            <a:schemeClr val="accent1"/>
-          </a:effectRef>
-          <a:fontRef idx="minor">
-            <a:schemeClr val="tx1"/>
-          </a:fontRef>
-        </p:style>
-      </p:cxnSp>
-      <p:cxnSp>
-        <p:nvCxnSpPr>
-          <p:cNvPr id="280" name="Straight Connector 279">
-            <a:extLst>
-              <a:ext uri="{FF2B5EF4-FFF2-40B4-BE49-F238E27FC236}">
-                <a16:creationId xmlns:a16="http://schemas.microsoft.com/office/drawing/2014/main" id="{BF12A351-142A-23D7-36BD-9308B9D720AA}"/>
-              </a:ext>
-            </a:extLst>
-          </p:cNvPr>
-          <p:cNvCxnSpPr>
-            <a:cxnSpLocks/>
-          </p:cNvCxnSpPr>
-          <p:nvPr/>
-        </p:nvCxnSpPr>
-        <p:spPr>
-          <a:xfrm>
-            <a:off x="8690708" y="3591169"/>
-            <a:ext cx="695569" cy="0"/>
-          </a:xfrm>
-          <a:prstGeom prst="line">
-            <a:avLst/>
-          </a:prstGeom>
-          <a:ln>
-            <a:solidFill>
-              <a:srgbClr val="FF0000"/>
-            </a:solidFill>
-          </a:ln>
-        </p:spPr>
-        <p:style>
-          <a:lnRef idx="2">
-            <a:schemeClr val="accent1"/>
-          </a:lnRef>
-          <a:fillRef idx="0">
-            <a:schemeClr val="accent1"/>
-          </a:fillRef>
-          <a:effectRef idx="1">
-            <a:schemeClr val="accent1"/>
-          </a:effectRef>
-          <a:fontRef idx="minor">
-            <a:schemeClr val="tx1"/>
-          </a:fontRef>
-        </p:style>
-      </p:cxnSp>
       <p:cxnSp>
         <p:nvCxnSpPr>
           <p:cNvPr id="286" name="Straight Connector 285">
@@ -8511,44 +7968,6 @@
           <a:xfrm flipV="1">
             <a:off x="211807" y="2717971"/>
             <a:ext cx="0" cy="3295203"/>
-          </a:xfrm>
-          <a:prstGeom prst="line">
-            <a:avLst/>
-          </a:prstGeom>
-        </p:spPr>
-        <p:style>
-          <a:lnRef idx="2">
-            <a:schemeClr val="accent1"/>
-          </a:lnRef>
-          <a:fillRef idx="0">
-            <a:schemeClr val="accent1"/>
-          </a:fillRef>
-          <a:effectRef idx="1">
-            <a:schemeClr val="accent1"/>
-          </a:effectRef>
-          <a:fontRef idx="minor">
-            <a:schemeClr val="tx1"/>
-          </a:fontRef>
-        </p:style>
-      </p:cxnSp>
-      <p:cxnSp>
-        <p:nvCxnSpPr>
-          <p:cNvPr id="290" name="Straight Connector 289">
-            <a:extLst>
-              <a:ext uri="{FF2B5EF4-FFF2-40B4-BE49-F238E27FC236}">
-                <a16:creationId xmlns:a16="http://schemas.microsoft.com/office/drawing/2014/main" id="{1876BEE7-FDFC-0D31-7B67-CAA4ECA61CC2}"/>
-              </a:ext>
-            </a:extLst>
-          </p:cNvPr>
-          <p:cNvCxnSpPr>
-            <a:cxnSpLocks/>
-          </p:cNvCxnSpPr>
-          <p:nvPr/>
-        </p:nvCxnSpPr>
-        <p:spPr>
-          <a:xfrm>
-            <a:off x="9542834" y="4611234"/>
-            <a:ext cx="136187" cy="0"/>
           </a:xfrm>
           <a:prstGeom prst="line">
             <a:avLst/>
@@ -9726,138 +9145,6 @@
           </a:p>
         </p:txBody>
       </p:sp>
-      <p:cxnSp>
-        <p:nvCxnSpPr>
-          <p:cNvPr id="17" name="Straight Arrow Connector 16">
-            <a:extLst>
-              <a:ext uri="{FF2B5EF4-FFF2-40B4-BE49-F238E27FC236}">
-                <a16:creationId xmlns:a16="http://schemas.microsoft.com/office/drawing/2014/main" id="{D24E488E-A173-AFA0-3F6A-78FF8CC6952B}"/>
-              </a:ext>
-            </a:extLst>
-          </p:cNvPr>
-          <p:cNvCxnSpPr>
-            <a:cxnSpLocks/>
-          </p:cNvCxnSpPr>
-          <p:nvPr/>
-        </p:nvCxnSpPr>
-        <p:spPr>
-          <a:xfrm flipV="1">
-            <a:off x="10852467" y="3154000"/>
-            <a:ext cx="0" cy="195214"/>
-          </a:xfrm>
-          <a:prstGeom prst="straightConnector1">
-            <a:avLst/>
-          </a:prstGeom>
-          <a:ln>
-            <a:solidFill>
-              <a:srgbClr val="FF0000"/>
-            </a:solidFill>
-            <a:tailEnd type="triangle"/>
-          </a:ln>
-        </p:spPr>
-        <p:style>
-          <a:lnRef idx="2">
-            <a:schemeClr val="accent1"/>
-          </a:lnRef>
-          <a:fillRef idx="0">
-            <a:schemeClr val="accent1"/>
-          </a:fillRef>
-          <a:effectRef idx="1">
-            <a:schemeClr val="accent1"/>
-          </a:effectRef>
-          <a:fontRef idx="minor">
-            <a:schemeClr val="tx1"/>
-          </a:fontRef>
-        </p:style>
-      </p:cxnSp>
-      <p:cxnSp>
-        <p:nvCxnSpPr>
-          <p:cNvPr id="26" name="Straight Arrow Connector 25">
-            <a:extLst>
-              <a:ext uri="{FF2B5EF4-FFF2-40B4-BE49-F238E27FC236}">
-                <a16:creationId xmlns:a16="http://schemas.microsoft.com/office/drawing/2014/main" id="{EFC7A41C-61ED-49E4-BA0B-27EC82F62902}"/>
-              </a:ext>
-            </a:extLst>
-          </p:cNvPr>
-          <p:cNvCxnSpPr>
-            <a:cxnSpLocks/>
-          </p:cNvCxnSpPr>
-          <p:nvPr/>
-        </p:nvCxnSpPr>
-        <p:spPr>
-          <a:xfrm flipV="1">
-            <a:off x="10915967" y="3114188"/>
-            <a:ext cx="0" cy="195214"/>
-          </a:xfrm>
-          <a:prstGeom prst="straightConnector1">
-            <a:avLst/>
-          </a:prstGeom>
-          <a:ln>
-            <a:solidFill>
-              <a:srgbClr val="FF0000"/>
-            </a:solidFill>
-            <a:tailEnd type="triangle"/>
-          </a:ln>
-        </p:spPr>
-        <p:style>
-          <a:lnRef idx="2">
-            <a:schemeClr val="accent1"/>
-          </a:lnRef>
-          <a:fillRef idx="0">
-            <a:schemeClr val="accent1"/>
-          </a:fillRef>
-          <a:effectRef idx="1">
-            <a:schemeClr val="accent1"/>
-          </a:effectRef>
-          <a:fontRef idx="minor">
-            <a:schemeClr val="tx1"/>
-          </a:fontRef>
-        </p:style>
-      </p:cxnSp>
-      <p:cxnSp>
-        <p:nvCxnSpPr>
-          <p:cNvPr id="28" name="Straight Arrow Connector 27">
-            <a:extLst>
-              <a:ext uri="{FF2B5EF4-FFF2-40B4-BE49-F238E27FC236}">
-                <a16:creationId xmlns:a16="http://schemas.microsoft.com/office/drawing/2014/main" id="{EE79F449-2B1D-87A9-9E7B-9DD8C11C7B9B}"/>
-              </a:ext>
-            </a:extLst>
-          </p:cNvPr>
-          <p:cNvCxnSpPr>
-            <a:cxnSpLocks/>
-          </p:cNvCxnSpPr>
-          <p:nvPr/>
-        </p:nvCxnSpPr>
-        <p:spPr>
-          <a:xfrm flipV="1">
-            <a:off x="10776267" y="3233786"/>
-            <a:ext cx="0" cy="195214"/>
-          </a:xfrm>
-          <a:prstGeom prst="straightConnector1">
-            <a:avLst/>
-          </a:prstGeom>
-          <a:ln>
-            <a:solidFill>
-              <a:srgbClr val="FF0000"/>
-            </a:solidFill>
-            <a:tailEnd type="triangle"/>
-          </a:ln>
-        </p:spPr>
-        <p:style>
-          <a:lnRef idx="2">
-            <a:schemeClr val="accent1"/>
-          </a:lnRef>
-          <a:fillRef idx="0">
-            <a:schemeClr val="accent1"/>
-          </a:fillRef>
-          <a:effectRef idx="1">
-            <a:schemeClr val="accent1"/>
-          </a:effectRef>
-          <a:fontRef idx="minor">
-            <a:schemeClr val="tx1"/>
-          </a:fontRef>
-        </p:style>
-      </p:cxnSp>
       <p:grpSp>
         <p:nvGrpSpPr>
           <p:cNvPr id="30" name="Group 29">
@@ -10081,22 +9368,119 @@
           </a:fontRef>
         </p:style>
       </p:cxnSp>
+      <p:sp>
+        <p:nvSpPr>
+          <p:cNvPr id="106" name="Rectangle 105">
+            <a:extLst>
+              <a:ext uri="{FF2B5EF4-FFF2-40B4-BE49-F238E27FC236}">
+                <a16:creationId xmlns:a16="http://schemas.microsoft.com/office/drawing/2014/main" id="{802EBAD3-1207-E175-F4E6-F1CAAFD5CB84}"/>
+              </a:ext>
+            </a:extLst>
+          </p:cNvPr>
+          <p:cNvSpPr/>
+          <p:nvPr/>
+        </p:nvSpPr>
+        <p:spPr>
+          <a:xfrm>
+            <a:off x="4112869" y="5087156"/>
+            <a:ext cx="663423" cy="460640"/>
+          </a:xfrm>
+          <a:prstGeom prst="rect">
+            <a:avLst/>
+          </a:prstGeom>
+          <a:solidFill>
+            <a:schemeClr val="bg1"/>
+          </a:solidFill>
+        </p:spPr>
+        <p:style>
+          <a:lnRef idx="2">
+            <a:schemeClr val="accent1">
+              <a:shade val="15000"/>
+            </a:schemeClr>
+          </a:lnRef>
+          <a:fillRef idx="1">
+            <a:schemeClr val="accent1"/>
+          </a:fillRef>
+          <a:effectRef idx="0">
+            <a:schemeClr val="accent1"/>
+          </a:effectRef>
+          <a:fontRef idx="minor">
+            <a:schemeClr val="lt1"/>
+          </a:fontRef>
+        </p:style>
+        <p:txBody>
+          <a:bodyPr rtlCol="0" anchor="ctr"/>
+          <a:lstStyle/>
+          <a:p>
+            <a:pPr algn="ctr"/>
+            <a:r>
+              <a:rPr lang="en-US" dirty="0"/>
+              <a:t>PC</a:t>
+            </a:r>
+          </a:p>
+        </p:txBody>
+      </p:sp>
+      <p:sp>
+        <p:nvSpPr>
+          <p:cNvPr id="107" name="TextBox 106">
+            <a:extLst>
+              <a:ext uri="{FF2B5EF4-FFF2-40B4-BE49-F238E27FC236}">
+                <a16:creationId xmlns:a16="http://schemas.microsoft.com/office/drawing/2014/main" id="{B1546BBC-B812-DED8-4B26-9FABE47BC3AA}"/>
+              </a:ext>
+            </a:extLst>
+          </p:cNvPr>
+          <p:cNvSpPr txBox="1"/>
+          <p:nvPr/>
+        </p:nvSpPr>
+        <p:spPr>
+          <a:xfrm>
+            <a:off x="4171777" y="5125610"/>
+            <a:ext cx="574196" cy="384721"/>
+          </a:xfrm>
+          <a:prstGeom prst="rect">
+            <a:avLst/>
+          </a:prstGeom>
+          <a:noFill/>
+        </p:spPr>
+        <p:txBody>
+          <a:bodyPr wrap="none" rtlCol="0">
+            <a:spAutoFit/>
+          </a:bodyPr>
+          <a:lstStyle/>
+          <a:p>
+            <a:pPr algn="ctr"/>
+            <a:r>
+              <a:rPr lang="en-US" sz="1000" dirty="0"/>
+              <a:t>Stall</a:t>
+            </a:r>
+          </a:p>
+          <a:p>
+            <a:pPr algn="ctr"/>
+            <a:r>
+              <a:rPr lang="en-US" sz="900" dirty="0"/>
+              <a:t>counter</a:t>
+            </a:r>
+          </a:p>
+        </p:txBody>
+      </p:sp>
       <p:cxnSp>
         <p:nvCxnSpPr>
-          <p:cNvPr id="39" name="Straight Arrow Connector 38">
-            <a:extLst>
-              <a:ext uri="{FF2B5EF4-FFF2-40B4-BE49-F238E27FC236}">
-                <a16:creationId xmlns:a16="http://schemas.microsoft.com/office/drawing/2014/main" id="{119991E4-90E6-F0D1-11C3-602FF77B7F79}"/>
-              </a:ext>
-            </a:extLst>
-          </p:cNvPr>
-          <p:cNvCxnSpPr/>
+          <p:cNvPr id="108" name="Straight Arrow Connector 107">
+            <a:extLst>
+              <a:ext uri="{FF2B5EF4-FFF2-40B4-BE49-F238E27FC236}">
+                <a16:creationId xmlns:a16="http://schemas.microsoft.com/office/drawing/2014/main" id="{55D04E53-F0F2-CC32-832F-AD990A0BD8D2}"/>
+              </a:ext>
+            </a:extLst>
+          </p:cNvPr>
+          <p:cNvCxnSpPr>
+            <a:cxnSpLocks/>
+          </p:cNvCxnSpPr>
           <p:nvPr/>
         </p:nvCxnSpPr>
         <p:spPr>
           <a:xfrm>
-            <a:off x="9424268" y="4047113"/>
-            <a:ext cx="0" cy="230832"/>
+            <a:off x="3882996" y="5224369"/>
+            <a:ext cx="229874" cy="0"/>
           </a:xfrm>
           <a:prstGeom prst="straightConnector1">
             <a:avLst/>
@@ -10105,6 +9489,142 @@
             <a:solidFill>
               <a:srgbClr val="FF0000"/>
             </a:solidFill>
+            <a:tailEnd type="triangle"/>
+          </a:ln>
+        </p:spPr>
+        <p:style>
+          <a:lnRef idx="2">
+            <a:schemeClr val="accent1"/>
+          </a:lnRef>
+          <a:fillRef idx="0">
+            <a:schemeClr val="accent1"/>
+          </a:fillRef>
+          <a:effectRef idx="1">
+            <a:schemeClr val="accent1"/>
+          </a:effectRef>
+          <a:fontRef idx="minor">
+            <a:schemeClr val="tx1"/>
+          </a:fontRef>
+        </p:style>
+      </p:cxnSp>
+      <p:sp>
+        <p:nvSpPr>
+          <p:cNvPr id="109" name="Rectangle 108">
+            <a:extLst>
+              <a:ext uri="{FF2B5EF4-FFF2-40B4-BE49-F238E27FC236}">
+                <a16:creationId xmlns:a16="http://schemas.microsoft.com/office/drawing/2014/main" id="{A81CABDD-6671-8136-C507-5421CBF47C22}"/>
+              </a:ext>
+            </a:extLst>
+          </p:cNvPr>
+          <p:cNvSpPr/>
+          <p:nvPr/>
+        </p:nvSpPr>
+        <p:spPr>
+          <a:xfrm>
+            <a:off x="3204207" y="5087370"/>
+            <a:ext cx="678789" cy="484706"/>
+          </a:xfrm>
+          <a:prstGeom prst="rect">
+            <a:avLst/>
+          </a:prstGeom>
+          <a:solidFill>
+            <a:schemeClr val="bg1"/>
+          </a:solidFill>
+        </p:spPr>
+        <p:style>
+          <a:lnRef idx="2">
+            <a:schemeClr val="accent1">
+              <a:shade val="15000"/>
+            </a:schemeClr>
+          </a:lnRef>
+          <a:fillRef idx="1">
+            <a:schemeClr val="accent1"/>
+          </a:fillRef>
+          <a:effectRef idx="0">
+            <a:schemeClr val="accent1"/>
+          </a:effectRef>
+          <a:fontRef idx="minor">
+            <a:schemeClr val="lt1"/>
+          </a:fontRef>
+        </p:style>
+        <p:txBody>
+          <a:bodyPr rtlCol="0" anchor="ctr"/>
+          <a:lstStyle/>
+          <a:p>
+            <a:pPr algn="ctr"/>
+            <a:r>
+              <a:rPr lang="en-US" dirty="0"/>
+              <a:t>PC</a:t>
+            </a:r>
+          </a:p>
+        </p:txBody>
+      </p:sp>
+      <p:sp>
+        <p:nvSpPr>
+          <p:cNvPr id="110" name="TextBox 109">
+            <a:extLst>
+              <a:ext uri="{FF2B5EF4-FFF2-40B4-BE49-F238E27FC236}">
+                <a16:creationId xmlns:a16="http://schemas.microsoft.com/office/drawing/2014/main" id="{F182B11B-81F0-C7FD-76B3-7C27A04FAE43}"/>
+              </a:ext>
+            </a:extLst>
+          </p:cNvPr>
+          <p:cNvSpPr txBox="1"/>
+          <p:nvPr/>
+        </p:nvSpPr>
+        <p:spPr>
+          <a:xfrm>
+            <a:off x="3169553" y="5107257"/>
+            <a:ext cx="729687" cy="400110"/>
+          </a:xfrm>
+          <a:prstGeom prst="rect">
+            <a:avLst/>
+          </a:prstGeom>
+          <a:noFill/>
+        </p:spPr>
+        <p:txBody>
+          <a:bodyPr wrap="none" rtlCol="0">
+            <a:spAutoFit/>
+          </a:bodyPr>
+          <a:lstStyle/>
+          <a:p>
+            <a:pPr algn="ctr"/>
+            <a:r>
+              <a:rPr lang="en-US" sz="1000" dirty="0"/>
+              <a:t>Hazard</a:t>
+            </a:r>
+          </a:p>
+          <a:p>
+            <a:pPr algn="ctr"/>
+            <a:r>
+              <a:rPr lang="en-US" sz="1000" dirty="0"/>
+              <a:t>Detection</a:t>
+            </a:r>
+          </a:p>
+        </p:txBody>
+      </p:sp>
+      <p:cxnSp>
+        <p:nvCxnSpPr>
+          <p:cNvPr id="118" name="Straight Arrow Connector 117">
+            <a:extLst>
+              <a:ext uri="{FF2B5EF4-FFF2-40B4-BE49-F238E27FC236}">
+                <a16:creationId xmlns:a16="http://schemas.microsoft.com/office/drawing/2014/main" id="{3FFE2C33-996E-7ADF-F9EF-9E2CF7B04F43}"/>
+              </a:ext>
+            </a:extLst>
+          </p:cNvPr>
+          <p:cNvCxnSpPr>
+            <a:cxnSpLocks/>
+          </p:cNvCxnSpPr>
+          <p:nvPr/>
+        </p:nvCxnSpPr>
+        <p:spPr>
+          <a:xfrm>
+            <a:off x="2743887" y="5277871"/>
+            <a:ext cx="442253" cy="0"/>
+          </a:xfrm>
+          <a:prstGeom prst="straightConnector1">
+            <a:avLst/>
+          </a:prstGeom>
+          <a:ln>
             <a:tailEnd type="triangle"/>
           </a:ln>
         </p:spPr>
@@ -10125,20 +9645,22 @@
       </p:cxnSp>
       <p:cxnSp>
         <p:nvCxnSpPr>
-          <p:cNvPr id="47" name="Straight Arrow Connector 46">
-            <a:extLst>
-              <a:ext uri="{FF2B5EF4-FFF2-40B4-BE49-F238E27FC236}">
-                <a16:creationId xmlns:a16="http://schemas.microsoft.com/office/drawing/2014/main" id="{8A262BB7-393A-3D10-4768-BA19460EE16D}"/>
-              </a:ext>
-            </a:extLst>
-          </p:cNvPr>
-          <p:cNvCxnSpPr/>
+          <p:cNvPr id="119" name="Straight Arrow Connector 118">
+            <a:extLst>
+              <a:ext uri="{FF2B5EF4-FFF2-40B4-BE49-F238E27FC236}">
+                <a16:creationId xmlns:a16="http://schemas.microsoft.com/office/drawing/2014/main" id="{E7E3730A-42E6-0433-39FD-2ACC0255676D}"/>
+              </a:ext>
+            </a:extLst>
+          </p:cNvPr>
+          <p:cNvCxnSpPr>
+            <a:cxnSpLocks/>
+          </p:cNvCxnSpPr>
           <p:nvPr/>
         </p:nvCxnSpPr>
         <p:spPr>
-          <a:xfrm>
-            <a:off x="9462368" y="4084284"/>
-            <a:ext cx="0" cy="230832"/>
+          <a:xfrm flipH="1">
+            <a:off x="3888841" y="5478179"/>
+            <a:ext cx="205614" cy="0"/>
           </a:xfrm>
           <a:prstGeom prst="straightConnector1">
             <a:avLst/>
@@ -10167,30 +9689,26 @@
       </p:cxnSp>
       <p:cxnSp>
         <p:nvCxnSpPr>
-          <p:cNvPr id="52" name="Straight Arrow Connector 51">
-            <a:extLst>
-              <a:ext uri="{FF2B5EF4-FFF2-40B4-BE49-F238E27FC236}">
-                <a16:creationId xmlns:a16="http://schemas.microsoft.com/office/drawing/2014/main" id="{2AC5E79F-36BB-C55A-DF2D-C7C8E0255836}"/>
-              </a:ext>
-            </a:extLst>
-          </p:cNvPr>
-          <p:cNvCxnSpPr/>
+          <p:cNvPr id="120" name="Straight Connector 119">
+            <a:extLst>
+              <a:ext uri="{FF2B5EF4-FFF2-40B4-BE49-F238E27FC236}">
+                <a16:creationId xmlns:a16="http://schemas.microsoft.com/office/drawing/2014/main" id="{1883FA79-CBE1-81F9-475F-742DC442633A}"/>
+              </a:ext>
+            </a:extLst>
+          </p:cNvPr>
+          <p:cNvCxnSpPr>
+            <a:cxnSpLocks/>
+          </p:cNvCxnSpPr>
           <p:nvPr/>
         </p:nvCxnSpPr>
         <p:spPr>
           <a:xfrm>
-            <a:off x="9514036" y="4115287"/>
-            <a:ext cx="0" cy="230832"/>
-          </a:xfrm>
-          <a:prstGeom prst="straightConnector1">
-            <a:avLst/>
-          </a:prstGeom>
-          <a:ln>
-            <a:solidFill>
-              <a:srgbClr val="FF0000"/>
-            </a:solidFill>
-            <a:tailEnd type="triangle"/>
-          </a:ln>
+            <a:off x="2763237" y="4519030"/>
+            <a:ext cx="0" cy="761538"/>
+          </a:xfrm>
+          <a:prstGeom prst="line">
+            <a:avLst/>
+          </a:prstGeom>
         </p:spPr>
         <p:style>
           <a:lnRef idx="2">
@@ -10209,10 +9727,10 @@
       </p:cxnSp>
       <p:cxnSp>
         <p:nvCxnSpPr>
-          <p:cNvPr id="53" name="Straight Arrow Connector 52">
-            <a:extLst>
-              <a:ext uri="{FF2B5EF4-FFF2-40B4-BE49-F238E27FC236}">
-                <a16:creationId xmlns:a16="http://schemas.microsoft.com/office/drawing/2014/main" id="{FE547B99-6FC8-A74C-FEEB-9E4CADACFA53}"/>
+          <p:cNvPr id="121" name="Straight Arrow Connector 120">
+            <a:extLst>
+              <a:ext uri="{FF2B5EF4-FFF2-40B4-BE49-F238E27FC236}">
+                <a16:creationId xmlns:a16="http://schemas.microsoft.com/office/drawing/2014/main" id="{D53ADBF7-10DC-5789-46E9-813992762F1C}"/>
               </a:ext>
             </a:extLst>
           </p:cNvPr>
@@ -10223,8 +9741,8 @@
         </p:nvCxnSpPr>
         <p:spPr>
           <a:xfrm>
-            <a:off x="8930725" y="4560055"/>
-            <a:ext cx="374301" cy="0"/>
+            <a:off x="2981569" y="5160759"/>
+            <a:ext cx="211703" cy="0"/>
           </a:xfrm>
           <a:prstGeom prst="straightConnector1">
             <a:avLst/>
@@ -10248,104 +9766,26 @@
           </a:fontRef>
         </p:style>
       </p:cxnSp>
-      <p:sp>
-        <p:nvSpPr>
-          <p:cNvPr id="54" name="TextBox 53">
-            <a:extLst>
-              <a:ext uri="{FF2B5EF4-FFF2-40B4-BE49-F238E27FC236}">
-                <a16:creationId xmlns:a16="http://schemas.microsoft.com/office/drawing/2014/main" id="{7C5CCBD1-0844-480F-8141-9A9CAA44FF50}"/>
-              </a:ext>
-            </a:extLst>
-          </p:cNvPr>
-          <p:cNvSpPr txBox="1"/>
-          <p:nvPr/>
-        </p:nvSpPr>
-        <p:spPr>
-          <a:xfrm>
-            <a:off x="7868407" y="4099798"/>
-            <a:ext cx="413896" cy="230832"/>
-          </a:xfrm>
-          <a:prstGeom prst="rect">
-            <a:avLst/>
-          </a:prstGeom>
-          <a:noFill/>
-        </p:spPr>
-        <p:txBody>
-          <a:bodyPr wrap="none" rtlCol="0">
-            <a:spAutoFit/>
-          </a:bodyPr>
-          <a:lstStyle/>
-          <a:p>
-            <a:pPr algn="ctr"/>
-            <a:r>
-              <a:rPr lang="en-US" sz="900" dirty="0"/>
-              <a:t>NPC</a:t>
-            </a:r>
-          </a:p>
-        </p:txBody>
-      </p:sp>
-      <p:sp>
-        <p:nvSpPr>
-          <p:cNvPr id="57" name="TextBox 56">
-            <a:extLst>
-              <a:ext uri="{FF2B5EF4-FFF2-40B4-BE49-F238E27FC236}">
-                <a16:creationId xmlns:a16="http://schemas.microsoft.com/office/drawing/2014/main" id="{BE8947B1-691B-936E-60AD-9FDFE4A4EA75}"/>
-              </a:ext>
-            </a:extLst>
-          </p:cNvPr>
-          <p:cNvSpPr txBox="1"/>
-          <p:nvPr/>
-        </p:nvSpPr>
-        <p:spPr>
-          <a:xfrm>
-            <a:off x="7871560" y="4515171"/>
-            <a:ext cx="407484" cy="230832"/>
-          </a:xfrm>
-          <a:prstGeom prst="rect">
-            <a:avLst/>
-          </a:prstGeom>
-          <a:noFill/>
-        </p:spPr>
-        <p:txBody>
-          <a:bodyPr wrap="none" rtlCol="0">
-            <a:spAutoFit/>
-          </a:bodyPr>
-          <a:lstStyle/>
-          <a:p>
-            <a:pPr algn="ctr"/>
-            <a:r>
-              <a:rPr lang="en-US" sz="900" dirty="0" err="1"/>
-              <a:t>imm</a:t>
-            </a:r>
-            <a:endParaRPr lang="en-US" sz="900" dirty="0"/>
-          </a:p>
-        </p:txBody>
-      </p:sp>
       <p:cxnSp>
         <p:nvCxnSpPr>
-          <p:cNvPr id="58" name="Straight Arrow Connector 57">
-            <a:extLst>
-              <a:ext uri="{FF2B5EF4-FFF2-40B4-BE49-F238E27FC236}">
-                <a16:creationId xmlns:a16="http://schemas.microsoft.com/office/drawing/2014/main" id="{37D73938-CD18-95EE-AF99-64BFF08C2E0D}"/>
-              </a:ext>
-            </a:extLst>
-          </p:cNvPr>
-          <p:cNvCxnSpPr>
-            <a:cxnSpLocks/>
-          </p:cNvCxnSpPr>
+          <p:cNvPr id="122" name="Straight Connector 121">
+            <a:extLst>
+              <a:ext uri="{FF2B5EF4-FFF2-40B4-BE49-F238E27FC236}">
+                <a16:creationId xmlns:a16="http://schemas.microsoft.com/office/drawing/2014/main" id="{47FF72DD-5839-7297-77B0-F5EC466118C5}"/>
+              </a:ext>
+            </a:extLst>
+          </p:cNvPr>
+          <p:cNvCxnSpPr/>
           <p:nvPr/>
         </p:nvCxnSpPr>
         <p:spPr>
-          <a:xfrm flipV="1">
-            <a:off x="9214921" y="4718145"/>
-            <a:ext cx="100338" cy="2498"/>
-          </a:xfrm>
-          <a:prstGeom prst="straightConnector1">
-            <a:avLst/>
-          </a:prstGeom>
-          <a:ln>
-            <a:tailEnd type="triangle"/>
-          </a:ln>
+          <a:xfrm flipH="1" flipV="1">
+            <a:off x="2602523" y="4499564"/>
+            <a:ext cx="164123" cy="7703"/>
+          </a:xfrm>
+          <a:prstGeom prst="line">
+            <a:avLst/>
+          </a:prstGeom>
         </p:spPr>
         <p:style>
           <a:lnRef idx="2">
@@ -10362,12 +9802,420 @@
           </a:fontRef>
         </p:style>
       </p:cxnSp>
-      <p:sp>
-        <p:nvSpPr>
-          <p:cNvPr id="59" name="TextBox 58">
-            <a:extLst>
-              <a:ext uri="{FF2B5EF4-FFF2-40B4-BE49-F238E27FC236}">
-                <a16:creationId xmlns:a16="http://schemas.microsoft.com/office/drawing/2014/main" id="{62908768-78CB-6AA2-9F8F-560147BBA50C}"/>
+      <p:cxnSp>
+        <p:nvCxnSpPr>
+          <p:cNvPr id="123" name="Straight Connector 122">
+            <a:extLst>
+              <a:ext uri="{FF2B5EF4-FFF2-40B4-BE49-F238E27FC236}">
+                <a16:creationId xmlns:a16="http://schemas.microsoft.com/office/drawing/2014/main" id="{61CB085F-EFA5-81F0-171A-B0F01423DFC7}"/>
+              </a:ext>
+            </a:extLst>
+          </p:cNvPr>
+          <p:cNvCxnSpPr/>
+          <p:nvPr/>
+        </p:nvCxnSpPr>
+        <p:spPr>
+          <a:xfrm>
+            <a:off x="2989385" y="4912022"/>
+            <a:ext cx="0" cy="253947"/>
+          </a:xfrm>
+          <a:prstGeom prst="line">
+            <a:avLst/>
+          </a:prstGeom>
+        </p:spPr>
+        <p:style>
+          <a:lnRef idx="2">
+            <a:schemeClr val="accent1"/>
+          </a:lnRef>
+          <a:fillRef idx="0">
+            <a:schemeClr val="accent1"/>
+          </a:fillRef>
+          <a:effectRef idx="1">
+            <a:schemeClr val="accent1"/>
+          </a:effectRef>
+          <a:fontRef idx="minor">
+            <a:schemeClr val="tx1"/>
+          </a:fontRef>
+        </p:style>
+      </p:cxnSp>
+      <p:cxnSp>
+        <p:nvCxnSpPr>
+          <p:cNvPr id="124" name="Straight Connector 123">
+            <a:extLst>
+              <a:ext uri="{FF2B5EF4-FFF2-40B4-BE49-F238E27FC236}">
+                <a16:creationId xmlns:a16="http://schemas.microsoft.com/office/drawing/2014/main" id="{A7AA200C-FCA9-EE26-397A-A699E5A6646F}"/>
+              </a:ext>
+            </a:extLst>
+          </p:cNvPr>
+          <p:cNvCxnSpPr/>
+          <p:nvPr/>
+        </p:nvCxnSpPr>
+        <p:spPr>
+          <a:xfrm>
+            <a:off x="2985477" y="4912022"/>
+            <a:ext cx="2313354" cy="0"/>
+          </a:xfrm>
+          <a:prstGeom prst="line">
+            <a:avLst/>
+          </a:prstGeom>
+        </p:spPr>
+        <p:style>
+          <a:lnRef idx="2">
+            <a:schemeClr val="accent1"/>
+          </a:lnRef>
+          <a:fillRef idx="0">
+            <a:schemeClr val="accent1"/>
+          </a:fillRef>
+          <a:effectRef idx="1">
+            <a:schemeClr val="accent1"/>
+          </a:effectRef>
+          <a:fontRef idx="minor">
+            <a:schemeClr val="tx1"/>
+          </a:fontRef>
+        </p:style>
+      </p:cxnSp>
+      <p:cxnSp>
+        <p:nvCxnSpPr>
+          <p:cNvPr id="125" name="Straight Arrow Connector 124">
+            <a:extLst>
+              <a:ext uri="{FF2B5EF4-FFF2-40B4-BE49-F238E27FC236}">
+                <a16:creationId xmlns:a16="http://schemas.microsoft.com/office/drawing/2014/main" id="{EC42D385-1455-5F7D-5DE9-63C32D5B7E54}"/>
+              </a:ext>
+            </a:extLst>
+          </p:cNvPr>
+          <p:cNvCxnSpPr/>
+          <p:nvPr/>
+        </p:nvCxnSpPr>
+        <p:spPr>
+          <a:xfrm flipV="1">
+            <a:off x="3977662" y="4996009"/>
+            <a:ext cx="0" cy="225402"/>
+          </a:xfrm>
+          <a:prstGeom prst="straightConnector1">
+            <a:avLst/>
+          </a:prstGeom>
+          <a:ln>
+            <a:solidFill>
+              <a:srgbClr val="FF0000"/>
+            </a:solidFill>
+            <a:tailEnd type="triangle"/>
+          </a:ln>
+        </p:spPr>
+        <p:style>
+          <a:lnRef idx="2">
+            <a:schemeClr val="accent1"/>
+          </a:lnRef>
+          <a:fillRef idx="0">
+            <a:schemeClr val="accent1"/>
+          </a:fillRef>
+          <a:effectRef idx="1">
+            <a:schemeClr val="accent1"/>
+          </a:effectRef>
+          <a:fontRef idx="minor">
+            <a:schemeClr val="tx1"/>
+          </a:fontRef>
+        </p:style>
+      </p:cxnSp>
+      <p:cxnSp>
+        <p:nvCxnSpPr>
+          <p:cNvPr id="128" name="Straight Arrow Connector 127">
+            <a:extLst>
+              <a:ext uri="{FF2B5EF4-FFF2-40B4-BE49-F238E27FC236}">
+                <a16:creationId xmlns:a16="http://schemas.microsoft.com/office/drawing/2014/main" id="{2FF7584B-44F4-AC4F-1A2B-A5EEAC3183AF}"/>
+              </a:ext>
+            </a:extLst>
+          </p:cNvPr>
+          <p:cNvCxnSpPr/>
+          <p:nvPr/>
+        </p:nvCxnSpPr>
+        <p:spPr>
+          <a:xfrm>
+            <a:off x="4019628" y="5487290"/>
+            <a:ext cx="0" cy="200651"/>
+          </a:xfrm>
+          <a:prstGeom prst="straightConnector1">
+            <a:avLst/>
+          </a:prstGeom>
+          <a:ln>
+            <a:solidFill>
+              <a:srgbClr val="FF0000"/>
+            </a:solidFill>
+            <a:tailEnd type="triangle"/>
+          </a:ln>
+        </p:spPr>
+        <p:style>
+          <a:lnRef idx="2">
+            <a:schemeClr val="accent1"/>
+          </a:lnRef>
+          <a:fillRef idx="0">
+            <a:schemeClr val="accent1"/>
+          </a:fillRef>
+          <a:effectRef idx="1">
+            <a:schemeClr val="accent1"/>
+          </a:effectRef>
+          <a:fontRef idx="minor">
+            <a:schemeClr val="tx1"/>
+          </a:fontRef>
+        </p:style>
+      </p:cxnSp>
+      <p:grpSp>
+        <p:nvGrpSpPr>
+          <p:cNvPr id="131" name="Group 130">
+            <a:extLst>
+              <a:ext uri="{FF2B5EF4-FFF2-40B4-BE49-F238E27FC236}">
+                <a16:creationId xmlns:a16="http://schemas.microsoft.com/office/drawing/2014/main" id="{7985B0F1-5D5A-96E1-0D14-965720B89EB9}"/>
+              </a:ext>
+            </a:extLst>
+          </p:cNvPr>
+          <p:cNvGrpSpPr/>
+          <p:nvPr/>
+        </p:nvGrpSpPr>
+        <p:grpSpPr>
+          <a:xfrm>
+            <a:off x="9307301" y="4163398"/>
+            <a:ext cx="234557" cy="870633"/>
+            <a:chOff x="6175096" y="3854324"/>
+            <a:chExt cx="144932" cy="375881"/>
+          </a:xfrm>
+        </p:grpSpPr>
+        <p:cxnSp>
+          <p:nvCxnSpPr>
+            <p:cNvPr id="132" name="Straight Connector 131">
+              <a:extLst>
+                <a:ext uri="{FF2B5EF4-FFF2-40B4-BE49-F238E27FC236}">
+                  <a16:creationId xmlns:a16="http://schemas.microsoft.com/office/drawing/2014/main" id="{015F5EDE-17BE-0E3E-4DDD-864B147D406F}"/>
+                </a:ext>
+              </a:extLst>
+            </p:cNvPr>
+            <p:cNvCxnSpPr>
+              <a:cxnSpLocks/>
+            </p:cNvCxnSpPr>
+            <p:nvPr/>
+          </p:nvCxnSpPr>
+          <p:spPr>
+            <a:xfrm>
+              <a:off x="6180266" y="3861114"/>
+              <a:ext cx="0" cy="369091"/>
+            </a:xfrm>
+            <a:prstGeom prst="line">
+              <a:avLst/>
+            </a:prstGeom>
+          </p:spPr>
+          <p:style>
+            <a:lnRef idx="2">
+              <a:schemeClr val="accent1"/>
+            </a:lnRef>
+            <a:fillRef idx="0">
+              <a:schemeClr val="accent1"/>
+            </a:fillRef>
+            <a:effectRef idx="1">
+              <a:schemeClr val="accent1"/>
+            </a:effectRef>
+            <a:fontRef idx="minor">
+              <a:schemeClr val="tx1"/>
+            </a:fontRef>
+          </p:style>
+        </p:cxnSp>
+        <p:cxnSp>
+          <p:nvCxnSpPr>
+            <p:cNvPr id="133" name="Straight Connector 132">
+              <a:extLst>
+                <a:ext uri="{FF2B5EF4-FFF2-40B4-BE49-F238E27FC236}">
+                  <a16:creationId xmlns:a16="http://schemas.microsoft.com/office/drawing/2014/main" id="{AC388BCB-D579-EC08-5CBF-2CC85FB74523}"/>
+                </a:ext>
+              </a:extLst>
+            </p:cNvPr>
+            <p:cNvCxnSpPr>
+              <a:cxnSpLocks/>
+            </p:cNvCxnSpPr>
+            <p:nvPr/>
+          </p:nvCxnSpPr>
+          <p:spPr>
+            <a:xfrm>
+              <a:off x="6320028" y="3936909"/>
+              <a:ext cx="0" cy="212558"/>
+            </a:xfrm>
+            <a:prstGeom prst="line">
+              <a:avLst/>
+            </a:prstGeom>
+          </p:spPr>
+          <p:style>
+            <a:lnRef idx="2">
+              <a:schemeClr val="accent1"/>
+            </a:lnRef>
+            <a:fillRef idx="0">
+              <a:schemeClr val="accent1"/>
+            </a:fillRef>
+            <a:effectRef idx="1">
+              <a:schemeClr val="accent1"/>
+            </a:effectRef>
+            <a:fontRef idx="minor">
+              <a:schemeClr val="tx1"/>
+            </a:fontRef>
+          </p:style>
+        </p:cxnSp>
+        <p:cxnSp>
+          <p:nvCxnSpPr>
+            <p:cNvPr id="134" name="Straight Connector 133">
+              <a:extLst>
+                <a:ext uri="{FF2B5EF4-FFF2-40B4-BE49-F238E27FC236}">
+                  <a16:creationId xmlns:a16="http://schemas.microsoft.com/office/drawing/2014/main" id="{0E401010-BF44-D516-E855-B8E547F967F7}"/>
+                </a:ext>
+              </a:extLst>
+            </p:cNvPr>
+            <p:cNvCxnSpPr>
+              <a:cxnSpLocks/>
+            </p:cNvCxnSpPr>
+            <p:nvPr/>
+          </p:nvCxnSpPr>
+          <p:spPr>
+            <a:xfrm flipH="1">
+              <a:off x="6175096" y="4152620"/>
+              <a:ext cx="144932" cy="77585"/>
+            </a:xfrm>
+            <a:prstGeom prst="line">
+              <a:avLst/>
+            </a:prstGeom>
+          </p:spPr>
+          <p:style>
+            <a:lnRef idx="2">
+              <a:schemeClr val="accent1"/>
+            </a:lnRef>
+            <a:fillRef idx="0">
+              <a:schemeClr val="accent1"/>
+            </a:fillRef>
+            <a:effectRef idx="1">
+              <a:schemeClr val="accent1"/>
+            </a:effectRef>
+            <a:fontRef idx="minor">
+              <a:schemeClr val="tx1"/>
+            </a:fontRef>
+          </p:style>
+        </p:cxnSp>
+        <p:cxnSp>
+          <p:nvCxnSpPr>
+            <p:cNvPr id="135" name="Straight Connector 134">
+              <a:extLst>
+                <a:ext uri="{FF2B5EF4-FFF2-40B4-BE49-F238E27FC236}">
+                  <a16:creationId xmlns:a16="http://schemas.microsoft.com/office/drawing/2014/main" id="{F7768323-F4FD-A2FE-5BEF-EF5EE077975D}"/>
+                </a:ext>
+              </a:extLst>
+            </p:cNvPr>
+            <p:cNvCxnSpPr>
+              <a:cxnSpLocks/>
+            </p:cNvCxnSpPr>
+            <p:nvPr/>
+          </p:nvCxnSpPr>
+          <p:spPr>
+            <a:xfrm flipH="1" flipV="1">
+              <a:off x="6175096" y="3854324"/>
+              <a:ext cx="144932" cy="85738"/>
+            </a:xfrm>
+            <a:prstGeom prst="line">
+              <a:avLst/>
+            </a:prstGeom>
+          </p:spPr>
+          <p:style>
+            <a:lnRef idx="2">
+              <a:schemeClr val="accent1"/>
+            </a:lnRef>
+            <a:fillRef idx="0">
+              <a:schemeClr val="accent1"/>
+            </a:fillRef>
+            <a:effectRef idx="1">
+              <a:schemeClr val="accent1"/>
+            </a:effectRef>
+            <a:fontRef idx="minor">
+              <a:schemeClr val="tx1"/>
+            </a:fontRef>
+          </p:style>
+        </p:cxnSp>
+      </p:grpSp>
+      <p:cxnSp>
+        <p:nvCxnSpPr>
+          <p:cNvPr id="137" name="Straight Connector 136">
+            <a:extLst>
+              <a:ext uri="{FF2B5EF4-FFF2-40B4-BE49-F238E27FC236}">
+                <a16:creationId xmlns:a16="http://schemas.microsoft.com/office/drawing/2014/main" id="{3791C07A-D6C6-EEE2-DD1A-AAFBD13E03BD}"/>
+              </a:ext>
+            </a:extLst>
+          </p:cNvPr>
+          <p:cNvCxnSpPr>
+            <a:cxnSpLocks/>
+          </p:cNvCxnSpPr>
+          <p:nvPr/>
+        </p:nvCxnSpPr>
+        <p:spPr>
+          <a:xfrm>
+            <a:off x="9542834" y="4611234"/>
+            <a:ext cx="136187" cy="0"/>
+          </a:xfrm>
+          <a:prstGeom prst="line">
+            <a:avLst/>
+          </a:prstGeom>
+        </p:spPr>
+        <p:style>
+          <a:lnRef idx="2">
+            <a:schemeClr val="accent1"/>
+          </a:lnRef>
+          <a:fillRef idx="0">
+            <a:schemeClr val="accent1"/>
+          </a:fillRef>
+          <a:effectRef idx="1">
+            <a:schemeClr val="accent1"/>
+          </a:effectRef>
+          <a:fontRef idx="minor">
+            <a:schemeClr val="tx1"/>
+          </a:fontRef>
+        </p:style>
+      </p:cxnSp>
+      <p:cxnSp>
+        <p:nvCxnSpPr>
+          <p:cNvPr id="138" name="Straight Arrow Connector 137">
+            <a:extLst>
+              <a:ext uri="{FF2B5EF4-FFF2-40B4-BE49-F238E27FC236}">
+                <a16:creationId xmlns:a16="http://schemas.microsoft.com/office/drawing/2014/main" id="{34331E89-6C0B-1C5D-9642-5E0D0D9791DF}"/>
+              </a:ext>
+            </a:extLst>
+          </p:cNvPr>
+          <p:cNvCxnSpPr>
+            <a:cxnSpLocks/>
+          </p:cNvCxnSpPr>
+          <p:nvPr/>
+        </p:nvCxnSpPr>
+        <p:spPr>
+          <a:xfrm>
+            <a:off x="8930725" y="4560055"/>
+            <a:ext cx="374301" cy="0"/>
+          </a:xfrm>
+          <a:prstGeom prst="straightConnector1">
+            <a:avLst/>
+          </a:prstGeom>
+          <a:ln>
+            <a:tailEnd type="triangle"/>
+          </a:ln>
+        </p:spPr>
+        <p:style>
+          <a:lnRef idx="2">
+            <a:schemeClr val="accent1"/>
+          </a:lnRef>
+          <a:fillRef idx="0">
+            <a:schemeClr val="accent1"/>
+          </a:fillRef>
+          <a:effectRef idx="1">
+            <a:schemeClr val="accent1"/>
+          </a:effectRef>
+          <a:fontRef idx="minor">
+            <a:schemeClr val="tx1"/>
+          </a:fontRef>
+        </p:style>
+      </p:cxnSp>
+      <p:sp>
+        <p:nvSpPr>
+          <p:cNvPr id="140" name="TextBox 139">
+            <a:extLst>
+              <a:ext uri="{FF2B5EF4-FFF2-40B4-BE49-F238E27FC236}">
+                <a16:creationId xmlns:a16="http://schemas.microsoft.com/office/drawing/2014/main" id="{42D03EFD-C681-4EA9-84D6-2D58957476C9}"/>
               </a:ext>
             </a:extLst>
           </p:cNvPr>
@@ -10376,7 +10224,7 @@
         </p:nvSpPr>
         <p:spPr>
           <a:xfrm>
-            <a:off x="8892828" y="4599810"/>
+            <a:off x="7868407" y="4099798"/>
             <a:ext cx="413896" cy="230832"/>
           </a:xfrm>
           <a:prstGeom prst="rect">
@@ -10398,12 +10246,126 @@
           </a:p>
         </p:txBody>
       </p:sp>
+      <p:sp>
+        <p:nvSpPr>
+          <p:cNvPr id="141" name="TextBox 140">
+            <a:extLst>
+              <a:ext uri="{FF2B5EF4-FFF2-40B4-BE49-F238E27FC236}">
+                <a16:creationId xmlns:a16="http://schemas.microsoft.com/office/drawing/2014/main" id="{130DB228-30F1-3EAB-8348-ADF6B84F5227}"/>
+              </a:ext>
+            </a:extLst>
+          </p:cNvPr>
+          <p:cNvSpPr txBox="1"/>
+          <p:nvPr/>
+        </p:nvSpPr>
+        <p:spPr>
+          <a:xfrm>
+            <a:off x="7871560" y="4515171"/>
+            <a:ext cx="407484" cy="230832"/>
+          </a:xfrm>
+          <a:prstGeom prst="rect">
+            <a:avLst/>
+          </a:prstGeom>
+          <a:noFill/>
+        </p:spPr>
+        <p:txBody>
+          <a:bodyPr wrap="none" rtlCol="0">
+            <a:spAutoFit/>
+          </a:bodyPr>
+          <a:lstStyle/>
+          <a:p>
+            <a:pPr algn="ctr"/>
+            <a:r>
+              <a:rPr lang="en-US" sz="900" dirty="0" err="1"/>
+              <a:t>imm</a:t>
+            </a:r>
+            <a:endParaRPr lang="en-US" sz="900" dirty="0"/>
+          </a:p>
+        </p:txBody>
+      </p:sp>
+      <p:cxnSp>
+        <p:nvCxnSpPr>
+          <p:cNvPr id="142" name="Straight Arrow Connector 141">
+            <a:extLst>
+              <a:ext uri="{FF2B5EF4-FFF2-40B4-BE49-F238E27FC236}">
+                <a16:creationId xmlns:a16="http://schemas.microsoft.com/office/drawing/2014/main" id="{8C8DC418-30F2-2E6B-79EB-C50A8BC90A03}"/>
+              </a:ext>
+            </a:extLst>
+          </p:cNvPr>
+          <p:cNvCxnSpPr>
+            <a:cxnSpLocks/>
+          </p:cNvCxnSpPr>
+          <p:nvPr/>
+        </p:nvCxnSpPr>
+        <p:spPr>
+          <a:xfrm flipV="1">
+            <a:off x="9214921" y="4718145"/>
+            <a:ext cx="100338" cy="2498"/>
+          </a:xfrm>
+          <a:prstGeom prst="straightConnector1">
+            <a:avLst/>
+          </a:prstGeom>
+          <a:ln>
+            <a:tailEnd type="triangle"/>
+          </a:ln>
+        </p:spPr>
+        <p:style>
+          <a:lnRef idx="2">
+            <a:schemeClr val="accent1"/>
+          </a:lnRef>
+          <a:fillRef idx="0">
+            <a:schemeClr val="accent1"/>
+          </a:fillRef>
+          <a:effectRef idx="1">
+            <a:schemeClr val="accent1"/>
+          </a:effectRef>
+          <a:fontRef idx="minor">
+            <a:schemeClr val="tx1"/>
+          </a:fontRef>
+        </p:style>
+      </p:cxnSp>
+      <p:sp>
+        <p:nvSpPr>
+          <p:cNvPr id="143" name="TextBox 142">
+            <a:extLst>
+              <a:ext uri="{FF2B5EF4-FFF2-40B4-BE49-F238E27FC236}">
+                <a16:creationId xmlns:a16="http://schemas.microsoft.com/office/drawing/2014/main" id="{28B52DA0-5124-B1DD-6399-E77E9F27E337}"/>
+              </a:ext>
+            </a:extLst>
+          </p:cNvPr>
+          <p:cNvSpPr txBox="1"/>
+          <p:nvPr/>
+        </p:nvSpPr>
+        <p:spPr>
+          <a:xfrm>
+            <a:off x="8892828" y="4599810"/>
+            <a:ext cx="413896" cy="230832"/>
+          </a:xfrm>
+          <a:prstGeom prst="rect">
+            <a:avLst/>
+          </a:prstGeom>
+          <a:noFill/>
+        </p:spPr>
+        <p:txBody>
+          <a:bodyPr wrap="none" rtlCol="0">
+            <a:spAutoFit/>
+          </a:bodyPr>
+          <a:lstStyle/>
+          <a:p>
+            <a:pPr algn="ctr"/>
+            <a:r>
+              <a:rPr lang="en-US" sz="900" dirty="0"/>
+              <a:t>NPC</a:t>
+            </a:r>
+          </a:p>
+        </p:txBody>
+      </p:sp>
       <p:grpSp>
         <p:nvGrpSpPr>
-          <p:cNvPr id="61" name="Group 60">
-            <a:extLst>
-              <a:ext uri="{FF2B5EF4-FFF2-40B4-BE49-F238E27FC236}">
-                <a16:creationId xmlns:a16="http://schemas.microsoft.com/office/drawing/2014/main" id="{16FC76F5-1B0B-DFD2-2DFE-467D7246D31F}"/>
+          <p:cNvPr id="144" name="Group 143">
+            <a:extLst>
+              <a:ext uri="{FF2B5EF4-FFF2-40B4-BE49-F238E27FC236}">
+                <a16:creationId xmlns:a16="http://schemas.microsoft.com/office/drawing/2014/main" id="{668D9262-FD4F-8437-B65A-FF28CF8998C5}"/>
               </a:ext>
             </a:extLst>
           </p:cNvPr>
@@ -10420,10 +10382,10 @@
         </p:grpSpPr>
         <p:cxnSp>
           <p:nvCxnSpPr>
-            <p:cNvPr id="66" name="Straight Connector 65">
+            <p:cNvPr id="145" name="Straight Connector 144">
               <a:extLst>
                 <a:ext uri="{FF2B5EF4-FFF2-40B4-BE49-F238E27FC236}">
-                  <a16:creationId xmlns:a16="http://schemas.microsoft.com/office/drawing/2014/main" id="{C0F3C053-4536-CA7C-4EE4-418998840D9A}"/>
+                  <a16:creationId xmlns:a16="http://schemas.microsoft.com/office/drawing/2014/main" id="{AEF94313-2CD9-F730-2951-3C043984003F}"/>
                 </a:ext>
               </a:extLst>
             </p:cNvPr>
@@ -10458,10 +10420,10 @@
         </p:cxnSp>
         <p:cxnSp>
           <p:nvCxnSpPr>
-            <p:cNvPr id="67" name="Straight Connector 66">
+            <p:cNvPr id="146" name="Straight Connector 145">
               <a:extLst>
                 <a:ext uri="{FF2B5EF4-FFF2-40B4-BE49-F238E27FC236}">
-                  <a16:creationId xmlns:a16="http://schemas.microsoft.com/office/drawing/2014/main" id="{F4ACF4A3-01ED-D5D2-AE79-3A96A5B0A6EC}"/>
+                  <a16:creationId xmlns:a16="http://schemas.microsoft.com/office/drawing/2014/main" id="{0FE960F4-1D95-AE3E-FD52-BB27EEA05698}"/>
                 </a:ext>
               </a:extLst>
             </p:cNvPr>
@@ -10496,10 +10458,10 @@
         </p:cxnSp>
         <p:cxnSp>
           <p:nvCxnSpPr>
-            <p:cNvPr id="68" name="Straight Connector 67">
+            <p:cNvPr id="147" name="Straight Connector 146">
               <a:extLst>
                 <a:ext uri="{FF2B5EF4-FFF2-40B4-BE49-F238E27FC236}">
-                  <a16:creationId xmlns:a16="http://schemas.microsoft.com/office/drawing/2014/main" id="{F8BA57EF-BE1E-D9E4-5BCF-2A7FF9099FFC}"/>
+                  <a16:creationId xmlns:a16="http://schemas.microsoft.com/office/drawing/2014/main" id="{2DD4560C-B14D-1712-6B66-8BA78DA65DB6}"/>
                 </a:ext>
               </a:extLst>
             </p:cNvPr>
@@ -10534,10 +10496,10 @@
         </p:cxnSp>
         <p:cxnSp>
           <p:nvCxnSpPr>
-            <p:cNvPr id="72" name="Straight Connector 71">
+            <p:cNvPr id="148" name="Straight Connector 147">
               <a:extLst>
                 <a:ext uri="{FF2B5EF4-FFF2-40B4-BE49-F238E27FC236}">
-                  <a16:creationId xmlns:a16="http://schemas.microsoft.com/office/drawing/2014/main" id="{35E72814-B29A-A6B9-3873-6A3C7C551AE8}"/>
+                  <a16:creationId xmlns:a16="http://schemas.microsoft.com/office/drawing/2014/main" id="{76244964-CE6E-4181-63B0-7D164FD80CAD}"/>
                 </a:ext>
               </a:extLst>
             </p:cNvPr>
@@ -10572,10 +10534,10 @@
         </p:cxnSp>
         <p:cxnSp>
           <p:nvCxnSpPr>
-            <p:cNvPr id="75" name="Straight Connector 74">
+            <p:cNvPr id="149" name="Straight Connector 148">
               <a:extLst>
                 <a:ext uri="{FF2B5EF4-FFF2-40B4-BE49-F238E27FC236}">
-                  <a16:creationId xmlns:a16="http://schemas.microsoft.com/office/drawing/2014/main" id="{8E1DD0ED-9DFA-FDD8-737C-FB8DE70DA26A}"/>
+                  <a16:creationId xmlns:a16="http://schemas.microsoft.com/office/drawing/2014/main" id="{B92832FC-E56A-5B11-0E7E-1F6ADE6DE96F}"/>
                 </a:ext>
               </a:extLst>
             </p:cNvPr>
@@ -10610,10 +10572,10 @@
         </p:cxnSp>
         <p:cxnSp>
           <p:nvCxnSpPr>
-            <p:cNvPr id="76" name="Straight Connector 75">
+            <p:cNvPr id="150" name="Straight Connector 149">
               <a:extLst>
                 <a:ext uri="{FF2B5EF4-FFF2-40B4-BE49-F238E27FC236}">
-                  <a16:creationId xmlns:a16="http://schemas.microsoft.com/office/drawing/2014/main" id="{10A822E0-4EAA-5FC7-F211-354CF1DD8C97}"/>
+                  <a16:creationId xmlns:a16="http://schemas.microsoft.com/office/drawing/2014/main" id="{4C24C015-6A2B-58F9-2636-B99F0EF08544}"/>
                 </a:ext>
               </a:extLst>
             </p:cNvPr>
@@ -10648,10 +10610,10 @@
         </p:cxnSp>
         <p:cxnSp>
           <p:nvCxnSpPr>
-            <p:cNvPr id="77" name="Straight Connector 76">
+            <p:cNvPr id="151" name="Straight Connector 150">
               <a:extLst>
                 <a:ext uri="{FF2B5EF4-FFF2-40B4-BE49-F238E27FC236}">
-                  <a16:creationId xmlns:a16="http://schemas.microsoft.com/office/drawing/2014/main" id="{05428BE6-A028-2505-F585-6481D0268AE8}"/>
+                  <a16:creationId xmlns:a16="http://schemas.microsoft.com/office/drawing/2014/main" id="{6613CFF8-5964-53FA-3F4B-1524F218D7F0}"/>
                 </a:ext>
               </a:extLst>
             </p:cNvPr>
@@ -10687,10 +10649,10 @@
       </p:grpSp>
       <p:cxnSp>
         <p:nvCxnSpPr>
-          <p:cNvPr id="78" name="Straight Arrow Connector 77">
-            <a:extLst>
-              <a:ext uri="{FF2B5EF4-FFF2-40B4-BE49-F238E27FC236}">
-                <a16:creationId xmlns:a16="http://schemas.microsoft.com/office/drawing/2014/main" id="{179B177D-A620-CBB7-1F57-B85744BC1768}"/>
+          <p:cNvPr id="152" name="Straight Arrow Connector 151">
+            <a:extLst>
+              <a:ext uri="{FF2B5EF4-FFF2-40B4-BE49-F238E27FC236}">
+                <a16:creationId xmlns:a16="http://schemas.microsoft.com/office/drawing/2014/main" id="{A6C1A2E8-6BD1-A1B8-EC64-95288FD839B1}"/>
               </a:ext>
             </a:extLst>
           </p:cNvPr>
@@ -10728,10 +10690,10 @@
       </p:cxnSp>
       <p:cxnSp>
         <p:nvCxnSpPr>
-          <p:cNvPr id="79" name="Straight Arrow Connector 78">
-            <a:extLst>
-              <a:ext uri="{FF2B5EF4-FFF2-40B4-BE49-F238E27FC236}">
-                <a16:creationId xmlns:a16="http://schemas.microsoft.com/office/drawing/2014/main" id="{64751035-C943-F4AC-E721-2329E2124269}"/>
+          <p:cNvPr id="153" name="Straight Arrow Connector 152">
+            <a:extLst>
+              <a:ext uri="{FF2B5EF4-FFF2-40B4-BE49-F238E27FC236}">
+                <a16:creationId xmlns:a16="http://schemas.microsoft.com/office/drawing/2014/main" id="{17BA2245-CE26-F7B3-650C-1F9D9C02DE77}"/>
               </a:ext>
             </a:extLst>
           </p:cNvPr>
@@ -10767,10 +10729,10 @@
       </p:cxnSp>
       <p:sp>
         <p:nvSpPr>
-          <p:cNvPr id="80" name="TextBox 79">
-            <a:extLst>
-              <a:ext uri="{FF2B5EF4-FFF2-40B4-BE49-F238E27FC236}">
-                <a16:creationId xmlns:a16="http://schemas.microsoft.com/office/drawing/2014/main" id="{55A3E227-0BF3-A73B-3BC7-43B3ED0C951A}"/>
+          <p:cNvPr id="154" name="TextBox 153">
+            <a:extLst>
+              <a:ext uri="{FF2B5EF4-FFF2-40B4-BE49-F238E27FC236}">
+                <a16:creationId xmlns:a16="http://schemas.microsoft.com/office/drawing/2014/main" id="{A1848007-5C57-2514-E0D9-E9FAA0E1581E}"/>
               </a:ext>
             </a:extLst>
           </p:cNvPr>
@@ -10803,10 +10765,10 @@
       </p:sp>
       <p:cxnSp>
         <p:nvCxnSpPr>
-          <p:cNvPr id="82" name="Straight Arrow Connector 81">
-            <a:extLst>
-              <a:ext uri="{FF2B5EF4-FFF2-40B4-BE49-F238E27FC236}">
-                <a16:creationId xmlns:a16="http://schemas.microsoft.com/office/drawing/2014/main" id="{2BADD6A5-EF1D-D5D2-C1C0-C06AAF0FB60A}"/>
+          <p:cNvPr id="155" name="Straight Arrow Connector 154">
+            <a:extLst>
+              <a:ext uri="{FF2B5EF4-FFF2-40B4-BE49-F238E27FC236}">
+                <a16:creationId xmlns:a16="http://schemas.microsoft.com/office/drawing/2014/main" id="{97DF8482-C9C8-E044-1756-D3B042D2D7ED}"/>
               </a:ext>
             </a:extLst>
           </p:cNvPr>
@@ -10844,10 +10806,10 @@
       </p:cxnSp>
       <p:sp>
         <p:nvSpPr>
-          <p:cNvPr id="84" name="TextBox 83">
-            <a:extLst>
-              <a:ext uri="{FF2B5EF4-FFF2-40B4-BE49-F238E27FC236}">
-                <a16:creationId xmlns:a16="http://schemas.microsoft.com/office/drawing/2014/main" id="{D1142331-E346-04E4-CE7D-40DA0254B7E8}"/>
+          <p:cNvPr id="156" name="TextBox 155">
+            <a:extLst>
+              <a:ext uri="{FF2B5EF4-FFF2-40B4-BE49-F238E27FC236}">
+                <a16:creationId xmlns:a16="http://schemas.microsoft.com/office/drawing/2014/main" id="{8EE68CD5-3828-66D3-CF69-264F08A0AC09}"/>
               </a:ext>
             </a:extLst>
           </p:cNvPr>
@@ -10880,10 +10842,10 @@
       </p:sp>
       <p:cxnSp>
         <p:nvCxnSpPr>
-          <p:cNvPr id="86" name="Straight Arrow Connector 85">
-            <a:extLst>
-              <a:ext uri="{FF2B5EF4-FFF2-40B4-BE49-F238E27FC236}">
-                <a16:creationId xmlns:a16="http://schemas.microsoft.com/office/drawing/2014/main" id="{241FC06E-49A1-E737-FC39-BA3F124F2533}"/>
+          <p:cNvPr id="157" name="Straight Arrow Connector 156">
+            <a:extLst>
+              <a:ext uri="{FF2B5EF4-FFF2-40B4-BE49-F238E27FC236}">
+                <a16:creationId xmlns:a16="http://schemas.microsoft.com/office/drawing/2014/main" id="{CE23F81E-1E87-DE9B-046A-751F5B2EF337}"/>
               </a:ext>
             </a:extLst>
           </p:cNvPr>
@@ -10921,10 +10883,10 @@
       </p:cxnSp>
       <p:cxnSp>
         <p:nvCxnSpPr>
-          <p:cNvPr id="88" name="Straight Arrow Connector 87">
-            <a:extLst>
-              <a:ext uri="{FF2B5EF4-FFF2-40B4-BE49-F238E27FC236}">
-                <a16:creationId xmlns:a16="http://schemas.microsoft.com/office/drawing/2014/main" id="{1BC490C6-9F7A-C0A3-5E86-3D4C3F2DB87B}"/>
+          <p:cNvPr id="159" name="Straight Arrow Connector 158">
+            <a:extLst>
+              <a:ext uri="{FF2B5EF4-FFF2-40B4-BE49-F238E27FC236}">
+                <a16:creationId xmlns:a16="http://schemas.microsoft.com/office/drawing/2014/main" id="{A3FC0B57-60E9-D03D-A66F-04619217984F}"/>
               </a:ext>
             </a:extLst>
           </p:cNvPr>
@@ -10962,10 +10924,10 @@
       </p:cxnSp>
       <p:cxnSp>
         <p:nvCxnSpPr>
-          <p:cNvPr id="92" name="Straight Arrow Connector 91">
-            <a:extLst>
-              <a:ext uri="{FF2B5EF4-FFF2-40B4-BE49-F238E27FC236}">
-                <a16:creationId xmlns:a16="http://schemas.microsoft.com/office/drawing/2014/main" id="{A258B8B8-0DCC-7046-F080-D64CBE4BD6A0}"/>
+          <p:cNvPr id="160" name="Straight Arrow Connector 159">
+            <a:extLst>
+              <a:ext uri="{FF2B5EF4-FFF2-40B4-BE49-F238E27FC236}">
+                <a16:creationId xmlns:a16="http://schemas.microsoft.com/office/drawing/2014/main" id="{5F47AAA6-0318-D08A-6320-0A794954F811}"/>
               </a:ext>
             </a:extLst>
           </p:cNvPr>
@@ -10984,281 +10946,6 @@
           </a:prstGeom>
           <a:ln>
             <a:tailEnd type="none"/>
-          </a:ln>
-        </p:spPr>
-        <p:style>
-          <a:lnRef idx="2">
-            <a:schemeClr val="accent1"/>
-          </a:lnRef>
-          <a:fillRef idx="0">
-            <a:schemeClr val="accent1"/>
-          </a:fillRef>
-          <a:effectRef idx="1">
-            <a:schemeClr val="accent1"/>
-          </a:effectRef>
-          <a:fontRef idx="minor">
-            <a:schemeClr val="tx1"/>
-          </a:fontRef>
-        </p:style>
-      </p:cxnSp>
-      <p:sp>
-        <p:nvSpPr>
-          <p:cNvPr id="106" name="Rectangle 105">
-            <a:extLst>
-              <a:ext uri="{FF2B5EF4-FFF2-40B4-BE49-F238E27FC236}">
-                <a16:creationId xmlns:a16="http://schemas.microsoft.com/office/drawing/2014/main" id="{802EBAD3-1207-E175-F4E6-F1CAAFD5CB84}"/>
-              </a:ext>
-            </a:extLst>
-          </p:cNvPr>
-          <p:cNvSpPr/>
-          <p:nvPr/>
-        </p:nvSpPr>
-        <p:spPr>
-          <a:xfrm>
-            <a:off x="4112869" y="5087156"/>
-            <a:ext cx="663423" cy="460640"/>
-          </a:xfrm>
-          <a:prstGeom prst="rect">
-            <a:avLst/>
-          </a:prstGeom>
-          <a:solidFill>
-            <a:schemeClr val="bg1"/>
-          </a:solidFill>
-        </p:spPr>
-        <p:style>
-          <a:lnRef idx="2">
-            <a:schemeClr val="accent1">
-              <a:shade val="15000"/>
-            </a:schemeClr>
-          </a:lnRef>
-          <a:fillRef idx="1">
-            <a:schemeClr val="accent1"/>
-          </a:fillRef>
-          <a:effectRef idx="0">
-            <a:schemeClr val="accent1"/>
-          </a:effectRef>
-          <a:fontRef idx="minor">
-            <a:schemeClr val="lt1"/>
-          </a:fontRef>
-        </p:style>
-        <p:txBody>
-          <a:bodyPr rtlCol="0" anchor="ctr"/>
-          <a:lstStyle/>
-          <a:p>
-            <a:pPr algn="ctr"/>
-            <a:r>
-              <a:rPr lang="en-US" dirty="0"/>
-              <a:t>PC</a:t>
-            </a:r>
-          </a:p>
-        </p:txBody>
-      </p:sp>
-      <p:sp>
-        <p:nvSpPr>
-          <p:cNvPr id="107" name="TextBox 106">
-            <a:extLst>
-              <a:ext uri="{FF2B5EF4-FFF2-40B4-BE49-F238E27FC236}">
-                <a16:creationId xmlns:a16="http://schemas.microsoft.com/office/drawing/2014/main" id="{B1546BBC-B812-DED8-4B26-9FABE47BC3AA}"/>
-              </a:ext>
-            </a:extLst>
-          </p:cNvPr>
-          <p:cNvSpPr txBox="1"/>
-          <p:nvPr/>
-        </p:nvSpPr>
-        <p:spPr>
-          <a:xfrm>
-            <a:off x="4171777" y="5125610"/>
-            <a:ext cx="574196" cy="384721"/>
-          </a:xfrm>
-          <a:prstGeom prst="rect">
-            <a:avLst/>
-          </a:prstGeom>
-          <a:noFill/>
-        </p:spPr>
-        <p:txBody>
-          <a:bodyPr wrap="none" rtlCol="0">
-            <a:spAutoFit/>
-          </a:bodyPr>
-          <a:lstStyle/>
-          <a:p>
-            <a:pPr algn="ctr"/>
-            <a:r>
-              <a:rPr lang="en-US" sz="1000" dirty="0"/>
-              <a:t>Stall</a:t>
-            </a:r>
-          </a:p>
-          <a:p>
-            <a:pPr algn="ctr"/>
-            <a:r>
-              <a:rPr lang="en-US" sz="900" dirty="0"/>
-              <a:t>counter</a:t>
-            </a:r>
-          </a:p>
-        </p:txBody>
-      </p:sp>
-      <p:cxnSp>
-        <p:nvCxnSpPr>
-          <p:cNvPr id="108" name="Straight Arrow Connector 107">
-            <a:extLst>
-              <a:ext uri="{FF2B5EF4-FFF2-40B4-BE49-F238E27FC236}">
-                <a16:creationId xmlns:a16="http://schemas.microsoft.com/office/drawing/2014/main" id="{55D04E53-F0F2-CC32-832F-AD990A0BD8D2}"/>
-              </a:ext>
-            </a:extLst>
-          </p:cNvPr>
-          <p:cNvCxnSpPr>
-            <a:cxnSpLocks/>
-          </p:cNvCxnSpPr>
-          <p:nvPr/>
-        </p:nvCxnSpPr>
-        <p:spPr>
-          <a:xfrm>
-            <a:off x="3882996" y="5224369"/>
-            <a:ext cx="229874" cy="0"/>
-          </a:xfrm>
-          <a:prstGeom prst="straightConnector1">
-            <a:avLst/>
-          </a:prstGeom>
-          <a:ln>
-            <a:solidFill>
-              <a:srgbClr val="FF0000"/>
-            </a:solidFill>
-            <a:tailEnd type="triangle"/>
-          </a:ln>
-        </p:spPr>
-        <p:style>
-          <a:lnRef idx="2">
-            <a:schemeClr val="accent1"/>
-          </a:lnRef>
-          <a:fillRef idx="0">
-            <a:schemeClr val="accent1"/>
-          </a:fillRef>
-          <a:effectRef idx="1">
-            <a:schemeClr val="accent1"/>
-          </a:effectRef>
-          <a:fontRef idx="minor">
-            <a:schemeClr val="tx1"/>
-          </a:fontRef>
-        </p:style>
-      </p:cxnSp>
-      <p:sp>
-        <p:nvSpPr>
-          <p:cNvPr id="109" name="Rectangle 108">
-            <a:extLst>
-              <a:ext uri="{FF2B5EF4-FFF2-40B4-BE49-F238E27FC236}">
-                <a16:creationId xmlns:a16="http://schemas.microsoft.com/office/drawing/2014/main" id="{A81CABDD-6671-8136-C507-5421CBF47C22}"/>
-              </a:ext>
-            </a:extLst>
-          </p:cNvPr>
-          <p:cNvSpPr/>
-          <p:nvPr/>
-        </p:nvSpPr>
-        <p:spPr>
-          <a:xfrm>
-            <a:off x="3204207" y="5087370"/>
-            <a:ext cx="678789" cy="484706"/>
-          </a:xfrm>
-          <a:prstGeom prst="rect">
-            <a:avLst/>
-          </a:prstGeom>
-          <a:solidFill>
-            <a:schemeClr val="bg1"/>
-          </a:solidFill>
-        </p:spPr>
-        <p:style>
-          <a:lnRef idx="2">
-            <a:schemeClr val="accent1">
-              <a:shade val="15000"/>
-            </a:schemeClr>
-          </a:lnRef>
-          <a:fillRef idx="1">
-            <a:schemeClr val="accent1"/>
-          </a:fillRef>
-          <a:effectRef idx="0">
-            <a:schemeClr val="accent1"/>
-          </a:effectRef>
-          <a:fontRef idx="minor">
-            <a:schemeClr val="lt1"/>
-          </a:fontRef>
-        </p:style>
-        <p:txBody>
-          <a:bodyPr rtlCol="0" anchor="ctr"/>
-          <a:lstStyle/>
-          <a:p>
-            <a:pPr algn="ctr"/>
-            <a:r>
-              <a:rPr lang="en-US" dirty="0"/>
-              <a:t>PC</a:t>
-            </a:r>
-          </a:p>
-        </p:txBody>
-      </p:sp>
-      <p:sp>
-        <p:nvSpPr>
-          <p:cNvPr id="110" name="TextBox 109">
-            <a:extLst>
-              <a:ext uri="{FF2B5EF4-FFF2-40B4-BE49-F238E27FC236}">
-                <a16:creationId xmlns:a16="http://schemas.microsoft.com/office/drawing/2014/main" id="{F182B11B-81F0-C7FD-76B3-7C27A04FAE43}"/>
-              </a:ext>
-            </a:extLst>
-          </p:cNvPr>
-          <p:cNvSpPr txBox="1"/>
-          <p:nvPr/>
-        </p:nvSpPr>
-        <p:spPr>
-          <a:xfrm>
-            <a:off x="3169553" y="5107257"/>
-            <a:ext cx="729687" cy="400110"/>
-          </a:xfrm>
-          <a:prstGeom prst="rect">
-            <a:avLst/>
-          </a:prstGeom>
-          <a:noFill/>
-        </p:spPr>
-        <p:txBody>
-          <a:bodyPr wrap="none" rtlCol="0">
-            <a:spAutoFit/>
-          </a:bodyPr>
-          <a:lstStyle/>
-          <a:p>
-            <a:pPr algn="ctr"/>
-            <a:r>
-              <a:rPr lang="en-US" sz="1000" dirty="0"/>
-              <a:t>Hazard</a:t>
-            </a:r>
-          </a:p>
-          <a:p>
-            <a:pPr algn="ctr"/>
-            <a:r>
-              <a:rPr lang="en-US" sz="1000" dirty="0"/>
-              <a:t>Detection</a:t>
-            </a:r>
-          </a:p>
-        </p:txBody>
-      </p:sp>
-      <p:cxnSp>
-        <p:nvCxnSpPr>
-          <p:cNvPr id="118" name="Straight Arrow Connector 117">
-            <a:extLst>
-              <a:ext uri="{FF2B5EF4-FFF2-40B4-BE49-F238E27FC236}">
-                <a16:creationId xmlns:a16="http://schemas.microsoft.com/office/drawing/2014/main" id="{3FFE2C33-996E-7ADF-F9EF-9E2CF7B04F43}"/>
-              </a:ext>
-            </a:extLst>
-          </p:cNvPr>
-          <p:cNvCxnSpPr>
-            <a:cxnSpLocks/>
-          </p:cNvCxnSpPr>
-          <p:nvPr/>
-        </p:nvCxnSpPr>
-        <p:spPr>
-          <a:xfrm>
-            <a:off x="2743887" y="5277871"/>
-            <a:ext cx="442253" cy="0"/>
-          </a:xfrm>
-          <a:prstGeom prst="straightConnector1">
-            <a:avLst/>
-          </a:prstGeom>
-          <a:ln>
-            <a:tailEnd type="triangle"/>
           </a:ln>
         </p:spPr>
         <p:style>
@@ -11278,10 +10965,10 @@
       </p:cxnSp>
       <p:cxnSp>
         <p:nvCxnSpPr>
-          <p:cNvPr id="119" name="Straight Arrow Connector 118">
-            <a:extLst>
-              <a:ext uri="{FF2B5EF4-FFF2-40B4-BE49-F238E27FC236}">
-                <a16:creationId xmlns:a16="http://schemas.microsoft.com/office/drawing/2014/main" id="{E7E3730A-42E6-0433-39FD-2ACC0255676D}"/>
+          <p:cNvPr id="161" name="Straight Arrow Connector 160">
+            <a:extLst>
+              <a:ext uri="{FF2B5EF4-FFF2-40B4-BE49-F238E27FC236}">
+                <a16:creationId xmlns:a16="http://schemas.microsoft.com/office/drawing/2014/main" id="{0FFDF2F4-DDDE-FB8D-64B3-74C68824CD4E}"/>
               </a:ext>
             </a:extLst>
           </p:cNvPr>
@@ -11291,9 +10978,9 @@
           <p:nvPr/>
         </p:nvCxnSpPr>
         <p:spPr>
-          <a:xfrm flipH="1">
-            <a:off x="3888841" y="5478179"/>
-            <a:ext cx="205614" cy="0"/>
+          <a:xfrm flipV="1">
+            <a:off x="9432653" y="4931909"/>
+            <a:ext cx="0" cy="318976"/>
           </a:xfrm>
           <a:prstGeom prst="straightConnector1">
             <a:avLst/>
@@ -11322,10 +11009,10 @@
       </p:cxnSp>
       <p:cxnSp>
         <p:nvCxnSpPr>
-          <p:cNvPr id="120" name="Straight Connector 119">
-            <a:extLst>
-              <a:ext uri="{FF2B5EF4-FFF2-40B4-BE49-F238E27FC236}">
-                <a16:creationId xmlns:a16="http://schemas.microsoft.com/office/drawing/2014/main" id="{1883FA79-CBE1-81F9-475F-742DC442633A}"/>
+          <p:cNvPr id="171" name="Straight Connector 170">
+            <a:extLst>
+              <a:ext uri="{FF2B5EF4-FFF2-40B4-BE49-F238E27FC236}">
+                <a16:creationId xmlns:a16="http://schemas.microsoft.com/office/drawing/2014/main" id="{30710D1B-628F-D0C5-C3B8-4E1DB5DB1822}"/>
               </a:ext>
             </a:extLst>
           </p:cNvPr>
@@ -11335,9 +11022,9 @@
           <p:nvPr/>
         </p:nvCxnSpPr>
         <p:spPr>
-          <a:xfrm>
-            <a:off x="2763237" y="4519030"/>
-            <a:ext cx="0" cy="761538"/>
+          <a:xfrm flipH="1">
+            <a:off x="9388685" y="5117831"/>
+            <a:ext cx="85431" cy="62194"/>
           </a:xfrm>
           <a:prstGeom prst="line">
             <a:avLst/>
@@ -11360,10 +11047,10 @@
       </p:cxnSp>
       <p:cxnSp>
         <p:nvCxnSpPr>
-          <p:cNvPr id="121" name="Straight Arrow Connector 120">
-            <a:extLst>
-              <a:ext uri="{FF2B5EF4-FFF2-40B4-BE49-F238E27FC236}">
-                <a16:creationId xmlns:a16="http://schemas.microsoft.com/office/drawing/2014/main" id="{D53ADBF7-10DC-5789-46E9-813992762F1C}"/>
+          <p:cNvPr id="173" name="Straight Arrow Connector 172">
+            <a:extLst>
+              <a:ext uri="{FF2B5EF4-FFF2-40B4-BE49-F238E27FC236}">
+                <a16:creationId xmlns:a16="http://schemas.microsoft.com/office/drawing/2014/main" id="{D0735576-FA99-1226-FAE2-8A66AEE21921}"/>
               </a:ext>
             </a:extLst>
           </p:cNvPr>
@@ -11374,8 +11061,217 @@
         </p:nvCxnSpPr>
         <p:spPr>
           <a:xfrm>
-            <a:off x="2981569" y="5160759"/>
-            <a:ext cx="211703" cy="0"/>
+            <a:off x="9254353" y="3367023"/>
+            <a:ext cx="0" cy="137890"/>
+          </a:xfrm>
+          <a:prstGeom prst="straightConnector1">
+            <a:avLst/>
+          </a:prstGeom>
+          <a:ln>
+            <a:tailEnd type="triangle"/>
+          </a:ln>
+        </p:spPr>
+        <p:style>
+          <a:lnRef idx="2">
+            <a:schemeClr val="accent1"/>
+          </a:lnRef>
+          <a:fillRef idx="0">
+            <a:schemeClr val="accent1"/>
+          </a:fillRef>
+          <a:effectRef idx="1">
+            <a:schemeClr val="accent1"/>
+          </a:effectRef>
+          <a:fontRef idx="minor">
+            <a:schemeClr val="tx1"/>
+          </a:fontRef>
+        </p:style>
+      </p:cxnSp>
+      <p:sp>
+        <p:nvSpPr>
+          <p:cNvPr id="174" name="TextBox 173">
+            <a:extLst>
+              <a:ext uri="{FF2B5EF4-FFF2-40B4-BE49-F238E27FC236}">
+                <a16:creationId xmlns:a16="http://schemas.microsoft.com/office/drawing/2014/main" id="{7519AAD8-ECD9-BCFB-E19F-03D8220E44C3}"/>
+              </a:ext>
+            </a:extLst>
+          </p:cNvPr>
+          <p:cNvSpPr txBox="1"/>
+          <p:nvPr/>
+        </p:nvSpPr>
+        <p:spPr>
+          <a:xfrm>
+            <a:off x="9014468" y="3198168"/>
+            <a:ext cx="474810" cy="230832"/>
+          </a:xfrm>
+          <a:prstGeom prst="rect">
+            <a:avLst/>
+          </a:prstGeom>
+          <a:noFill/>
+        </p:spPr>
+        <p:txBody>
+          <a:bodyPr wrap="none" rtlCol="0">
+            <a:spAutoFit/>
+          </a:bodyPr>
+          <a:lstStyle/>
+          <a:p>
+            <a:pPr algn="ctr"/>
+            <a:r>
+              <a:rPr lang="en-US" sz="900" dirty="0"/>
+              <a:t>dout1</a:t>
+            </a:r>
+          </a:p>
+        </p:txBody>
+      </p:sp>
+      <p:cxnSp>
+        <p:nvCxnSpPr>
+          <p:cNvPr id="184" name="Straight Arrow Connector 183">
+            <a:extLst>
+              <a:ext uri="{FF2B5EF4-FFF2-40B4-BE49-F238E27FC236}">
+                <a16:creationId xmlns:a16="http://schemas.microsoft.com/office/drawing/2014/main" id="{DBCE76B6-4D18-835C-C24A-DF1E79C1CF76}"/>
+              </a:ext>
+            </a:extLst>
+          </p:cNvPr>
+          <p:cNvCxnSpPr>
+            <a:cxnSpLocks/>
+          </p:cNvCxnSpPr>
+          <p:nvPr/>
+        </p:nvCxnSpPr>
+        <p:spPr>
+          <a:xfrm>
+            <a:off x="9431921" y="3928834"/>
+            <a:ext cx="0" cy="325106"/>
+          </a:xfrm>
+          <a:prstGeom prst="straightConnector1">
+            <a:avLst/>
+          </a:prstGeom>
+          <a:ln>
+            <a:solidFill>
+              <a:srgbClr val="FF0000"/>
+            </a:solidFill>
+            <a:tailEnd type="triangle"/>
+          </a:ln>
+        </p:spPr>
+        <p:style>
+          <a:lnRef idx="2">
+            <a:schemeClr val="accent1"/>
+          </a:lnRef>
+          <a:fillRef idx="0">
+            <a:schemeClr val="accent1"/>
+          </a:fillRef>
+          <a:effectRef idx="1">
+            <a:schemeClr val="accent1"/>
+          </a:effectRef>
+          <a:fontRef idx="minor">
+            <a:schemeClr val="tx1"/>
+          </a:fontRef>
+        </p:style>
+      </p:cxnSp>
+      <p:sp>
+        <p:nvSpPr>
+          <p:cNvPr id="186" name="TextBox 185">
+            <a:extLst>
+              <a:ext uri="{FF2B5EF4-FFF2-40B4-BE49-F238E27FC236}">
+                <a16:creationId xmlns:a16="http://schemas.microsoft.com/office/drawing/2014/main" id="{4DF51EAB-8861-0396-BAA6-9479806818EB}"/>
+              </a:ext>
+            </a:extLst>
+          </p:cNvPr>
+          <p:cNvSpPr txBox="1"/>
+          <p:nvPr/>
+        </p:nvSpPr>
+        <p:spPr>
+          <a:xfrm>
+            <a:off x="9063374" y="3733304"/>
+            <a:ext cx="671979" cy="230832"/>
+          </a:xfrm>
+          <a:prstGeom prst="rect">
+            <a:avLst/>
+          </a:prstGeom>
+          <a:noFill/>
+        </p:spPr>
+        <p:txBody>
+          <a:bodyPr wrap="none" rtlCol="0">
+            <a:spAutoFit/>
+          </a:bodyPr>
+          <a:lstStyle/>
+          <a:p>
+            <a:pPr algn="ctr"/>
+            <a:r>
+              <a:rPr lang="en-US" sz="900" dirty="0"/>
+              <a:t>Not equal</a:t>
+            </a:r>
+          </a:p>
+        </p:txBody>
+      </p:sp>
+      <p:sp>
+        <p:nvSpPr>
+          <p:cNvPr id="187" name="Rectangle 186">
+            <a:extLst>
+              <a:ext uri="{FF2B5EF4-FFF2-40B4-BE49-F238E27FC236}">
+                <a16:creationId xmlns:a16="http://schemas.microsoft.com/office/drawing/2014/main" id="{02F76C24-B5A2-EF6E-0213-72D63A9FAEFB}"/>
+              </a:ext>
+            </a:extLst>
+          </p:cNvPr>
+          <p:cNvSpPr/>
+          <p:nvPr/>
+        </p:nvSpPr>
+        <p:spPr>
+          <a:xfrm>
+            <a:off x="9027891" y="3504913"/>
+            <a:ext cx="736311" cy="418585"/>
+          </a:xfrm>
+          <a:prstGeom prst="rect">
+            <a:avLst/>
+          </a:prstGeom>
+          <a:noFill/>
+          <a:ln>
+            <a:solidFill>
+              <a:srgbClr val="0070C0"/>
+            </a:solidFill>
+          </a:ln>
+        </p:spPr>
+        <p:style>
+          <a:lnRef idx="2">
+            <a:schemeClr val="accent1">
+              <a:shade val="15000"/>
+            </a:schemeClr>
+          </a:lnRef>
+          <a:fillRef idx="1">
+            <a:schemeClr val="accent1"/>
+          </a:fillRef>
+          <a:effectRef idx="0">
+            <a:schemeClr val="accent1"/>
+          </a:effectRef>
+          <a:fontRef idx="minor">
+            <a:schemeClr val="lt1"/>
+          </a:fontRef>
+        </p:style>
+        <p:txBody>
+          <a:bodyPr rtlCol="0" anchor="ctr"/>
+          <a:lstStyle/>
+          <a:p>
+            <a:pPr algn="ctr"/>
+            <a:endParaRPr lang="en-US"/>
+          </a:p>
+        </p:txBody>
+      </p:sp>
+      <p:cxnSp>
+        <p:nvCxnSpPr>
+          <p:cNvPr id="188" name="Straight Arrow Connector 187">
+            <a:extLst>
+              <a:ext uri="{FF2B5EF4-FFF2-40B4-BE49-F238E27FC236}">
+                <a16:creationId xmlns:a16="http://schemas.microsoft.com/office/drawing/2014/main" id="{FBAC4502-2B1D-5218-C2D9-AB667D10F3CF}"/>
+              </a:ext>
+            </a:extLst>
+          </p:cNvPr>
+          <p:cNvCxnSpPr>
+            <a:cxnSpLocks/>
+          </p:cNvCxnSpPr>
+          <p:nvPr/>
+        </p:nvCxnSpPr>
+        <p:spPr>
+          <a:xfrm>
+            <a:off x="9601800" y="3367023"/>
+            <a:ext cx="0" cy="137890"/>
           </a:xfrm>
           <a:prstGeom prst="straightConnector1">
             <a:avLst/>
@@ -11401,24 +11297,32 @@
       </p:cxnSp>
       <p:cxnSp>
         <p:nvCxnSpPr>
-          <p:cNvPr id="122" name="Straight Connector 121">
-            <a:extLst>
-              <a:ext uri="{FF2B5EF4-FFF2-40B4-BE49-F238E27FC236}">
-                <a16:creationId xmlns:a16="http://schemas.microsoft.com/office/drawing/2014/main" id="{47FF72DD-5839-7297-77B0-F5EC466118C5}"/>
-              </a:ext>
-            </a:extLst>
-          </p:cNvPr>
-          <p:cNvCxnSpPr/>
+          <p:cNvPr id="189" name="Straight Arrow Connector 188">
+            <a:extLst>
+              <a:ext uri="{FF2B5EF4-FFF2-40B4-BE49-F238E27FC236}">
+                <a16:creationId xmlns:a16="http://schemas.microsoft.com/office/drawing/2014/main" id="{4F79E217-E351-6707-29A8-684823FCD841}"/>
+              </a:ext>
+            </a:extLst>
+          </p:cNvPr>
+          <p:cNvCxnSpPr>
+            <a:cxnSpLocks/>
+          </p:cNvCxnSpPr>
           <p:nvPr/>
         </p:nvCxnSpPr>
         <p:spPr>
-          <a:xfrm flipH="1" flipV="1">
-            <a:off x="2602523" y="4499564"/>
-            <a:ext cx="164123" cy="7703"/>
-          </a:xfrm>
-          <a:prstGeom prst="line">
-            <a:avLst/>
-          </a:prstGeom>
+          <a:xfrm flipV="1">
+            <a:off x="10822834" y="3193477"/>
+            <a:ext cx="0" cy="616523"/>
+          </a:xfrm>
+          <a:prstGeom prst="straightConnector1">
+            <a:avLst/>
+          </a:prstGeom>
+          <a:ln>
+            <a:solidFill>
+              <a:srgbClr val="FF0000"/>
+            </a:solidFill>
+            <a:tailEnd type="triangle"/>
+          </a:ln>
         </p:spPr>
         <p:style>
           <a:lnRef idx="2">
@@ -11437,20 +11341,22 @@
       </p:cxnSp>
       <p:cxnSp>
         <p:nvCxnSpPr>
-          <p:cNvPr id="123" name="Straight Connector 122">
-            <a:extLst>
-              <a:ext uri="{FF2B5EF4-FFF2-40B4-BE49-F238E27FC236}">
-                <a16:creationId xmlns:a16="http://schemas.microsoft.com/office/drawing/2014/main" id="{61CB085F-EFA5-81F0-171A-B0F01423DFC7}"/>
-              </a:ext>
-            </a:extLst>
-          </p:cNvPr>
-          <p:cNvCxnSpPr/>
+          <p:cNvPr id="190" name="Straight Connector 189">
+            <a:extLst>
+              <a:ext uri="{FF2B5EF4-FFF2-40B4-BE49-F238E27FC236}">
+                <a16:creationId xmlns:a16="http://schemas.microsoft.com/office/drawing/2014/main" id="{88E60B1A-8F9F-F801-EE6D-5051B5DDD7FD}"/>
+              </a:ext>
+            </a:extLst>
+          </p:cNvPr>
+          <p:cNvCxnSpPr>
+            <a:cxnSpLocks/>
+          </p:cNvCxnSpPr>
           <p:nvPr/>
         </p:nvCxnSpPr>
         <p:spPr>
-          <a:xfrm>
-            <a:off x="2989385" y="4912022"/>
-            <a:ext cx="0" cy="253947"/>
+          <a:xfrm flipH="1">
+            <a:off x="10772078" y="3608496"/>
+            <a:ext cx="107051" cy="69157"/>
           </a:xfrm>
           <a:prstGeom prst="line">
             <a:avLst/>
@@ -11471,256 +11377,6 @@
           </a:fontRef>
         </p:style>
       </p:cxnSp>
-      <p:cxnSp>
-        <p:nvCxnSpPr>
-          <p:cNvPr id="124" name="Straight Connector 123">
-            <a:extLst>
-              <a:ext uri="{FF2B5EF4-FFF2-40B4-BE49-F238E27FC236}">
-                <a16:creationId xmlns:a16="http://schemas.microsoft.com/office/drawing/2014/main" id="{A7AA200C-FCA9-EE26-397A-A699E5A6646F}"/>
-              </a:ext>
-            </a:extLst>
-          </p:cNvPr>
-          <p:cNvCxnSpPr/>
-          <p:nvPr/>
-        </p:nvCxnSpPr>
-        <p:spPr>
-          <a:xfrm>
-            <a:off x="2985477" y="4912022"/>
-            <a:ext cx="2313354" cy="0"/>
-          </a:xfrm>
-          <a:prstGeom prst="line">
-            <a:avLst/>
-          </a:prstGeom>
-        </p:spPr>
-        <p:style>
-          <a:lnRef idx="2">
-            <a:schemeClr val="accent1"/>
-          </a:lnRef>
-          <a:fillRef idx="0">
-            <a:schemeClr val="accent1"/>
-          </a:fillRef>
-          <a:effectRef idx="1">
-            <a:schemeClr val="accent1"/>
-          </a:effectRef>
-          <a:fontRef idx="minor">
-            <a:schemeClr val="tx1"/>
-          </a:fontRef>
-        </p:style>
-      </p:cxnSp>
-      <p:cxnSp>
-        <p:nvCxnSpPr>
-          <p:cNvPr id="125" name="Straight Arrow Connector 124">
-            <a:extLst>
-              <a:ext uri="{FF2B5EF4-FFF2-40B4-BE49-F238E27FC236}">
-                <a16:creationId xmlns:a16="http://schemas.microsoft.com/office/drawing/2014/main" id="{EC42D385-1455-5F7D-5DE9-63C32D5B7E54}"/>
-              </a:ext>
-            </a:extLst>
-          </p:cNvPr>
-          <p:cNvCxnSpPr/>
-          <p:nvPr/>
-        </p:nvCxnSpPr>
-        <p:spPr>
-          <a:xfrm flipV="1">
-            <a:off x="3977662" y="4996009"/>
-            <a:ext cx="0" cy="225402"/>
-          </a:xfrm>
-          <a:prstGeom prst="straightConnector1">
-            <a:avLst/>
-          </a:prstGeom>
-          <a:ln>
-            <a:solidFill>
-              <a:srgbClr val="FF0000"/>
-            </a:solidFill>
-            <a:tailEnd type="triangle"/>
-          </a:ln>
-        </p:spPr>
-        <p:style>
-          <a:lnRef idx="2">
-            <a:schemeClr val="accent1"/>
-          </a:lnRef>
-          <a:fillRef idx="0">
-            <a:schemeClr val="accent1"/>
-          </a:fillRef>
-          <a:effectRef idx="1">
-            <a:schemeClr val="accent1"/>
-          </a:effectRef>
-          <a:fontRef idx="minor">
-            <a:schemeClr val="tx1"/>
-          </a:fontRef>
-        </p:style>
-      </p:cxnSp>
-      <p:cxnSp>
-        <p:nvCxnSpPr>
-          <p:cNvPr id="128" name="Straight Arrow Connector 127">
-            <a:extLst>
-              <a:ext uri="{FF2B5EF4-FFF2-40B4-BE49-F238E27FC236}">
-                <a16:creationId xmlns:a16="http://schemas.microsoft.com/office/drawing/2014/main" id="{2FF7584B-44F4-AC4F-1A2B-A5EEAC3183AF}"/>
-              </a:ext>
-            </a:extLst>
-          </p:cNvPr>
-          <p:cNvCxnSpPr/>
-          <p:nvPr/>
-        </p:nvCxnSpPr>
-        <p:spPr>
-          <a:xfrm>
-            <a:off x="4019628" y="5487290"/>
-            <a:ext cx="0" cy="200651"/>
-          </a:xfrm>
-          <a:prstGeom prst="straightConnector1">
-            <a:avLst/>
-          </a:prstGeom>
-          <a:ln>
-            <a:solidFill>
-              <a:srgbClr val="FF0000"/>
-            </a:solidFill>
-            <a:tailEnd type="triangle"/>
-          </a:ln>
-        </p:spPr>
-        <p:style>
-          <a:lnRef idx="2">
-            <a:schemeClr val="accent1"/>
-          </a:lnRef>
-          <a:fillRef idx="0">
-            <a:schemeClr val="accent1"/>
-          </a:fillRef>
-          <a:effectRef idx="1">
-            <a:schemeClr val="accent1"/>
-          </a:effectRef>
-          <a:fontRef idx="minor">
-            <a:schemeClr val="tx1"/>
-          </a:fontRef>
-        </p:style>
-      </p:cxnSp>
-      <p:sp>
-        <p:nvSpPr>
-          <p:cNvPr id="105" name="TextBox 1">
-            <a:extLst>
-              <a:ext uri="{FF2B5EF4-FFF2-40B4-BE49-F238E27FC236}">
-                <a16:creationId xmlns:a16="http://schemas.microsoft.com/office/drawing/2014/main" id="{8150CAF1-DAFF-41B1-37D9-3AA58EDF71DA}"/>
-              </a:ext>
-            </a:extLst>
-          </p:cNvPr>
-          <p:cNvSpPr txBox="1"/>
-          <p:nvPr/>
-        </p:nvSpPr>
-        <p:spPr>
-          <a:xfrm>
-            <a:off x="8659919" y="3413404"/>
-            <a:ext cx="671979" cy="230832"/>
-          </a:xfrm>
-          <a:prstGeom prst="rect">
-            <a:avLst/>
-          </a:prstGeom>
-          <a:noFill/>
-        </p:spPr>
-        <p:txBody>
-          <a:bodyPr wrap="none" rtlCol="0">
-            <a:spAutoFit/>
-          </a:bodyPr>
-          <a:lstStyle>
-            <a:defPPr>
-              <a:defRPr lang="en-US"/>
-            </a:defPPr>
-            <a:lvl1pPr marL="0" algn="l" defTabSz="914400" rtl="0" eaLnBrk="1" latinLnBrk="0" hangingPunct="1">
-              <a:defRPr sz="1800" kern="1200">
-                <a:solidFill>
-                  <a:schemeClr val="tx1"/>
-                </a:solidFill>
-                <a:latin typeface="+mn-lt"/>
-                <a:ea typeface="+mn-ea"/>
-                <a:cs typeface="+mn-cs"/>
-              </a:defRPr>
-            </a:lvl1pPr>
-            <a:lvl2pPr marL="457200" algn="l" defTabSz="914400" rtl="0" eaLnBrk="1" latinLnBrk="0" hangingPunct="1">
-              <a:defRPr sz="1800" kern="1200">
-                <a:solidFill>
-                  <a:schemeClr val="tx1"/>
-                </a:solidFill>
-                <a:latin typeface="+mn-lt"/>
-                <a:ea typeface="+mn-ea"/>
-                <a:cs typeface="+mn-cs"/>
-              </a:defRPr>
-            </a:lvl2pPr>
-            <a:lvl3pPr marL="914400" algn="l" defTabSz="914400" rtl="0" eaLnBrk="1" latinLnBrk="0" hangingPunct="1">
-              <a:defRPr sz="1800" kern="1200">
-                <a:solidFill>
-                  <a:schemeClr val="tx1"/>
-                </a:solidFill>
-                <a:latin typeface="+mn-lt"/>
-                <a:ea typeface="+mn-ea"/>
-                <a:cs typeface="+mn-cs"/>
-              </a:defRPr>
-            </a:lvl3pPr>
-            <a:lvl4pPr marL="1371600" algn="l" defTabSz="914400" rtl="0" eaLnBrk="1" latinLnBrk="0" hangingPunct="1">
-              <a:defRPr sz="1800" kern="1200">
-                <a:solidFill>
-                  <a:schemeClr val="tx1"/>
-                </a:solidFill>
-                <a:latin typeface="+mn-lt"/>
-                <a:ea typeface="+mn-ea"/>
-                <a:cs typeface="+mn-cs"/>
-              </a:defRPr>
-            </a:lvl4pPr>
-            <a:lvl5pPr marL="1828800" algn="l" defTabSz="914400" rtl="0" eaLnBrk="1" latinLnBrk="0" hangingPunct="1">
-              <a:defRPr sz="1800" kern="1200">
-                <a:solidFill>
-                  <a:schemeClr val="tx1"/>
-                </a:solidFill>
-                <a:latin typeface="+mn-lt"/>
-                <a:ea typeface="+mn-ea"/>
-                <a:cs typeface="+mn-cs"/>
-              </a:defRPr>
-            </a:lvl5pPr>
-            <a:lvl6pPr marL="2286000" algn="l" defTabSz="914400" rtl="0" eaLnBrk="1" latinLnBrk="0" hangingPunct="1">
-              <a:defRPr sz="1800" kern="1200">
-                <a:solidFill>
-                  <a:schemeClr val="tx1"/>
-                </a:solidFill>
-                <a:latin typeface="+mn-lt"/>
-                <a:ea typeface="+mn-ea"/>
-                <a:cs typeface="+mn-cs"/>
-              </a:defRPr>
-            </a:lvl6pPr>
-            <a:lvl7pPr marL="2743200" algn="l" defTabSz="914400" rtl="0" eaLnBrk="1" latinLnBrk="0" hangingPunct="1">
-              <a:defRPr sz="1800" kern="1200">
-                <a:solidFill>
-                  <a:schemeClr val="tx1"/>
-                </a:solidFill>
-                <a:latin typeface="+mn-lt"/>
-                <a:ea typeface="+mn-ea"/>
-                <a:cs typeface="+mn-cs"/>
-              </a:defRPr>
-            </a:lvl7pPr>
-            <a:lvl8pPr marL="3200400" algn="l" defTabSz="914400" rtl="0" eaLnBrk="1" latinLnBrk="0" hangingPunct="1">
-              <a:defRPr sz="1800" kern="1200">
-                <a:solidFill>
-                  <a:schemeClr val="tx1"/>
-                </a:solidFill>
-                <a:latin typeface="+mn-lt"/>
-                <a:ea typeface="+mn-ea"/>
-                <a:cs typeface="+mn-cs"/>
-              </a:defRPr>
-            </a:lvl8pPr>
-            <a:lvl9pPr marL="3657600" algn="l" defTabSz="914400" rtl="0" eaLnBrk="1" latinLnBrk="0" hangingPunct="1">
-              <a:defRPr sz="1800" kern="1200">
-                <a:solidFill>
-                  <a:schemeClr val="tx1"/>
-                </a:solidFill>
-                <a:latin typeface="+mn-lt"/>
-                <a:ea typeface="+mn-ea"/>
-                <a:cs typeface="+mn-cs"/>
-              </a:defRPr>
-            </a:lvl9pPr>
-          </a:lstStyle>
-          <a:p>
-            <a:pPr algn="ctr"/>
-            <a:r>
-              <a:rPr lang="en-US" sz="900" dirty="0"/>
-              <a:t>Not equal</a:t>
-            </a:r>
-          </a:p>
-        </p:txBody>
-      </p:sp>
     </p:spTree>
     <p:extLst>
       <p:ext uri="{BB962C8B-B14F-4D97-AF65-F5344CB8AC3E}">

--- a/RISCVstage3.pptx
+++ b/RISCVstage3.pptx
@@ -115,7 +115,7 @@
 <file path=ppt/revisionInfo.xml><?xml version="1.0" encoding="utf-8"?>
 <p1510:revInfo xmlns:a="http://schemas.openxmlformats.org/drawingml/2006/main" xmlns:r="http://schemas.openxmlformats.org/officeDocument/2006/relationships" xmlns:p1510="http://schemas.microsoft.com/office/powerpoint/2015/10/main">
   <p1510:revLst>
-    <p1510:client id="{E75867FF-49DB-4DC0-967A-A19776D02C5E}" v="4" dt="2026-03-10T16:48:05.976"/>
+    <p1510:client id="{E75867FF-49DB-4DC0-967A-A19776D02C5E}" v="6" dt="2026-03-10T17:14:29.583"/>
   </p1510:revLst>
 </p1510:revInfo>
 </file>
@@ -125,12 +125,12 @@
   <pc:docChgLst>
     <pc:chgData name="York, George W CIV USAF USAFA DF/DFEC" userId="1fb5875a-4594-4db2-80fb-f0db3de11280" providerId="ADAL" clId="{09330963-85FD-4C99-A81B-94D0EE5CFFEB}"/>
     <pc:docChg chg="custSel modSld">
-      <pc:chgData name="York, George W CIV USAF USAFA DF/DFEC" userId="1fb5875a-4594-4db2-80fb-f0db3de11280" providerId="ADAL" clId="{09330963-85FD-4C99-A81B-94D0EE5CFFEB}" dt="2026-03-10T16:48:05.976" v="8"/>
+      <pc:chgData name="York, George W CIV USAF USAFA DF/DFEC" userId="1fb5875a-4594-4db2-80fb-f0db3de11280" providerId="ADAL" clId="{09330963-85FD-4C99-A81B-94D0EE5CFFEB}" dt="2026-03-10T17:14:37.305" v="17" actId="1076"/>
       <pc:docMkLst>
         <pc:docMk/>
       </pc:docMkLst>
       <pc:sldChg chg="addSp delSp modSp mod">
-        <pc:chgData name="York, George W CIV USAF USAFA DF/DFEC" userId="1fb5875a-4594-4db2-80fb-f0db3de11280" providerId="ADAL" clId="{09330963-85FD-4C99-A81B-94D0EE5CFFEB}" dt="2026-03-10T16:48:05.976" v="8"/>
+        <pc:chgData name="York, George W CIV USAF USAFA DF/DFEC" userId="1fb5875a-4594-4db2-80fb-f0db3de11280" providerId="ADAL" clId="{09330963-85FD-4C99-A81B-94D0EE5CFFEB}" dt="2026-03-10T17:14:37.305" v="17" actId="1076"/>
         <pc:sldMkLst>
           <pc:docMk/>
           <pc:sldMk cId="1501170907" sldId="256"/>
@@ -141,6 +141,14 @@
             <pc:docMk/>
             <pc:sldMk cId="1501170907" sldId="256"/>
             <ac:spMk id="4" creationId="{FB55267A-D19E-887C-DE49-0FCC56FF700B}"/>
+          </ac:spMkLst>
+        </pc:spChg>
+        <pc:spChg chg="add mod">
+          <ac:chgData name="York, George W CIV USAF USAFA DF/DFEC" userId="1fb5875a-4594-4db2-80fb-f0db3de11280" providerId="ADAL" clId="{09330963-85FD-4C99-A81B-94D0EE5CFFEB}" dt="2026-03-10T17:10:31.494" v="11" actId="1076"/>
+          <ac:spMkLst>
+            <pc:docMk/>
+            <pc:sldMk cId="1501170907" sldId="256"/>
+            <ac:spMk id="17" creationId="{F3C357C1-6CA0-FE49-1679-B84ECC79460C}"/>
           </ac:spMkLst>
         </pc:spChg>
         <pc:spChg chg="del">
@@ -312,6 +320,14 @@
           </ac:spMkLst>
         </pc:spChg>
         <pc:grpChg chg="del">
+          <ac:chgData name="York, George W CIV USAF USAFA DF/DFEC" userId="1fb5875a-4594-4db2-80fb-f0db3de11280" providerId="ADAL" clId="{09330963-85FD-4C99-A81B-94D0EE5CFFEB}" dt="2026-03-10T17:14:24.856" v="15" actId="478"/>
+          <ac:grpSpMkLst>
+            <pc:docMk/>
+            <pc:sldMk cId="1501170907" sldId="256"/>
+            <ac:grpSpMk id="30" creationId="{F29CD4F1-4D65-2071-CB5D-56C21B0A8ADD}"/>
+          </ac:grpSpMkLst>
+        </pc:grpChg>
+        <pc:grpChg chg="del">
           <ac:chgData name="York, George W CIV USAF USAFA DF/DFEC" userId="1fb5875a-4594-4db2-80fb-f0db3de11280" providerId="ADAL" clId="{09330963-85FD-4C99-A81B-94D0EE5CFFEB}" dt="2026-03-10T16:47:43.899" v="5" actId="478"/>
           <ac:grpSpMkLst>
             <pc:docMk/>
@@ -335,6 +351,14 @@
             <ac:grpSpMk id="144" creationId="{668D9262-FD4F-8437-B65A-FF28CF8998C5}"/>
           </ac:grpSpMkLst>
         </pc:grpChg>
+        <pc:picChg chg="del">
+          <ac:chgData name="York, George W CIV USAF USAFA DF/DFEC" userId="1fb5875a-4594-4db2-80fb-f0db3de11280" providerId="ADAL" clId="{09330963-85FD-4C99-A81B-94D0EE5CFFEB}" dt="2026-03-10T17:14:07.197" v="12" actId="478"/>
+          <ac:picMkLst>
+            <pc:docMk/>
+            <pc:sldMk cId="1501170907" sldId="256"/>
+            <ac:picMk id="36" creationId="{7D1B8B85-7F90-6201-21E9-F6ABDFFBBFF8}"/>
+          </ac:picMkLst>
+        </pc:picChg>
         <pc:cxnChg chg="del">
           <ac:chgData name="York, George W CIV USAF USAFA DF/DFEC" userId="1fb5875a-4594-4db2-80fb-f0db3de11280" providerId="ADAL" clId="{09330963-85FD-4C99-A81B-94D0EE5CFFEB}" dt="2026-03-10T16:47:53.742" v="7" actId="478"/>
           <ac:cxnSpMkLst>
@@ -351,12 +375,36 @@
             <ac:cxnSpMk id="26" creationId="{EFC7A41C-61ED-49E4-BA0B-27EC82F62902}"/>
           </ac:cxnSpMkLst>
         </pc:cxnChg>
+        <pc:cxnChg chg="add mod">
+          <ac:chgData name="York, George W CIV USAF USAFA DF/DFEC" userId="1fb5875a-4594-4db2-80fb-f0db3de11280" providerId="ADAL" clId="{09330963-85FD-4C99-A81B-94D0EE5CFFEB}" dt="2026-03-10T17:14:37.305" v="17" actId="1076"/>
+          <ac:cxnSpMkLst>
+            <pc:docMk/>
+            <pc:sldMk cId="1501170907" sldId="256"/>
+            <ac:cxnSpMk id="26" creationId="{F93FF150-8370-FB86-5E5C-59855FA6B568}"/>
+          </ac:cxnSpMkLst>
+        </pc:cxnChg>
         <pc:cxnChg chg="del">
           <ac:chgData name="York, George W CIV USAF USAFA DF/DFEC" userId="1fb5875a-4594-4db2-80fb-f0db3de11280" providerId="ADAL" clId="{09330963-85FD-4C99-A81B-94D0EE5CFFEB}" dt="2026-03-10T16:47:53.742" v="7" actId="478"/>
           <ac:cxnSpMkLst>
             <pc:docMk/>
             <pc:sldMk cId="1501170907" sldId="256"/>
             <ac:cxnSpMk id="28" creationId="{EE79F449-2B1D-87A9-9E7B-9DD8C11C7B9B}"/>
+          </ac:cxnSpMkLst>
+        </pc:cxnChg>
+        <pc:cxnChg chg="del">
+          <ac:chgData name="York, George W CIV USAF USAFA DF/DFEC" userId="1fb5875a-4594-4db2-80fb-f0db3de11280" providerId="ADAL" clId="{09330963-85FD-4C99-A81B-94D0EE5CFFEB}" dt="2026-03-10T17:14:18.066" v="14" actId="478"/>
+          <ac:cxnSpMkLst>
+            <pc:docMk/>
+            <pc:sldMk cId="1501170907" sldId="256"/>
+            <ac:cxnSpMk id="37" creationId="{A09C37C1-E5D0-9FBA-A932-2F98BACEC0B2}"/>
+          </ac:cxnSpMkLst>
+        </pc:cxnChg>
+        <pc:cxnChg chg="mod">
+          <ac:chgData name="York, George W CIV USAF USAFA DF/DFEC" userId="1fb5875a-4594-4db2-80fb-f0db3de11280" providerId="ADAL" clId="{09330963-85FD-4C99-A81B-94D0EE5CFFEB}" dt="2026-03-10T17:14:16.193" v="13" actId="1076"/>
+          <ac:cxnSpMkLst>
+            <pc:docMk/>
+            <pc:sldMk cId="1501170907" sldId="256"/>
+            <ac:cxnSpMk id="38" creationId="{4D9B3B66-045C-4BC7-2F4D-857D0D686CD3}"/>
           </ac:cxnSpMkLst>
         </pc:cxnChg>
         <pc:cxnChg chg="add mod">
@@ -3643,36 +3691,6 @@
           <a:chExt cx="0" cy="0"/>
         </a:xfrm>
       </p:grpSpPr>
-      <p:pic>
-        <p:nvPicPr>
-          <p:cNvPr id="36" name="Picture 35">
-            <a:extLst>
-              <a:ext uri="{FF2B5EF4-FFF2-40B4-BE49-F238E27FC236}">
-                <a16:creationId xmlns:a16="http://schemas.microsoft.com/office/drawing/2014/main" id="{7D1B8B85-7F90-6201-21E9-F6ABDFFBBFF8}"/>
-              </a:ext>
-            </a:extLst>
-          </p:cNvPr>
-          <p:cNvPicPr>
-            <a:picLocks noChangeAspect="1"/>
-          </p:cNvPicPr>
-          <p:nvPr/>
-        </p:nvPicPr>
-        <p:blipFill>
-          <a:blip r:embed="rId2"/>
-          <a:stretch>
-            <a:fillRect/>
-          </a:stretch>
-        </p:blipFill>
-        <p:spPr>
-          <a:xfrm>
-            <a:off x="2899612" y="3237305"/>
-            <a:ext cx="503999" cy="267608"/>
-          </a:xfrm>
-          <a:prstGeom prst="rect">
-            <a:avLst/>
-          </a:prstGeom>
-        </p:spPr>
-      </p:pic>
       <p:sp>
         <p:nvSpPr>
           <p:cNvPr id="4" name="TextBox 3">
@@ -9145,187 +9163,6 @@
           </a:p>
         </p:txBody>
       </p:sp>
-      <p:grpSp>
-        <p:nvGrpSpPr>
-          <p:cNvPr id="30" name="Group 29">
-            <a:extLst>
-              <a:ext uri="{FF2B5EF4-FFF2-40B4-BE49-F238E27FC236}">
-                <a16:creationId xmlns:a16="http://schemas.microsoft.com/office/drawing/2014/main" id="{F29CD4F1-4D65-2071-CB5D-56C21B0A8ADD}"/>
-              </a:ext>
-            </a:extLst>
-          </p:cNvPr>
-          <p:cNvGrpSpPr/>
-          <p:nvPr/>
-        </p:nvGrpSpPr>
-        <p:grpSpPr>
-          <a:xfrm rot="16200000">
-            <a:off x="8495764" y="2520050"/>
-            <a:ext cx="405246" cy="267608"/>
-            <a:chOff x="6169099" y="3766490"/>
-            <a:chExt cx="533480" cy="267608"/>
-          </a:xfrm>
-        </p:grpSpPr>
-        <p:pic>
-          <p:nvPicPr>
-            <p:cNvPr id="32" name="Picture 31">
-              <a:extLst>
-                <a:ext uri="{FF2B5EF4-FFF2-40B4-BE49-F238E27FC236}">
-                  <a16:creationId xmlns:a16="http://schemas.microsoft.com/office/drawing/2014/main" id="{08E484B5-905D-B38D-3D91-241CE1719D6C}"/>
-                </a:ext>
-              </a:extLst>
-            </p:cNvPr>
-            <p:cNvPicPr>
-              <a:picLocks noChangeAspect="1"/>
-            </p:cNvPicPr>
-            <p:nvPr/>
-          </p:nvPicPr>
-          <p:blipFill>
-            <a:blip r:embed="rId2"/>
-            <a:stretch>
-              <a:fillRect/>
-            </a:stretch>
-          </p:blipFill>
-          <p:spPr>
-            <a:xfrm>
-              <a:off x="6198580" y="3766490"/>
-              <a:ext cx="503999" cy="267608"/>
-            </a:xfrm>
-            <a:prstGeom prst="rect">
-              <a:avLst/>
-            </a:prstGeom>
-          </p:spPr>
-        </p:pic>
-        <p:cxnSp>
-          <p:nvCxnSpPr>
-            <p:cNvPr id="34" name="Straight Arrow Connector 33">
-              <a:extLst>
-                <a:ext uri="{FF2B5EF4-FFF2-40B4-BE49-F238E27FC236}">
-                  <a16:creationId xmlns:a16="http://schemas.microsoft.com/office/drawing/2014/main" id="{72BE6CC3-2C59-A24A-5E92-68A707F8638E}"/>
-                </a:ext>
-              </a:extLst>
-            </p:cNvPr>
-            <p:cNvCxnSpPr>
-              <a:cxnSpLocks/>
-            </p:cNvCxnSpPr>
-            <p:nvPr/>
-          </p:nvCxnSpPr>
-          <p:spPr>
-            <a:xfrm>
-              <a:off x="6169099" y="3838587"/>
-              <a:ext cx="177808" cy="0"/>
-            </a:xfrm>
-            <a:prstGeom prst="straightConnector1">
-              <a:avLst/>
-            </a:prstGeom>
-            <a:ln>
-              <a:solidFill>
-                <a:srgbClr val="FF0000"/>
-              </a:solidFill>
-              <a:tailEnd type="triangle"/>
-            </a:ln>
-          </p:spPr>
-          <p:style>
-            <a:lnRef idx="2">
-              <a:schemeClr val="accent1"/>
-            </a:lnRef>
-            <a:fillRef idx="0">
-              <a:schemeClr val="accent1"/>
-            </a:fillRef>
-            <a:effectRef idx="1">
-              <a:schemeClr val="accent1"/>
-            </a:effectRef>
-            <a:fontRef idx="minor">
-              <a:schemeClr val="tx1"/>
-            </a:fontRef>
-          </p:style>
-        </p:cxnSp>
-        <p:cxnSp>
-          <p:nvCxnSpPr>
-            <p:cNvPr id="35" name="Straight Arrow Connector 34">
-              <a:extLst>
-                <a:ext uri="{FF2B5EF4-FFF2-40B4-BE49-F238E27FC236}">
-                  <a16:creationId xmlns:a16="http://schemas.microsoft.com/office/drawing/2014/main" id="{8AB80F94-094C-4CE9-C275-29945A350AA8}"/>
-                </a:ext>
-              </a:extLst>
-            </p:cNvPr>
-            <p:cNvCxnSpPr>
-              <a:cxnSpLocks/>
-            </p:cNvCxnSpPr>
-            <p:nvPr/>
-          </p:nvCxnSpPr>
-          <p:spPr>
-            <a:xfrm>
-              <a:off x="6169099" y="3958185"/>
-              <a:ext cx="177808" cy="0"/>
-            </a:xfrm>
-            <a:prstGeom prst="straightConnector1">
-              <a:avLst/>
-            </a:prstGeom>
-            <a:ln>
-              <a:solidFill>
-                <a:srgbClr val="FF0000"/>
-              </a:solidFill>
-              <a:tailEnd type="triangle"/>
-            </a:ln>
-          </p:spPr>
-          <p:style>
-            <a:lnRef idx="2">
-              <a:schemeClr val="accent1"/>
-            </a:lnRef>
-            <a:fillRef idx="0">
-              <a:schemeClr val="accent1"/>
-            </a:fillRef>
-            <a:effectRef idx="1">
-              <a:schemeClr val="accent1"/>
-            </a:effectRef>
-            <a:fontRef idx="minor">
-              <a:schemeClr val="tx1"/>
-            </a:fontRef>
-          </p:style>
-        </p:cxnSp>
-      </p:grpSp>
-      <p:cxnSp>
-        <p:nvCxnSpPr>
-          <p:cNvPr id="37" name="Straight Arrow Connector 36">
-            <a:extLst>
-              <a:ext uri="{FF2B5EF4-FFF2-40B4-BE49-F238E27FC236}">
-                <a16:creationId xmlns:a16="http://schemas.microsoft.com/office/drawing/2014/main" id="{A09C37C1-E5D0-9FBA-A932-2F98BACEC0B2}"/>
-              </a:ext>
-            </a:extLst>
-          </p:cNvPr>
-          <p:cNvCxnSpPr/>
-          <p:nvPr/>
-        </p:nvCxnSpPr>
-        <p:spPr>
-          <a:xfrm>
-            <a:off x="2870131" y="3309402"/>
-            <a:ext cx="177808" cy="0"/>
-          </a:xfrm>
-          <a:prstGeom prst="straightConnector1">
-            <a:avLst/>
-          </a:prstGeom>
-          <a:ln>
-            <a:solidFill>
-              <a:srgbClr val="FF0000"/>
-            </a:solidFill>
-            <a:tailEnd type="triangle"/>
-          </a:ln>
-        </p:spPr>
-        <p:style>
-          <a:lnRef idx="2">
-            <a:schemeClr val="accent1"/>
-          </a:lnRef>
-          <a:fillRef idx="0">
-            <a:schemeClr val="accent1"/>
-          </a:fillRef>
-          <a:effectRef idx="1">
-            <a:schemeClr val="accent1"/>
-          </a:effectRef>
-          <a:fontRef idx="minor">
-            <a:schemeClr val="tx1"/>
-          </a:fontRef>
-        </p:style>
-      </p:cxnSp>
       <p:cxnSp>
         <p:nvCxnSpPr>
           <p:cNvPr id="38" name="Straight Arrow Connector 37">
@@ -9340,7 +9177,7 @@
         </p:nvCxnSpPr>
         <p:spPr>
           <a:xfrm>
-            <a:off x="2870131" y="3429000"/>
+            <a:off x="3209831" y="3367023"/>
             <a:ext cx="177808" cy="0"/>
           </a:xfrm>
           <a:prstGeom prst="straightConnector1">
@@ -11361,6 +11198,84 @@
           <a:prstGeom prst="line">
             <a:avLst/>
           </a:prstGeom>
+        </p:spPr>
+        <p:style>
+          <a:lnRef idx="2">
+            <a:schemeClr val="accent1"/>
+          </a:lnRef>
+          <a:fillRef idx="0">
+            <a:schemeClr val="accent1"/>
+          </a:fillRef>
+          <a:effectRef idx="1">
+            <a:schemeClr val="accent1"/>
+          </a:effectRef>
+          <a:fontRef idx="minor">
+            <a:schemeClr val="tx1"/>
+          </a:fontRef>
+        </p:style>
+      </p:cxnSp>
+      <p:sp>
+        <p:nvSpPr>
+          <p:cNvPr id="17" name="TextBox 16">
+            <a:extLst>
+              <a:ext uri="{FF2B5EF4-FFF2-40B4-BE49-F238E27FC236}">
+                <a16:creationId xmlns:a16="http://schemas.microsoft.com/office/drawing/2014/main" id="{F3C357C1-6CA0-FE49-1679-B84ECC79460C}"/>
+              </a:ext>
+            </a:extLst>
+          </p:cNvPr>
+          <p:cNvSpPr txBox="1"/>
+          <p:nvPr/>
+        </p:nvSpPr>
+        <p:spPr>
+          <a:xfrm>
+            <a:off x="9370905" y="3184375"/>
+            <a:ext cx="474810" cy="230832"/>
+          </a:xfrm>
+          <a:prstGeom prst="rect">
+            <a:avLst/>
+          </a:prstGeom>
+          <a:noFill/>
+        </p:spPr>
+        <p:txBody>
+          <a:bodyPr wrap="none" rtlCol="0">
+            <a:spAutoFit/>
+          </a:bodyPr>
+          <a:lstStyle/>
+          <a:p>
+            <a:pPr algn="ctr"/>
+            <a:r>
+              <a:rPr lang="en-US" sz="900" dirty="0"/>
+              <a:t>dout2</a:t>
+            </a:r>
+          </a:p>
+        </p:txBody>
+      </p:sp>
+      <p:cxnSp>
+        <p:nvCxnSpPr>
+          <p:cNvPr id="26" name="Straight Arrow Connector 25">
+            <a:extLst>
+              <a:ext uri="{FF2B5EF4-FFF2-40B4-BE49-F238E27FC236}">
+                <a16:creationId xmlns:a16="http://schemas.microsoft.com/office/drawing/2014/main" id="{F93FF150-8370-FB86-5E5C-59855FA6B568}"/>
+              </a:ext>
+            </a:extLst>
+          </p:cNvPr>
+          <p:cNvCxnSpPr/>
+          <p:nvPr/>
+        </p:nvCxnSpPr>
+        <p:spPr>
+          <a:xfrm flipV="1">
+            <a:off x="8718196" y="2434882"/>
+            <a:ext cx="0" cy="167673"/>
+          </a:xfrm>
+          <a:prstGeom prst="straightConnector1">
+            <a:avLst/>
+          </a:prstGeom>
+          <a:ln>
+            <a:solidFill>
+              <a:srgbClr val="FF0000"/>
+            </a:solidFill>
+            <a:tailEnd type="triangle"/>
+          </a:ln>
         </p:spPr>
         <p:style>
           <a:lnRef idx="2">

--- a/RISCVstage3.pptx
+++ b/RISCVstage3.pptx
@@ -648,7 +648,7 @@
           <a:p>
             <a:fld id="{51AFF834-1BEC-4F95-9622-28B5DCC1FE16}" type="datetimeFigureOut">
               <a:rPr lang="en-US" smtClean="0"/>
-              <a:t>4/7/2026</a:t>
+              <a:t>4/27/2026</a:t>
             </a:fld>
             <a:endParaRPr lang="en-US"/>
           </a:p>
@@ -846,7 +846,7 @@
           <a:p>
             <a:fld id="{51AFF834-1BEC-4F95-9622-28B5DCC1FE16}" type="datetimeFigureOut">
               <a:rPr lang="en-US" smtClean="0"/>
-              <a:t>4/7/2026</a:t>
+              <a:t>4/27/2026</a:t>
             </a:fld>
             <a:endParaRPr lang="en-US"/>
           </a:p>
@@ -1054,7 +1054,7 @@
           <a:p>
             <a:fld id="{51AFF834-1BEC-4F95-9622-28B5DCC1FE16}" type="datetimeFigureOut">
               <a:rPr lang="en-US" smtClean="0"/>
-              <a:t>4/7/2026</a:t>
+              <a:t>4/27/2026</a:t>
             </a:fld>
             <a:endParaRPr lang="en-US"/>
           </a:p>
@@ -1252,7 +1252,7 @@
           <a:p>
             <a:fld id="{51AFF834-1BEC-4F95-9622-28B5DCC1FE16}" type="datetimeFigureOut">
               <a:rPr lang="en-US" smtClean="0"/>
-              <a:t>4/7/2026</a:t>
+              <a:t>4/27/2026</a:t>
             </a:fld>
             <a:endParaRPr lang="en-US"/>
           </a:p>
@@ -1527,7 +1527,7 @@
           <a:p>
             <a:fld id="{51AFF834-1BEC-4F95-9622-28B5DCC1FE16}" type="datetimeFigureOut">
               <a:rPr lang="en-US" smtClean="0"/>
-              <a:t>4/7/2026</a:t>
+              <a:t>4/27/2026</a:t>
             </a:fld>
             <a:endParaRPr lang="en-US"/>
           </a:p>
@@ -1792,7 +1792,7 @@
           <a:p>
             <a:fld id="{51AFF834-1BEC-4F95-9622-28B5DCC1FE16}" type="datetimeFigureOut">
               <a:rPr lang="en-US" smtClean="0"/>
-              <a:t>4/7/2026</a:t>
+              <a:t>4/27/2026</a:t>
             </a:fld>
             <a:endParaRPr lang="en-US"/>
           </a:p>
@@ -2204,7 +2204,7 @@
           <a:p>
             <a:fld id="{51AFF834-1BEC-4F95-9622-28B5DCC1FE16}" type="datetimeFigureOut">
               <a:rPr lang="en-US" smtClean="0"/>
-              <a:t>4/7/2026</a:t>
+              <a:t>4/27/2026</a:t>
             </a:fld>
             <a:endParaRPr lang="en-US"/>
           </a:p>
@@ -2345,7 +2345,7 @@
           <a:p>
             <a:fld id="{51AFF834-1BEC-4F95-9622-28B5DCC1FE16}" type="datetimeFigureOut">
               <a:rPr lang="en-US" smtClean="0"/>
-              <a:t>4/7/2026</a:t>
+              <a:t>4/27/2026</a:t>
             </a:fld>
             <a:endParaRPr lang="en-US"/>
           </a:p>
@@ -2458,7 +2458,7 @@
           <a:p>
             <a:fld id="{51AFF834-1BEC-4F95-9622-28B5DCC1FE16}" type="datetimeFigureOut">
               <a:rPr lang="en-US" smtClean="0"/>
-              <a:t>4/7/2026</a:t>
+              <a:t>4/27/2026</a:t>
             </a:fld>
             <a:endParaRPr lang="en-US"/>
           </a:p>
@@ -2769,7 +2769,7 @@
           <a:p>
             <a:fld id="{51AFF834-1BEC-4F95-9622-28B5DCC1FE16}" type="datetimeFigureOut">
               <a:rPr lang="en-US" smtClean="0"/>
-              <a:t>4/7/2026</a:t>
+              <a:t>4/27/2026</a:t>
             </a:fld>
             <a:endParaRPr lang="en-US"/>
           </a:p>
@@ -3057,7 +3057,7 @@
           <a:p>
             <a:fld id="{51AFF834-1BEC-4F95-9622-28B5DCC1FE16}" type="datetimeFigureOut">
               <a:rPr lang="en-US" smtClean="0"/>
-              <a:t>4/7/2026</a:t>
+              <a:t>4/27/2026</a:t>
             </a:fld>
             <a:endParaRPr lang="en-US"/>
           </a:p>
@@ -3298,7 +3298,7 @@
           <a:p>
             <a:fld id="{51AFF834-1BEC-4F95-9622-28B5DCC1FE16}" type="datetimeFigureOut">
               <a:rPr lang="en-US" smtClean="0"/>
-              <a:t>4/7/2026</a:t>
+              <a:t>4/27/2026</a:t>
             </a:fld>
             <a:endParaRPr lang="en-US"/>
           </a:p>
@@ -9479,8 +9479,8 @@
         </p:nvCxnSpPr>
         <p:spPr>
           <a:xfrm>
-            <a:off x="2731530" y="5071925"/>
-            <a:ext cx="442253" cy="0"/>
+            <a:off x="2542784" y="5071925"/>
+            <a:ext cx="630999" cy="0"/>
           </a:xfrm>
           <a:prstGeom prst="straightConnector1">
             <a:avLst/>
@@ -9553,49 +9553,6 @@
       </p:cxnSp>
       <p:cxnSp>
         <p:nvCxnSpPr>
-          <p:cNvPr id="120" name="Straight Connector 119">
-            <a:extLst>
-              <a:ext uri="{FF2B5EF4-FFF2-40B4-BE49-F238E27FC236}">
-                <a16:creationId xmlns:a16="http://schemas.microsoft.com/office/drawing/2014/main" id="{1883FA79-CBE1-81F9-475F-742DC442633A}"/>
-              </a:ext>
-            </a:extLst>
-          </p:cNvPr>
-          <p:cNvCxnSpPr>
-            <a:cxnSpLocks/>
-          </p:cNvCxnSpPr>
-          <p:nvPr/>
-        </p:nvCxnSpPr>
-        <p:spPr>
-          <a:xfrm>
-            <a:off x="2742642" y="4702781"/>
-            <a:ext cx="0" cy="367608"/>
-          </a:xfrm>
-          <a:prstGeom prst="line">
-            <a:avLst/>
-          </a:prstGeom>
-          <a:ln>
-            <a:solidFill>
-              <a:srgbClr val="FF0000"/>
-            </a:solidFill>
-          </a:ln>
-        </p:spPr>
-        <p:style>
-          <a:lnRef idx="2">
-            <a:schemeClr val="accent1"/>
-          </a:lnRef>
-          <a:fillRef idx="0">
-            <a:schemeClr val="accent1"/>
-          </a:fillRef>
-          <a:effectRef idx="1">
-            <a:schemeClr val="accent1"/>
-          </a:effectRef>
-          <a:fontRef idx="minor">
-            <a:schemeClr val="tx1"/>
-          </a:fontRef>
-        </p:style>
-      </p:cxnSp>
-      <p:cxnSp>
-        <p:nvCxnSpPr>
           <p:cNvPr id="121" name="Straight Arrow Connector 120">
             <a:extLst>
               <a:ext uri="{FF2B5EF4-FFF2-40B4-BE49-F238E27FC236}">
@@ -9621,49 +9578,6 @@
               <a:srgbClr val="FF0000"/>
             </a:solidFill>
             <a:tailEnd type="triangle"/>
-          </a:ln>
-        </p:spPr>
-        <p:style>
-          <a:lnRef idx="2">
-            <a:schemeClr val="accent1"/>
-          </a:lnRef>
-          <a:fillRef idx="0">
-            <a:schemeClr val="accent1"/>
-          </a:fillRef>
-          <a:effectRef idx="1">
-            <a:schemeClr val="accent1"/>
-          </a:effectRef>
-          <a:fontRef idx="minor">
-            <a:schemeClr val="tx1"/>
-          </a:fontRef>
-        </p:style>
-      </p:cxnSp>
-      <p:cxnSp>
-        <p:nvCxnSpPr>
-          <p:cNvPr id="122" name="Straight Connector 121">
-            <a:extLst>
-              <a:ext uri="{FF2B5EF4-FFF2-40B4-BE49-F238E27FC236}">
-                <a16:creationId xmlns:a16="http://schemas.microsoft.com/office/drawing/2014/main" id="{47FF72DD-5839-7297-77B0-F5EC466118C5}"/>
-              </a:ext>
-            </a:extLst>
-          </p:cNvPr>
-          <p:cNvCxnSpPr>
-            <a:cxnSpLocks/>
-          </p:cNvCxnSpPr>
-          <p:nvPr/>
-        </p:nvCxnSpPr>
-        <p:spPr>
-          <a:xfrm flipH="1">
-            <a:off x="2332953" y="4719577"/>
-            <a:ext cx="398618" cy="0"/>
-          </a:xfrm>
-          <a:prstGeom prst="line">
-            <a:avLst/>
-          </a:prstGeom>
-          <a:ln>
-            <a:solidFill>
-              <a:srgbClr val="FF0000"/>
-            </a:solidFill>
           </a:ln>
         </p:spPr>
         <p:style>
@@ -11258,6 +11172,11 @@
           <a:prstGeom prst="line">
             <a:avLst/>
           </a:prstGeom>
+          <a:ln>
+            <a:solidFill>
+              <a:srgbClr val="FF0000"/>
+            </a:solidFill>
+          </a:ln>
         </p:spPr>
         <p:style>
           <a:lnRef idx="2">
@@ -11724,8 +11643,8 @@
         </p:nvSpPr>
         <p:spPr>
           <a:xfrm>
-            <a:off x="3512283" y="4407829"/>
-            <a:ext cx="861489" cy="246221"/>
+            <a:off x="4564171" y="4257502"/>
+            <a:ext cx="861489" cy="215444"/>
           </a:xfrm>
           <a:prstGeom prst="rect">
             <a:avLst/>
@@ -11740,10 +11659,1070 @@
           <a:p>
             <a:pPr algn="ctr"/>
             <a:r>
-              <a:rPr lang="en-US" sz="1000" dirty="0" err="1"/>
+              <a:rPr lang="en-US" sz="800" dirty="0" err="1"/>
               <a:t>start_stall</a:t>
             </a:r>
-            <a:endParaRPr lang="en-US" sz="1000" dirty="0"/>
+            <a:endParaRPr lang="en-US" sz="800" dirty="0"/>
+          </a:p>
+        </p:txBody>
+      </p:sp>
+      <p:cxnSp>
+        <p:nvCxnSpPr>
+          <p:cNvPr id="30" name="Straight Connector 29">
+            <a:extLst>
+              <a:ext uri="{FF2B5EF4-FFF2-40B4-BE49-F238E27FC236}">
+                <a16:creationId xmlns:a16="http://schemas.microsoft.com/office/drawing/2014/main" id="{6DEBC10E-9841-0666-0DEB-CBBBF19FCA56}"/>
+              </a:ext>
+            </a:extLst>
+          </p:cNvPr>
+          <p:cNvCxnSpPr/>
+          <p:nvPr/>
+        </p:nvCxnSpPr>
+        <p:spPr>
+          <a:xfrm>
+            <a:off x="2084371" y="4519030"/>
+            <a:ext cx="5562879" cy="0"/>
+          </a:xfrm>
+          <a:prstGeom prst="line">
+            <a:avLst/>
+          </a:prstGeom>
+          <a:ln>
+            <a:solidFill>
+              <a:srgbClr val="FF0000"/>
+            </a:solidFill>
+          </a:ln>
+        </p:spPr>
+        <p:style>
+          <a:lnRef idx="2">
+            <a:schemeClr val="accent1"/>
+          </a:lnRef>
+          <a:fillRef idx="0">
+            <a:schemeClr val="accent1"/>
+          </a:fillRef>
+          <a:effectRef idx="1">
+            <a:schemeClr val="accent1"/>
+          </a:effectRef>
+          <a:fontRef idx="minor">
+            <a:schemeClr val="tx1"/>
+          </a:fontRef>
+        </p:style>
+      </p:cxnSp>
+      <p:cxnSp>
+        <p:nvCxnSpPr>
+          <p:cNvPr id="225" name="Straight Connector 224">
+            <a:extLst>
+              <a:ext uri="{FF2B5EF4-FFF2-40B4-BE49-F238E27FC236}">
+                <a16:creationId xmlns:a16="http://schemas.microsoft.com/office/drawing/2014/main" id="{D6A2EDF6-F579-8ACE-F881-417A3BCA7C6B}"/>
+              </a:ext>
+            </a:extLst>
+          </p:cNvPr>
+          <p:cNvCxnSpPr>
+            <a:cxnSpLocks/>
+          </p:cNvCxnSpPr>
+          <p:nvPr/>
+        </p:nvCxnSpPr>
+        <p:spPr>
+          <a:xfrm>
+            <a:off x="7640877" y="4519030"/>
+            <a:ext cx="0" cy="988147"/>
+          </a:xfrm>
+          <a:prstGeom prst="line">
+            <a:avLst/>
+          </a:prstGeom>
+          <a:ln>
+            <a:solidFill>
+              <a:srgbClr val="FF0000"/>
+            </a:solidFill>
+          </a:ln>
+        </p:spPr>
+        <p:style>
+          <a:lnRef idx="2">
+            <a:schemeClr val="accent1"/>
+          </a:lnRef>
+          <a:fillRef idx="0">
+            <a:schemeClr val="accent1"/>
+          </a:fillRef>
+          <a:effectRef idx="1">
+            <a:schemeClr val="accent1"/>
+          </a:effectRef>
+          <a:fontRef idx="minor">
+            <a:schemeClr val="tx1"/>
+          </a:fontRef>
+        </p:style>
+      </p:cxnSp>
+      <p:cxnSp>
+        <p:nvCxnSpPr>
+          <p:cNvPr id="226" name="Straight Connector 225">
+            <a:extLst>
+              <a:ext uri="{FF2B5EF4-FFF2-40B4-BE49-F238E27FC236}">
+                <a16:creationId xmlns:a16="http://schemas.microsoft.com/office/drawing/2014/main" id="{C4812F22-65FD-E898-B7E1-F32778A4B9B9}"/>
+              </a:ext>
+            </a:extLst>
+          </p:cNvPr>
+          <p:cNvCxnSpPr>
+            <a:cxnSpLocks/>
+          </p:cNvCxnSpPr>
+          <p:nvPr/>
+        </p:nvCxnSpPr>
+        <p:spPr>
+          <a:xfrm>
+            <a:off x="7640877" y="5507177"/>
+            <a:ext cx="3187874" cy="0"/>
+          </a:xfrm>
+          <a:prstGeom prst="line">
+            <a:avLst/>
+          </a:prstGeom>
+          <a:ln>
+            <a:solidFill>
+              <a:srgbClr val="FF0000"/>
+            </a:solidFill>
+          </a:ln>
+        </p:spPr>
+        <p:style>
+          <a:lnRef idx="2">
+            <a:schemeClr val="accent1"/>
+          </a:lnRef>
+          <a:fillRef idx="0">
+            <a:schemeClr val="accent1"/>
+          </a:fillRef>
+          <a:effectRef idx="1">
+            <a:schemeClr val="accent1"/>
+          </a:effectRef>
+          <a:fontRef idx="minor">
+            <a:schemeClr val="tx1"/>
+          </a:fontRef>
+        </p:style>
+      </p:cxnSp>
+      <p:cxnSp>
+        <p:nvCxnSpPr>
+          <p:cNvPr id="232" name="Straight Connector 231">
+            <a:extLst>
+              <a:ext uri="{FF2B5EF4-FFF2-40B4-BE49-F238E27FC236}">
+                <a16:creationId xmlns:a16="http://schemas.microsoft.com/office/drawing/2014/main" id="{30E3AD78-8FA6-BA82-208E-18D9E5A06716}"/>
+              </a:ext>
+            </a:extLst>
+          </p:cNvPr>
+          <p:cNvCxnSpPr>
+            <a:cxnSpLocks/>
+          </p:cNvCxnSpPr>
+          <p:nvPr/>
+        </p:nvCxnSpPr>
+        <p:spPr>
+          <a:xfrm>
+            <a:off x="10824576" y="3775519"/>
+            <a:ext cx="0" cy="1731658"/>
+          </a:xfrm>
+          <a:prstGeom prst="line">
+            <a:avLst/>
+          </a:prstGeom>
+          <a:ln>
+            <a:solidFill>
+              <a:srgbClr val="FF0000"/>
+            </a:solidFill>
+          </a:ln>
+        </p:spPr>
+        <p:style>
+          <a:lnRef idx="2">
+            <a:schemeClr val="accent1"/>
+          </a:lnRef>
+          <a:fillRef idx="0">
+            <a:schemeClr val="accent1"/>
+          </a:fillRef>
+          <a:effectRef idx="1">
+            <a:schemeClr val="accent1"/>
+          </a:effectRef>
+          <a:fontRef idx="minor">
+            <a:schemeClr val="tx1"/>
+          </a:fontRef>
+        </p:style>
+      </p:cxnSp>
+      <p:cxnSp>
+        <p:nvCxnSpPr>
+          <p:cNvPr id="245" name="Straight Connector 244">
+            <a:extLst>
+              <a:ext uri="{FF2B5EF4-FFF2-40B4-BE49-F238E27FC236}">
+                <a16:creationId xmlns:a16="http://schemas.microsoft.com/office/drawing/2014/main" id="{39AFB14F-6112-67C7-1D8A-BA7417B161A0}"/>
+              </a:ext>
+            </a:extLst>
+          </p:cNvPr>
+          <p:cNvCxnSpPr>
+            <a:cxnSpLocks/>
+          </p:cNvCxnSpPr>
+          <p:nvPr/>
+        </p:nvCxnSpPr>
+        <p:spPr>
+          <a:xfrm>
+            <a:off x="3948435" y="4446046"/>
+            <a:ext cx="0" cy="191885"/>
+          </a:xfrm>
+          <a:prstGeom prst="line">
+            <a:avLst/>
+          </a:prstGeom>
+          <a:ln>
+            <a:solidFill>
+              <a:srgbClr val="FF0000"/>
+            </a:solidFill>
+          </a:ln>
+        </p:spPr>
+        <p:style>
+          <a:lnRef idx="2">
+            <a:schemeClr val="accent1"/>
+          </a:lnRef>
+          <a:fillRef idx="0">
+            <a:schemeClr val="accent1"/>
+          </a:fillRef>
+          <a:effectRef idx="1">
+            <a:schemeClr val="accent1"/>
+          </a:effectRef>
+          <a:fontRef idx="minor">
+            <a:schemeClr val="tx1"/>
+          </a:fontRef>
+        </p:style>
+      </p:cxnSp>
+      <p:cxnSp>
+        <p:nvCxnSpPr>
+          <p:cNvPr id="247" name="Straight Connector 246">
+            <a:extLst>
+              <a:ext uri="{FF2B5EF4-FFF2-40B4-BE49-F238E27FC236}">
+                <a16:creationId xmlns:a16="http://schemas.microsoft.com/office/drawing/2014/main" id="{596E7587-9BB0-4919-4830-3FF2A7DA3556}"/>
+              </a:ext>
+            </a:extLst>
+          </p:cNvPr>
+          <p:cNvCxnSpPr>
+            <a:cxnSpLocks/>
+          </p:cNvCxnSpPr>
+          <p:nvPr/>
+        </p:nvCxnSpPr>
+        <p:spPr>
+          <a:xfrm flipV="1">
+            <a:off x="3951361" y="4446046"/>
+            <a:ext cx="1365938" cy="8214"/>
+          </a:xfrm>
+          <a:prstGeom prst="line">
+            <a:avLst/>
+          </a:prstGeom>
+          <a:ln>
+            <a:solidFill>
+              <a:srgbClr val="FF0000"/>
+            </a:solidFill>
+          </a:ln>
+        </p:spPr>
+        <p:style>
+          <a:lnRef idx="2">
+            <a:schemeClr val="accent1"/>
+          </a:lnRef>
+          <a:fillRef idx="0">
+            <a:schemeClr val="accent1"/>
+          </a:fillRef>
+          <a:effectRef idx="1">
+            <a:schemeClr val="accent1"/>
+          </a:effectRef>
+          <a:fontRef idx="minor">
+            <a:schemeClr val="tx1"/>
+          </a:fontRef>
+        </p:style>
+      </p:cxnSp>
+      <p:cxnSp>
+        <p:nvCxnSpPr>
+          <p:cNvPr id="249" name="Straight Connector 248">
+            <a:extLst>
+              <a:ext uri="{FF2B5EF4-FFF2-40B4-BE49-F238E27FC236}">
+                <a16:creationId xmlns:a16="http://schemas.microsoft.com/office/drawing/2014/main" id="{AB18E49B-982E-20D1-A811-A6F628F2DEB6}"/>
+              </a:ext>
+            </a:extLst>
+          </p:cNvPr>
+          <p:cNvCxnSpPr>
+            <a:cxnSpLocks/>
+          </p:cNvCxnSpPr>
+          <p:nvPr/>
+        </p:nvCxnSpPr>
+        <p:spPr>
+          <a:xfrm>
+            <a:off x="3212956" y="3367023"/>
+            <a:ext cx="0" cy="1152007"/>
+          </a:xfrm>
+          <a:prstGeom prst="line">
+            <a:avLst/>
+          </a:prstGeom>
+          <a:ln>
+            <a:solidFill>
+              <a:srgbClr val="FF0000"/>
+            </a:solidFill>
+          </a:ln>
+        </p:spPr>
+        <p:style>
+          <a:lnRef idx="2">
+            <a:schemeClr val="accent1"/>
+          </a:lnRef>
+          <a:fillRef idx="0">
+            <a:schemeClr val="accent1"/>
+          </a:fillRef>
+          <a:effectRef idx="1">
+            <a:schemeClr val="accent1"/>
+          </a:effectRef>
+          <a:fontRef idx="minor">
+            <a:schemeClr val="tx1"/>
+          </a:fontRef>
+        </p:style>
+      </p:cxnSp>
+      <p:cxnSp>
+        <p:nvCxnSpPr>
+          <p:cNvPr id="251" name="Straight Connector 250">
+            <a:extLst>
+              <a:ext uri="{FF2B5EF4-FFF2-40B4-BE49-F238E27FC236}">
+                <a16:creationId xmlns:a16="http://schemas.microsoft.com/office/drawing/2014/main" id="{E4F768F4-B4A7-9F0B-E1C3-9411DF904D4D}"/>
+              </a:ext>
+            </a:extLst>
+          </p:cNvPr>
+          <p:cNvCxnSpPr>
+            <a:cxnSpLocks/>
+          </p:cNvCxnSpPr>
+          <p:nvPr/>
+        </p:nvCxnSpPr>
+        <p:spPr>
+          <a:xfrm>
+            <a:off x="5804838" y="3431793"/>
+            <a:ext cx="0" cy="1087237"/>
+          </a:xfrm>
+          <a:prstGeom prst="line">
+            <a:avLst/>
+          </a:prstGeom>
+          <a:ln>
+            <a:solidFill>
+              <a:srgbClr val="FF0000"/>
+            </a:solidFill>
+          </a:ln>
+        </p:spPr>
+        <p:style>
+          <a:lnRef idx="2">
+            <a:schemeClr val="accent1"/>
+          </a:lnRef>
+          <a:fillRef idx="0">
+            <a:schemeClr val="accent1"/>
+          </a:fillRef>
+          <a:effectRef idx="1">
+            <a:schemeClr val="accent1"/>
+          </a:effectRef>
+          <a:fontRef idx="minor">
+            <a:schemeClr val="tx1"/>
+          </a:fontRef>
+        </p:style>
+      </p:cxnSp>
+      <p:cxnSp>
+        <p:nvCxnSpPr>
+          <p:cNvPr id="254" name="Straight Connector 253">
+            <a:extLst>
+              <a:ext uri="{FF2B5EF4-FFF2-40B4-BE49-F238E27FC236}">
+                <a16:creationId xmlns:a16="http://schemas.microsoft.com/office/drawing/2014/main" id="{CE103A7F-F46B-8955-2C78-F9C376A22906}"/>
+              </a:ext>
+            </a:extLst>
+          </p:cNvPr>
+          <p:cNvCxnSpPr>
+            <a:cxnSpLocks/>
+          </p:cNvCxnSpPr>
+          <p:nvPr/>
+        </p:nvCxnSpPr>
+        <p:spPr>
+          <a:xfrm>
+            <a:off x="2289932" y="5377092"/>
+            <a:ext cx="546887" cy="0"/>
+          </a:xfrm>
+          <a:prstGeom prst="line">
+            <a:avLst/>
+          </a:prstGeom>
+          <a:ln>
+            <a:solidFill>
+              <a:srgbClr val="FF0000"/>
+            </a:solidFill>
+          </a:ln>
+        </p:spPr>
+        <p:style>
+          <a:lnRef idx="2">
+            <a:schemeClr val="accent1"/>
+          </a:lnRef>
+          <a:fillRef idx="0">
+            <a:schemeClr val="accent1"/>
+          </a:fillRef>
+          <a:effectRef idx="1">
+            <a:schemeClr val="accent1"/>
+          </a:effectRef>
+          <a:fontRef idx="minor">
+            <a:schemeClr val="tx1"/>
+          </a:fontRef>
+        </p:style>
+      </p:cxnSp>
+      <p:cxnSp>
+        <p:nvCxnSpPr>
+          <p:cNvPr id="32" name="Straight Connector 31">
+            <a:extLst>
+              <a:ext uri="{FF2B5EF4-FFF2-40B4-BE49-F238E27FC236}">
+                <a16:creationId xmlns:a16="http://schemas.microsoft.com/office/drawing/2014/main" id="{2CD7450B-0D9F-C2DA-3D4E-C052ACA0CE19}"/>
+              </a:ext>
+            </a:extLst>
+          </p:cNvPr>
+          <p:cNvCxnSpPr>
+            <a:cxnSpLocks/>
+          </p:cNvCxnSpPr>
+          <p:nvPr/>
+        </p:nvCxnSpPr>
+        <p:spPr>
+          <a:xfrm>
+            <a:off x="2836819" y="5377092"/>
+            <a:ext cx="0" cy="942289"/>
+          </a:xfrm>
+          <a:prstGeom prst="line">
+            <a:avLst/>
+          </a:prstGeom>
+          <a:ln>
+            <a:solidFill>
+              <a:srgbClr val="FF0000"/>
+            </a:solidFill>
+          </a:ln>
+        </p:spPr>
+        <p:style>
+          <a:lnRef idx="2">
+            <a:schemeClr val="accent1"/>
+          </a:lnRef>
+          <a:fillRef idx="0">
+            <a:schemeClr val="accent1"/>
+          </a:fillRef>
+          <a:effectRef idx="1">
+            <a:schemeClr val="accent1"/>
+          </a:effectRef>
+          <a:fontRef idx="minor">
+            <a:schemeClr val="tx1"/>
+          </a:fontRef>
+        </p:style>
+      </p:cxnSp>
+      <p:cxnSp>
+        <p:nvCxnSpPr>
+          <p:cNvPr id="35" name="Straight Connector 34">
+            <a:extLst>
+              <a:ext uri="{FF2B5EF4-FFF2-40B4-BE49-F238E27FC236}">
+                <a16:creationId xmlns:a16="http://schemas.microsoft.com/office/drawing/2014/main" id="{4811CB3A-5EA0-6FB3-830A-20E3BC7C4A18}"/>
+              </a:ext>
+            </a:extLst>
+          </p:cNvPr>
+          <p:cNvCxnSpPr>
+            <a:cxnSpLocks/>
+          </p:cNvCxnSpPr>
+          <p:nvPr/>
+        </p:nvCxnSpPr>
+        <p:spPr>
+          <a:xfrm>
+            <a:off x="2836819" y="6312340"/>
+            <a:ext cx="2348019" cy="0"/>
+          </a:xfrm>
+          <a:prstGeom prst="line">
+            <a:avLst/>
+          </a:prstGeom>
+          <a:ln>
+            <a:solidFill>
+              <a:srgbClr val="FF0000"/>
+            </a:solidFill>
+          </a:ln>
+        </p:spPr>
+        <p:style>
+          <a:lnRef idx="2">
+            <a:schemeClr val="accent1"/>
+          </a:lnRef>
+          <a:fillRef idx="0">
+            <a:schemeClr val="accent1"/>
+          </a:fillRef>
+          <a:effectRef idx="1">
+            <a:schemeClr val="accent1"/>
+          </a:effectRef>
+          <a:fontRef idx="minor">
+            <a:schemeClr val="tx1"/>
+          </a:fontRef>
+        </p:style>
+      </p:cxnSp>
+      <p:cxnSp>
+        <p:nvCxnSpPr>
+          <p:cNvPr id="37" name="Straight Connector 36">
+            <a:extLst>
+              <a:ext uri="{FF2B5EF4-FFF2-40B4-BE49-F238E27FC236}">
+                <a16:creationId xmlns:a16="http://schemas.microsoft.com/office/drawing/2014/main" id="{FF860DA0-FA5D-FD00-900B-52241595AF14}"/>
+              </a:ext>
+            </a:extLst>
+          </p:cNvPr>
+          <p:cNvCxnSpPr>
+            <a:cxnSpLocks/>
+          </p:cNvCxnSpPr>
+          <p:nvPr/>
+        </p:nvCxnSpPr>
+        <p:spPr>
+          <a:xfrm>
+            <a:off x="5184838" y="5377092"/>
+            <a:ext cx="0" cy="942289"/>
+          </a:xfrm>
+          <a:prstGeom prst="line">
+            <a:avLst/>
+          </a:prstGeom>
+          <a:ln>
+            <a:solidFill>
+              <a:srgbClr val="FF0000"/>
+            </a:solidFill>
+          </a:ln>
+        </p:spPr>
+        <p:style>
+          <a:lnRef idx="2">
+            <a:schemeClr val="accent1"/>
+          </a:lnRef>
+          <a:fillRef idx="0">
+            <a:schemeClr val="accent1"/>
+          </a:fillRef>
+          <a:effectRef idx="1">
+            <a:schemeClr val="accent1"/>
+          </a:effectRef>
+          <a:fontRef idx="minor">
+            <a:schemeClr val="tx1"/>
+          </a:fontRef>
+        </p:style>
+      </p:cxnSp>
+      <p:cxnSp>
+        <p:nvCxnSpPr>
+          <p:cNvPr id="39" name="Straight Connector 38">
+            <a:extLst>
+              <a:ext uri="{FF2B5EF4-FFF2-40B4-BE49-F238E27FC236}">
+                <a16:creationId xmlns:a16="http://schemas.microsoft.com/office/drawing/2014/main" id="{6401E5D0-BC91-5B1E-1786-F7D003B6FC2E}"/>
+              </a:ext>
+            </a:extLst>
+          </p:cNvPr>
+          <p:cNvCxnSpPr>
+            <a:cxnSpLocks/>
+          </p:cNvCxnSpPr>
+          <p:nvPr/>
+        </p:nvCxnSpPr>
+        <p:spPr>
+          <a:xfrm>
+            <a:off x="5184838" y="5377092"/>
+            <a:ext cx="1082708" cy="0"/>
+          </a:xfrm>
+          <a:prstGeom prst="line">
+            <a:avLst/>
+          </a:prstGeom>
+          <a:ln>
+            <a:solidFill>
+              <a:srgbClr val="FF0000"/>
+            </a:solidFill>
+          </a:ln>
+        </p:spPr>
+        <p:style>
+          <a:lnRef idx="2">
+            <a:schemeClr val="accent1"/>
+          </a:lnRef>
+          <a:fillRef idx="0">
+            <a:schemeClr val="accent1"/>
+          </a:fillRef>
+          <a:effectRef idx="1">
+            <a:schemeClr val="accent1"/>
+          </a:effectRef>
+          <a:fontRef idx="minor">
+            <a:schemeClr val="tx1"/>
+          </a:fontRef>
+        </p:style>
+      </p:cxnSp>
+      <p:cxnSp>
+        <p:nvCxnSpPr>
+          <p:cNvPr id="52" name="Straight Connector 51">
+            <a:extLst>
+              <a:ext uri="{FF2B5EF4-FFF2-40B4-BE49-F238E27FC236}">
+                <a16:creationId xmlns:a16="http://schemas.microsoft.com/office/drawing/2014/main" id="{DFA4CD11-6DFC-750A-C7E0-2BE6805685AB}"/>
+              </a:ext>
+            </a:extLst>
+          </p:cNvPr>
+          <p:cNvCxnSpPr>
+            <a:cxnSpLocks/>
+          </p:cNvCxnSpPr>
+          <p:nvPr/>
+        </p:nvCxnSpPr>
+        <p:spPr>
+          <a:xfrm>
+            <a:off x="6267546" y="3429000"/>
+            <a:ext cx="0" cy="1954939"/>
+          </a:xfrm>
+          <a:prstGeom prst="line">
+            <a:avLst/>
+          </a:prstGeom>
+          <a:ln>
+            <a:solidFill>
+              <a:srgbClr val="FF0000"/>
+            </a:solidFill>
+          </a:ln>
+        </p:spPr>
+        <p:style>
+          <a:lnRef idx="2">
+            <a:schemeClr val="accent1"/>
+          </a:lnRef>
+          <a:fillRef idx="0">
+            <a:schemeClr val="accent1"/>
+          </a:fillRef>
+          <a:effectRef idx="1">
+            <a:schemeClr val="accent1"/>
+          </a:effectRef>
+          <a:fontRef idx="minor">
+            <a:schemeClr val="tx1"/>
+          </a:fontRef>
+        </p:style>
+      </p:cxnSp>
+      <p:cxnSp>
+        <p:nvCxnSpPr>
+          <p:cNvPr id="262" name="Straight Connector 261">
+            <a:extLst>
+              <a:ext uri="{FF2B5EF4-FFF2-40B4-BE49-F238E27FC236}">
+                <a16:creationId xmlns:a16="http://schemas.microsoft.com/office/drawing/2014/main" id="{C1E5A6DD-03BA-3249-DD31-A5233A9B590D}"/>
+              </a:ext>
+            </a:extLst>
+          </p:cNvPr>
+          <p:cNvCxnSpPr>
+            <a:cxnSpLocks/>
+          </p:cNvCxnSpPr>
+          <p:nvPr/>
+        </p:nvCxnSpPr>
+        <p:spPr>
+          <a:xfrm>
+            <a:off x="9433629" y="5238062"/>
+            <a:ext cx="0" cy="269115"/>
+          </a:xfrm>
+          <a:prstGeom prst="line">
+            <a:avLst/>
+          </a:prstGeom>
+          <a:ln>
+            <a:solidFill>
+              <a:srgbClr val="FF0000"/>
+            </a:solidFill>
+          </a:ln>
+        </p:spPr>
+        <p:style>
+          <a:lnRef idx="2">
+            <a:schemeClr val="accent1"/>
+          </a:lnRef>
+          <a:fillRef idx="0">
+            <a:schemeClr val="accent1"/>
+          </a:fillRef>
+          <a:effectRef idx="1">
+            <a:schemeClr val="accent1"/>
+          </a:effectRef>
+          <a:fontRef idx="minor">
+            <a:schemeClr val="tx1"/>
+          </a:fontRef>
+        </p:style>
+      </p:cxnSp>
+      <p:sp>
+        <p:nvSpPr>
+          <p:cNvPr id="265" name="TextBox 264">
+            <a:extLst>
+              <a:ext uri="{FF2B5EF4-FFF2-40B4-BE49-F238E27FC236}">
+                <a16:creationId xmlns:a16="http://schemas.microsoft.com/office/drawing/2014/main" id="{8DC1E7F7-44C8-A5AE-1A91-89D9DD8A1CC6}"/>
+              </a:ext>
+            </a:extLst>
+          </p:cNvPr>
+          <p:cNvSpPr txBox="1"/>
+          <p:nvPr/>
+        </p:nvSpPr>
+        <p:spPr>
+          <a:xfrm>
+            <a:off x="8579542" y="5038538"/>
+            <a:ext cx="1131851" cy="338554"/>
+          </a:xfrm>
+          <a:prstGeom prst="rect">
+            <a:avLst/>
+          </a:prstGeom>
+          <a:noFill/>
+        </p:spPr>
+        <p:txBody>
+          <a:bodyPr wrap="square" rtlCol="0">
+            <a:spAutoFit/>
+          </a:bodyPr>
+          <a:lstStyle/>
+          <a:p>
+            <a:r>
+              <a:rPr lang="en-US" sz="800" dirty="0" err="1"/>
+              <a:t>ex_mem_jump</a:t>
+            </a:r>
+            <a:endParaRPr lang="en-US" sz="800" dirty="0"/>
+          </a:p>
+          <a:p>
+            <a:r>
+              <a:rPr lang="en-US" sz="800" dirty="0" err="1"/>
+              <a:t>ex_mem_branch</a:t>
+            </a:r>
+            <a:endParaRPr lang="en-US" sz="800" dirty="0"/>
+          </a:p>
+        </p:txBody>
+      </p:sp>
+      <p:sp>
+        <p:nvSpPr>
+          <p:cNvPr id="266" name="TextBox 265">
+            <a:extLst>
+              <a:ext uri="{FF2B5EF4-FFF2-40B4-BE49-F238E27FC236}">
+                <a16:creationId xmlns:a16="http://schemas.microsoft.com/office/drawing/2014/main" id="{56B69CF7-BF1C-C7CB-FB61-0DA857690100}"/>
+              </a:ext>
+            </a:extLst>
+          </p:cNvPr>
+          <p:cNvSpPr txBox="1"/>
+          <p:nvPr/>
+        </p:nvSpPr>
+        <p:spPr>
+          <a:xfrm rot="5400000">
+            <a:off x="5813780" y="3766339"/>
+            <a:ext cx="1131851" cy="215444"/>
+          </a:xfrm>
+          <a:prstGeom prst="rect">
+            <a:avLst/>
+          </a:prstGeom>
+          <a:noFill/>
+        </p:spPr>
+        <p:txBody>
+          <a:bodyPr wrap="square" rtlCol="0">
+            <a:spAutoFit/>
+          </a:bodyPr>
+          <a:lstStyle/>
+          <a:p>
+            <a:r>
+              <a:rPr lang="en-US" sz="800" dirty="0" err="1"/>
+              <a:t>id_ex_alu_op</a:t>
+            </a:r>
+            <a:endParaRPr lang="en-US" sz="800" dirty="0"/>
+          </a:p>
+        </p:txBody>
+      </p:sp>
+      <p:sp>
+        <p:nvSpPr>
+          <p:cNvPr id="267" name="TextBox 266">
+            <a:extLst>
+              <a:ext uri="{FF2B5EF4-FFF2-40B4-BE49-F238E27FC236}">
+                <a16:creationId xmlns:a16="http://schemas.microsoft.com/office/drawing/2014/main" id="{D032C701-4DDE-B4D0-C493-A91A3379318D}"/>
+              </a:ext>
+            </a:extLst>
+          </p:cNvPr>
+          <p:cNvSpPr txBox="1"/>
+          <p:nvPr/>
+        </p:nvSpPr>
+        <p:spPr>
+          <a:xfrm rot="5400000">
+            <a:off x="5348165" y="4047859"/>
+            <a:ext cx="1131851" cy="215444"/>
+          </a:xfrm>
+          <a:prstGeom prst="rect">
+            <a:avLst/>
+          </a:prstGeom>
+          <a:noFill/>
+        </p:spPr>
+        <p:txBody>
+          <a:bodyPr wrap="square" rtlCol="0">
+            <a:spAutoFit/>
+          </a:bodyPr>
+          <a:lstStyle/>
+          <a:p>
+            <a:r>
+              <a:rPr lang="en-US" sz="800" dirty="0" err="1"/>
+              <a:t>id_ex_alu_src</a:t>
+            </a:r>
+            <a:endParaRPr lang="en-US" sz="800" dirty="0"/>
+          </a:p>
+        </p:txBody>
+      </p:sp>
+      <p:cxnSp>
+        <p:nvCxnSpPr>
+          <p:cNvPr id="268" name="Straight Connector 267">
+            <a:extLst>
+              <a:ext uri="{FF2B5EF4-FFF2-40B4-BE49-F238E27FC236}">
+                <a16:creationId xmlns:a16="http://schemas.microsoft.com/office/drawing/2014/main" id="{7F2ABCA0-35ED-EEDE-4ADD-6C31BF4143F0}"/>
+              </a:ext>
+            </a:extLst>
+          </p:cNvPr>
+          <p:cNvCxnSpPr>
+            <a:cxnSpLocks/>
+          </p:cNvCxnSpPr>
+          <p:nvPr/>
+        </p:nvCxnSpPr>
+        <p:spPr>
+          <a:xfrm>
+            <a:off x="7641234" y="3110482"/>
+            <a:ext cx="0" cy="1407517"/>
+          </a:xfrm>
+          <a:prstGeom prst="line">
+            <a:avLst/>
+          </a:prstGeom>
+          <a:ln>
+            <a:solidFill>
+              <a:srgbClr val="FF0000"/>
+            </a:solidFill>
+          </a:ln>
+        </p:spPr>
+        <p:style>
+          <a:lnRef idx="2">
+            <a:schemeClr val="accent1"/>
+          </a:lnRef>
+          <a:fillRef idx="0">
+            <a:schemeClr val="accent1"/>
+          </a:fillRef>
+          <a:effectRef idx="1">
+            <a:schemeClr val="accent1"/>
+          </a:effectRef>
+          <a:fontRef idx="minor">
+            <a:schemeClr val="tx1"/>
+          </a:fontRef>
+        </p:style>
+      </p:cxnSp>
+      <p:cxnSp>
+        <p:nvCxnSpPr>
+          <p:cNvPr id="270" name="Straight Connector 269">
+            <a:extLst>
+              <a:ext uri="{FF2B5EF4-FFF2-40B4-BE49-F238E27FC236}">
+                <a16:creationId xmlns:a16="http://schemas.microsoft.com/office/drawing/2014/main" id="{5037A5A3-D2DB-0AA7-6410-AE664CE19722}"/>
+              </a:ext>
+            </a:extLst>
+          </p:cNvPr>
+          <p:cNvCxnSpPr>
+            <a:cxnSpLocks/>
+          </p:cNvCxnSpPr>
+          <p:nvPr/>
+        </p:nvCxnSpPr>
+        <p:spPr>
+          <a:xfrm>
+            <a:off x="7636702" y="3110482"/>
+            <a:ext cx="1087676" cy="0"/>
+          </a:xfrm>
+          <a:prstGeom prst="line">
+            <a:avLst/>
+          </a:prstGeom>
+          <a:ln>
+            <a:solidFill>
+              <a:srgbClr val="FF0000"/>
+            </a:solidFill>
+          </a:ln>
+        </p:spPr>
+        <p:style>
+          <a:lnRef idx="2">
+            <a:schemeClr val="accent1"/>
+          </a:lnRef>
+          <a:fillRef idx="0">
+            <a:schemeClr val="accent1"/>
+          </a:fillRef>
+          <a:effectRef idx="1">
+            <a:schemeClr val="accent1"/>
+          </a:effectRef>
+          <a:fontRef idx="minor">
+            <a:schemeClr val="tx1"/>
+          </a:fontRef>
+        </p:style>
+      </p:cxnSp>
+      <p:cxnSp>
+        <p:nvCxnSpPr>
+          <p:cNvPr id="272" name="Straight Connector 271">
+            <a:extLst>
+              <a:ext uri="{FF2B5EF4-FFF2-40B4-BE49-F238E27FC236}">
+                <a16:creationId xmlns:a16="http://schemas.microsoft.com/office/drawing/2014/main" id="{2C8407A0-4E94-1537-3EC8-9C33C3B2A5FD}"/>
+              </a:ext>
+            </a:extLst>
+          </p:cNvPr>
+          <p:cNvCxnSpPr>
+            <a:cxnSpLocks/>
+          </p:cNvCxnSpPr>
+          <p:nvPr/>
+        </p:nvCxnSpPr>
+        <p:spPr>
+          <a:xfrm>
+            <a:off x="8719227" y="2602555"/>
+            <a:ext cx="0" cy="507927"/>
+          </a:xfrm>
+          <a:prstGeom prst="line">
+            <a:avLst/>
+          </a:prstGeom>
+          <a:ln>
+            <a:solidFill>
+              <a:srgbClr val="FF0000"/>
+            </a:solidFill>
+          </a:ln>
+        </p:spPr>
+        <p:style>
+          <a:lnRef idx="2">
+            <a:schemeClr val="accent1"/>
+          </a:lnRef>
+          <a:fillRef idx="0">
+            <a:schemeClr val="accent1"/>
+          </a:fillRef>
+          <a:effectRef idx="1">
+            <a:schemeClr val="accent1"/>
+          </a:effectRef>
+          <a:fontRef idx="minor">
+            <a:schemeClr val="tx1"/>
+          </a:fontRef>
+        </p:style>
+      </p:cxnSp>
+      <p:cxnSp>
+        <p:nvCxnSpPr>
+          <p:cNvPr id="275" name="Straight Connector 274">
+            <a:extLst>
+              <a:ext uri="{FF2B5EF4-FFF2-40B4-BE49-F238E27FC236}">
+                <a16:creationId xmlns:a16="http://schemas.microsoft.com/office/drawing/2014/main" id="{3102ED13-29C2-4E5B-D31D-307F2716A85D}"/>
+              </a:ext>
+            </a:extLst>
+          </p:cNvPr>
+          <p:cNvCxnSpPr>
+            <a:cxnSpLocks/>
+          </p:cNvCxnSpPr>
+          <p:nvPr/>
+        </p:nvCxnSpPr>
+        <p:spPr>
+          <a:xfrm>
+            <a:off x="8370586" y="2595341"/>
+            <a:ext cx="0" cy="507927"/>
+          </a:xfrm>
+          <a:prstGeom prst="line">
+            <a:avLst/>
+          </a:prstGeom>
+          <a:ln>
+            <a:solidFill>
+              <a:srgbClr val="FF0000"/>
+            </a:solidFill>
+          </a:ln>
+        </p:spPr>
+        <p:style>
+          <a:lnRef idx="2">
+            <a:schemeClr val="accent1"/>
+          </a:lnRef>
+          <a:fillRef idx="0">
+            <a:schemeClr val="accent1"/>
+          </a:fillRef>
+          <a:effectRef idx="1">
+            <a:schemeClr val="accent1"/>
+          </a:effectRef>
+          <a:fontRef idx="minor">
+            <a:schemeClr val="tx1"/>
+          </a:fontRef>
+        </p:style>
+      </p:cxnSp>
+      <p:cxnSp>
+        <p:nvCxnSpPr>
+          <p:cNvPr id="277" name="Straight Connector 276">
+            <a:extLst>
+              <a:ext uri="{FF2B5EF4-FFF2-40B4-BE49-F238E27FC236}">
+                <a16:creationId xmlns:a16="http://schemas.microsoft.com/office/drawing/2014/main" id="{6C0760B5-70B1-0847-5670-2D3B4A330442}"/>
+              </a:ext>
+            </a:extLst>
+          </p:cNvPr>
+          <p:cNvCxnSpPr>
+            <a:cxnSpLocks/>
+          </p:cNvCxnSpPr>
+          <p:nvPr/>
+        </p:nvCxnSpPr>
+        <p:spPr>
+          <a:xfrm>
+            <a:off x="2529402" y="4407834"/>
+            <a:ext cx="0" cy="658944"/>
+          </a:xfrm>
+          <a:prstGeom prst="line">
+            <a:avLst/>
+          </a:prstGeom>
+          <a:ln>
+            <a:solidFill>
+              <a:srgbClr val="FF0000"/>
+            </a:solidFill>
+          </a:ln>
+        </p:spPr>
+        <p:style>
+          <a:lnRef idx="2">
+            <a:schemeClr val="accent1"/>
+          </a:lnRef>
+          <a:fillRef idx="0">
+            <a:schemeClr val="accent1"/>
+          </a:fillRef>
+          <a:effectRef idx="1">
+            <a:schemeClr val="accent1"/>
+          </a:effectRef>
+          <a:fontRef idx="minor">
+            <a:schemeClr val="tx1"/>
+          </a:fontRef>
+        </p:style>
+      </p:cxnSp>
+      <p:sp>
+        <p:nvSpPr>
+          <p:cNvPr id="281" name="TextBox 280">
+            <a:extLst>
+              <a:ext uri="{FF2B5EF4-FFF2-40B4-BE49-F238E27FC236}">
+                <a16:creationId xmlns:a16="http://schemas.microsoft.com/office/drawing/2014/main" id="{B8D8EEDA-0105-8B8D-DB43-ED388541D7DB}"/>
+              </a:ext>
+            </a:extLst>
+          </p:cNvPr>
+          <p:cNvSpPr txBox="1"/>
+          <p:nvPr/>
+        </p:nvSpPr>
+        <p:spPr>
+          <a:xfrm>
+            <a:off x="2266339" y="5057925"/>
+            <a:ext cx="861489" cy="215444"/>
+          </a:xfrm>
+          <a:prstGeom prst="rect">
+            <a:avLst/>
+          </a:prstGeom>
+          <a:noFill/>
+        </p:spPr>
+        <p:txBody>
+          <a:bodyPr wrap="square" rtlCol="0">
+            <a:spAutoFit/>
+          </a:bodyPr>
+          <a:lstStyle/>
+          <a:p>
+            <a:pPr algn="ctr"/>
+            <a:r>
+              <a:rPr lang="en-US" sz="800" dirty="0" err="1"/>
+              <a:t>if_id_instr</a:t>
+            </a:r>
+            <a:endParaRPr lang="en-US" sz="800" dirty="0"/>
+          </a:p>
+        </p:txBody>
+      </p:sp>
+      <p:sp>
+        <p:nvSpPr>
+          <p:cNvPr id="282" name="TextBox 281">
+            <a:extLst>
+              <a:ext uri="{FF2B5EF4-FFF2-40B4-BE49-F238E27FC236}">
+                <a16:creationId xmlns:a16="http://schemas.microsoft.com/office/drawing/2014/main" id="{BA222524-EA9B-AD1B-8AA5-1B863462207B}"/>
+              </a:ext>
+            </a:extLst>
+          </p:cNvPr>
+          <p:cNvSpPr txBox="1"/>
+          <p:nvPr/>
+        </p:nvSpPr>
+        <p:spPr>
+          <a:xfrm rot="5400000">
+            <a:off x="10519677" y="4183742"/>
+            <a:ext cx="1131851" cy="461665"/>
+          </a:xfrm>
+          <a:prstGeom prst="rect">
+            <a:avLst/>
+          </a:prstGeom>
+          <a:noFill/>
+        </p:spPr>
+        <p:txBody>
+          <a:bodyPr wrap="square" rtlCol="0">
+            <a:spAutoFit/>
+          </a:bodyPr>
+          <a:lstStyle/>
+          <a:p>
+            <a:r>
+              <a:rPr lang="en-US" sz="800" dirty="0" err="1"/>
+              <a:t>mem_wb_read</a:t>
+            </a:r>
+            <a:endParaRPr lang="en-US" sz="800" dirty="0"/>
+          </a:p>
+          <a:p>
+            <a:r>
+              <a:rPr lang="en-US" sz="800" dirty="0" err="1"/>
+              <a:t>mem_wb_load_addr</a:t>
+            </a:r>
+            <a:endParaRPr lang="en-US" sz="800" dirty="0"/>
+          </a:p>
+          <a:p>
+            <a:r>
+              <a:rPr lang="en-US" sz="800" dirty="0" err="1"/>
+              <a:t>mem_wb_re_write</a:t>
+            </a:r>
+            <a:endParaRPr lang="en-US" sz="800" dirty="0"/>
           </a:p>
         </p:txBody>
       </p:sp>
